--- a/~sasano/lecture/proglang/26/proglang2.pptx
+++ b/~sasano/lecture/proglang/26/proglang2.pptx
@@ -127,6 +127,22 @@
       </a:defRPr>
     </a:lvl9pPr>
   </p:defaultTextStyle>
+  <p:extLst>
+    <p:ext uri="{EFAFB233-063F-42B5-8137-9DF3F51BA10A}">
+      <p15:sldGuideLst xmlns:p15="http://schemas.microsoft.com/office/powerpoint/2012/main">
+        <p15:guide id="1" orient="horz" pos="2160">
+          <p15:clr>
+            <a:srgbClr val="A4A3A4"/>
+          </p15:clr>
+        </p15:guide>
+        <p15:guide id="2" pos="2880">
+          <p15:clr>
+            <a:srgbClr val="A4A3A4"/>
+          </p15:clr>
+        </p15:guide>
+      </p15:sldGuideLst>
+    </p:ext>
+  </p:extLst>
 </p:presentation>
 </file>
 
@@ -168,10 +184,9 @@
           <a:lstStyle/>
           <a:p>
             <a:r>
-              <a:rPr kumimoji="1" lang="ja-JP" altLang="en-US" smtClean="0"/>
+              <a:rPr kumimoji="1" lang="ja-JP" altLang="en-US"/>
               <a:t>マスタ タイトルの書式設定</a:t>
             </a:r>
-            <a:endParaRPr kumimoji="1" lang="ja-JP" altLang="en-US"/>
           </a:p>
         </p:txBody>
       </p:sp>
@@ -287,10 +302,9 @@
           </a:lstStyle>
           <a:p>
             <a:r>
-              <a:rPr kumimoji="1" lang="ja-JP" altLang="en-US" smtClean="0"/>
+              <a:rPr kumimoji="1" lang="ja-JP" altLang="en-US"/>
               <a:t>マスタ サブタイトルの書式設定</a:t>
             </a:r>
-            <a:endParaRPr kumimoji="1" lang="ja-JP" altLang="en-US"/>
           </a:p>
         </p:txBody>
       </p:sp>
@@ -312,7 +326,7 @@
             <a:fld id="{E90ED720-0104-4369-84BC-D37694168613}" type="datetimeFigureOut">
               <a:rPr kumimoji="1" lang="ja-JP" altLang="en-US" smtClean="0"/>
               <a:pPr/>
-              <a:t>18/10/10</a:t>
+              <a:t>2026/9/28</a:t>
             </a:fld>
             <a:endParaRPr kumimoji="1" lang="ja-JP" altLang="en-US"/>
           </a:p>
@@ -402,10 +416,9 @@
           <a:lstStyle/>
           <a:p>
             <a:r>
-              <a:rPr kumimoji="1" lang="ja-JP" altLang="en-US" smtClean="0"/>
+              <a:rPr kumimoji="1" lang="ja-JP" altLang="en-US"/>
               <a:t>マスタ タイトルの書式設定</a:t>
             </a:r>
-            <a:endParaRPr kumimoji="1" lang="ja-JP" altLang="en-US"/>
           </a:p>
         </p:txBody>
       </p:sp>
@@ -426,70 +439,69 @@
           <a:p>
             <a:pPr lvl="0"/>
             <a:r>
-              <a:rPr kumimoji="1" lang="ja-JP" altLang="en-US" smtClean="0"/>
+              <a:rPr kumimoji="1" lang="ja-JP" altLang="en-US"/>
               <a:t>マスタ テキストの書式設定</a:t>
             </a:r>
           </a:p>
           <a:p>
             <a:pPr lvl="1"/>
             <a:r>
-              <a:rPr kumimoji="1" lang="ja-JP" altLang="en-US" smtClean="0"/>
+              <a:rPr kumimoji="1" lang="ja-JP" altLang="en-US"/>
               <a:t>第 </a:t>
             </a:r>
             <a:r>
-              <a:rPr kumimoji="1" lang="en-US" altLang="ja-JP" smtClean="0"/>
+              <a:rPr kumimoji="1" lang="en-US" altLang="ja-JP"/>
               <a:t>2 </a:t>
             </a:r>
             <a:r>
-              <a:rPr kumimoji="1" lang="ja-JP" altLang="en-US" smtClean="0"/>
+              <a:rPr kumimoji="1" lang="ja-JP" altLang="en-US"/>
               <a:t>レベル</a:t>
             </a:r>
           </a:p>
           <a:p>
             <a:pPr lvl="2"/>
             <a:r>
-              <a:rPr kumimoji="1" lang="ja-JP" altLang="en-US" smtClean="0"/>
+              <a:rPr kumimoji="1" lang="ja-JP" altLang="en-US"/>
               <a:t>第 </a:t>
             </a:r>
             <a:r>
-              <a:rPr kumimoji="1" lang="en-US" altLang="ja-JP" smtClean="0"/>
+              <a:rPr kumimoji="1" lang="en-US" altLang="ja-JP"/>
               <a:t>3 </a:t>
             </a:r>
             <a:r>
-              <a:rPr kumimoji="1" lang="ja-JP" altLang="en-US" smtClean="0"/>
+              <a:rPr kumimoji="1" lang="ja-JP" altLang="en-US"/>
               <a:t>レベル</a:t>
             </a:r>
           </a:p>
           <a:p>
             <a:pPr lvl="3"/>
             <a:r>
-              <a:rPr kumimoji="1" lang="ja-JP" altLang="en-US" smtClean="0"/>
+              <a:rPr kumimoji="1" lang="ja-JP" altLang="en-US"/>
               <a:t>第 </a:t>
             </a:r>
             <a:r>
-              <a:rPr kumimoji="1" lang="en-US" altLang="ja-JP" smtClean="0"/>
+              <a:rPr kumimoji="1" lang="en-US" altLang="ja-JP"/>
               <a:t>4 </a:t>
             </a:r>
             <a:r>
-              <a:rPr kumimoji="1" lang="ja-JP" altLang="en-US" smtClean="0"/>
+              <a:rPr kumimoji="1" lang="ja-JP" altLang="en-US"/>
               <a:t>レベル</a:t>
             </a:r>
           </a:p>
           <a:p>
             <a:pPr lvl="4"/>
             <a:r>
-              <a:rPr kumimoji="1" lang="ja-JP" altLang="en-US" smtClean="0"/>
+              <a:rPr kumimoji="1" lang="ja-JP" altLang="en-US"/>
               <a:t>第 </a:t>
             </a:r>
             <a:r>
-              <a:rPr kumimoji="1" lang="en-US" altLang="ja-JP" smtClean="0"/>
+              <a:rPr kumimoji="1" lang="en-US" altLang="ja-JP"/>
               <a:t>5 </a:t>
             </a:r>
             <a:r>
-              <a:rPr kumimoji="1" lang="ja-JP" altLang="en-US" smtClean="0"/>
+              <a:rPr kumimoji="1" lang="ja-JP" altLang="en-US"/>
               <a:t>レベル</a:t>
             </a:r>
-            <a:endParaRPr kumimoji="1" lang="ja-JP" altLang="en-US"/>
           </a:p>
         </p:txBody>
       </p:sp>
@@ -511,7 +523,7 @@
             <a:fld id="{E90ED720-0104-4369-84BC-D37694168613}" type="datetimeFigureOut">
               <a:rPr kumimoji="1" lang="ja-JP" altLang="en-US" smtClean="0"/>
               <a:pPr/>
-              <a:t>18/10/10</a:t>
+              <a:t>2026/9/28</a:t>
             </a:fld>
             <a:endParaRPr kumimoji="1" lang="ja-JP" altLang="en-US"/>
           </a:p>
@@ -606,10 +618,9 @@
           <a:lstStyle/>
           <a:p>
             <a:r>
-              <a:rPr kumimoji="1" lang="ja-JP" altLang="en-US" smtClean="0"/>
+              <a:rPr kumimoji="1" lang="ja-JP" altLang="en-US"/>
               <a:t>マスタ タイトルの書式設定</a:t>
             </a:r>
-            <a:endParaRPr kumimoji="1" lang="ja-JP" altLang="en-US"/>
           </a:p>
         </p:txBody>
       </p:sp>
@@ -635,70 +646,69 @@
           <a:p>
             <a:pPr lvl="0"/>
             <a:r>
-              <a:rPr kumimoji="1" lang="ja-JP" altLang="en-US" smtClean="0"/>
+              <a:rPr kumimoji="1" lang="ja-JP" altLang="en-US"/>
               <a:t>マスタ テキストの書式設定</a:t>
             </a:r>
           </a:p>
           <a:p>
             <a:pPr lvl="1"/>
             <a:r>
-              <a:rPr kumimoji="1" lang="ja-JP" altLang="en-US" smtClean="0"/>
+              <a:rPr kumimoji="1" lang="ja-JP" altLang="en-US"/>
               <a:t>第 </a:t>
             </a:r>
             <a:r>
-              <a:rPr kumimoji="1" lang="en-US" altLang="ja-JP" smtClean="0"/>
+              <a:rPr kumimoji="1" lang="en-US" altLang="ja-JP"/>
               <a:t>2 </a:t>
             </a:r>
             <a:r>
-              <a:rPr kumimoji="1" lang="ja-JP" altLang="en-US" smtClean="0"/>
+              <a:rPr kumimoji="1" lang="ja-JP" altLang="en-US"/>
               <a:t>レベル</a:t>
             </a:r>
           </a:p>
           <a:p>
             <a:pPr lvl="2"/>
             <a:r>
-              <a:rPr kumimoji="1" lang="ja-JP" altLang="en-US" smtClean="0"/>
+              <a:rPr kumimoji="1" lang="ja-JP" altLang="en-US"/>
               <a:t>第 </a:t>
             </a:r>
             <a:r>
-              <a:rPr kumimoji="1" lang="en-US" altLang="ja-JP" smtClean="0"/>
+              <a:rPr kumimoji="1" lang="en-US" altLang="ja-JP"/>
               <a:t>3 </a:t>
             </a:r>
             <a:r>
-              <a:rPr kumimoji="1" lang="ja-JP" altLang="en-US" smtClean="0"/>
+              <a:rPr kumimoji="1" lang="ja-JP" altLang="en-US"/>
               <a:t>レベル</a:t>
             </a:r>
           </a:p>
           <a:p>
             <a:pPr lvl="3"/>
             <a:r>
-              <a:rPr kumimoji="1" lang="ja-JP" altLang="en-US" smtClean="0"/>
+              <a:rPr kumimoji="1" lang="ja-JP" altLang="en-US"/>
               <a:t>第 </a:t>
             </a:r>
             <a:r>
-              <a:rPr kumimoji="1" lang="en-US" altLang="ja-JP" smtClean="0"/>
+              <a:rPr kumimoji="1" lang="en-US" altLang="ja-JP"/>
               <a:t>4 </a:t>
             </a:r>
             <a:r>
-              <a:rPr kumimoji="1" lang="ja-JP" altLang="en-US" smtClean="0"/>
+              <a:rPr kumimoji="1" lang="ja-JP" altLang="en-US"/>
               <a:t>レベル</a:t>
             </a:r>
           </a:p>
           <a:p>
             <a:pPr lvl="4"/>
             <a:r>
-              <a:rPr kumimoji="1" lang="ja-JP" altLang="en-US" smtClean="0"/>
+              <a:rPr kumimoji="1" lang="ja-JP" altLang="en-US"/>
               <a:t>第 </a:t>
             </a:r>
             <a:r>
-              <a:rPr kumimoji="1" lang="en-US" altLang="ja-JP" smtClean="0"/>
+              <a:rPr kumimoji="1" lang="en-US" altLang="ja-JP"/>
               <a:t>5 </a:t>
             </a:r>
             <a:r>
-              <a:rPr kumimoji="1" lang="ja-JP" altLang="en-US" smtClean="0"/>
+              <a:rPr kumimoji="1" lang="ja-JP" altLang="en-US"/>
               <a:t>レベル</a:t>
             </a:r>
-            <a:endParaRPr kumimoji="1" lang="ja-JP" altLang="en-US"/>
           </a:p>
         </p:txBody>
       </p:sp>
@@ -720,7 +730,7 @@
             <a:fld id="{E90ED720-0104-4369-84BC-D37694168613}" type="datetimeFigureOut">
               <a:rPr kumimoji="1" lang="ja-JP" altLang="en-US" smtClean="0"/>
               <a:pPr/>
-              <a:t>18/10/10</a:t>
+              <a:t>2026/9/28</a:t>
             </a:fld>
             <a:endParaRPr kumimoji="1" lang="ja-JP" altLang="en-US"/>
           </a:p>
@@ -810,10 +820,9 @@
           <a:lstStyle/>
           <a:p>
             <a:r>
-              <a:rPr kumimoji="1" lang="ja-JP" altLang="en-US" smtClean="0"/>
+              <a:rPr kumimoji="1" lang="ja-JP" altLang="en-US"/>
               <a:t>マスタ タイトルの書式設定</a:t>
             </a:r>
-            <a:endParaRPr kumimoji="1" lang="ja-JP" altLang="en-US"/>
           </a:p>
         </p:txBody>
       </p:sp>
@@ -834,70 +843,69 @@
           <a:p>
             <a:pPr lvl="0"/>
             <a:r>
-              <a:rPr kumimoji="1" lang="ja-JP" altLang="en-US" smtClean="0"/>
+              <a:rPr kumimoji="1" lang="ja-JP" altLang="en-US"/>
               <a:t>マスタ テキストの書式設定</a:t>
             </a:r>
           </a:p>
           <a:p>
             <a:pPr lvl="1"/>
             <a:r>
-              <a:rPr kumimoji="1" lang="ja-JP" altLang="en-US" smtClean="0"/>
+              <a:rPr kumimoji="1" lang="ja-JP" altLang="en-US"/>
               <a:t>第 </a:t>
             </a:r>
             <a:r>
-              <a:rPr kumimoji="1" lang="en-US" altLang="ja-JP" smtClean="0"/>
+              <a:rPr kumimoji="1" lang="en-US" altLang="ja-JP"/>
               <a:t>2 </a:t>
             </a:r>
             <a:r>
-              <a:rPr kumimoji="1" lang="ja-JP" altLang="en-US" smtClean="0"/>
+              <a:rPr kumimoji="1" lang="ja-JP" altLang="en-US"/>
               <a:t>レベル</a:t>
             </a:r>
           </a:p>
           <a:p>
             <a:pPr lvl="2"/>
             <a:r>
-              <a:rPr kumimoji="1" lang="ja-JP" altLang="en-US" smtClean="0"/>
+              <a:rPr kumimoji="1" lang="ja-JP" altLang="en-US"/>
               <a:t>第 </a:t>
             </a:r>
             <a:r>
-              <a:rPr kumimoji="1" lang="en-US" altLang="ja-JP" smtClean="0"/>
+              <a:rPr kumimoji="1" lang="en-US" altLang="ja-JP"/>
               <a:t>3 </a:t>
             </a:r>
             <a:r>
-              <a:rPr kumimoji="1" lang="ja-JP" altLang="en-US" smtClean="0"/>
+              <a:rPr kumimoji="1" lang="ja-JP" altLang="en-US"/>
               <a:t>レベル</a:t>
             </a:r>
           </a:p>
           <a:p>
             <a:pPr lvl="3"/>
             <a:r>
-              <a:rPr kumimoji="1" lang="ja-JP" altLang="en-US" smtClean="0"/>
+              <a:rPr kumimoji="1" lang="ja-JP" altLang="en-US"/>
               <a:t>第 </a:t>
             </a:r>
             <a:r>
-              <a:rPr kumimoji="1" lang="en-US" altLang="ja-JP" smtClean="0"/>
+              <a:rPr kumimoji="1" lang="en-US" altLang="ja-JP"/>
               <a:t>4 </a:t>
             </a:r>
             <a:r>
-              <a:rPr kumimoji="1" lang="ja-JP" altLang="en-US" smtClean="0"/>
+              <a:rPr kumimoji="1" lang="ja-JP" altLang="en-US"/>
               <a:t>レベル</a:t>
             </a:r>
           </a:p>
           <a:p>
             <a:pPr lvl="4"/>
             <a:r>
-              <a:rPr kumimoji="1" lang="ja-JP" altLang="en-US" smtClean="0"/>
+              <a:rPr kumimoji="1" lang="ja-JP" altLang="en-US"/>
               <a:t>第 </a:t>
             </a:r>
             <a:r>
-              <a:rPr kumimoji="1" lang="en-US" altLang="ja-JP" smtClean="0"/>
+              <a:rPr kumimoji="1" lang="en-US" altLang="ja-JP"/>
               <a:t>5 </a:t>
             </a:r>
             <a:r>
-              <a:rPr kumimoji="1" lang="ja-JP" altLang="en-US" smtClean="0"/>
+              <a:rPr kumimoji="1" lang="ja-JP" altLang="en-US"/>
               <a:t>レベル</a:t>
             </a:r>
-            <a:endParaRPr kumimoji="1" lang="ja-JP" altLang="en-US"/>
           </a:p>
         </p:txBody>
       </p:sp>
@@ -919,7 +927,7 @@
             <a:fld id="{E90ED720-0104-4369-84BC-D37694168613}" type="datetimeFigureOut">
               <a:rPr kumimoji="1" lang="ja-JP" altLang="en-US" smtClean="0"/>
               <a:pPr/>
-              <a:t>18/10/10</a:t>
+              <a:t>2026/9/28</a:t>
             </a:fld>
             <a:endParaRPr kumimoji="1" lang="ja-JP" altLang="en-US"/>
           </a:p>
@@ -1018,10 +1026,9 @@
           </a:lstStyle>
           <a:p>
             <a:r>
-              <a:rPr kumimoji="1" lang="ja-JP" altLang="en-US" smtClean="0"/>
+              <a:rPr kumimoji="1" lang="ja-JP" altLang="en-US"/>
               <a:t>マスタ タイトルの書式設定</a:t>
             </a:r>
-            <a:endParaRPr kumimoji="1" lang="ja-JP" altLang="en-US"/>
           </a:p>
         </p:txBody>
       </p:sp>
@@ -1138,7 +1145,7 @@
           <a:p>
             <a:pPr lvl="0"/>
             <a:r>
-              <a:rPr kumimoji="1" lang="ja-JP" altLang="en-US" smtClean="0"/>
+              <a:rPr kumimoji="1" lang="ja-JP" altLang="en-US"/>
               <a:t>マスタ テキストの書式設定</a:t>
             </a:r>
           </a:p>
@@ -1162,7 +1169,7 @@
             <a:fld id="{E90ED720-0104-4369-84BC-D37694168613}" type="datetimeFigureOut">
               <a:rPr kumimoji="1" lang="ja-JP" altLang="en-US" smtClean="0"/>
               <a:pPr/>
-              <a:t>18/10/10</a:t>
+              <a:t>2026/9/28</a:t>
             </a:fld>
             <a:endParaRPr kumimoji="1" lang="ja-JP" altLang="en-US"/>
           </a:p>
@@ -1252,10 +1259,9 @@
           <a:lstStyle/>
           <a:p>
             <a:r>
-              <a:rPr kumimoji="1" lang="ja-JP" altLang="en-US" smtClean="0"/>
+              <a:rPr kumimoji="1" lang="ja-JP" altLang="en-US"/>
               <a:t>マスタ タイトルの書式設定</a:t>
             </a:r>
-            <a:endParaRPr kumimoji="1" lang="ja-JP" altLang="en-US"/>
           </a:p>
         </p:txBody>
       </p:sp>
@@ -1309,70 +1315,69 @@
           <a:p>
             <a:pPr lvl="0"/>
             <a:r>
-              <a:rPr kumimoji="1" lang="ja-JP" altLang="en-US" smtClean="0"/>
+              <a:rPr kumimoji="1" lang="ja-JP" altLang="en-US"/>
               <a:t>マスタ テキストの書式設定</a:t>
             </a:r>
           </a:p>
           <a:p>
             <a:pPr lvl="1"/>
             <a:r>
-              <a:rPr kumimoji="1" lang="ja-JP" altLang="en-US" smtClean="0"/>
+              <a:rPr kumimoji="1" lang="ja-JP" altLang="en-US"/>
               <a:t>第 </a:t>
             </a:r>
             <a:r>
-              <a:rPr kumimoji="1" lang="en-US" altLang="ja-JP" smtClean="0"/>
+              <a:rPr kumimoji="1" lang="en-US" altLang="ja-JP"/>
               <a:t>2 </a:t>
             </a:r>
             <a:r>
-              <a:rPr kumimoji="1" lang="ja-JP" altLang="en-US" smtClean="0"/>
+              <a:rPr kumimoji="1" lang="ja-JP" altLang="en-US"/>
               <a:t>レベル</a:t>
             </a:r>
           </a:p>
           <a:p>
             <a:pPr lvl="2"/>
             <a:r>
-              <a:rPr kumimoji="1" lang="ja-JP" altLang="en-US" smtClean="0"/>
+              <a:rPr kumimoji="1" lang="ja-JP" altLang="en-US"/>
               <a:t>第 </a:t>
             </a:r>
             <a:r>
-              <a:rPr kumimoji="1" lang="en-US" altLang="ja-JP" smtClean="0"/>
+              <a:rPr kumimoji="1" lang="en-US" altLang="ja-JP"/>
               <a:t>3 </a:t>
             </a:r>
             <a:r>
-              <a:rPr kumimoji="1" lang="ja-JP" altLang="en-US" smtClean="0"/>
+              <a:rPr kumimoji="1" lang="ja-JP" altLang="en-US"/>
               <a:t>レベル</a:t>
             </a:r>
           </a:p>
           <a:p>
             <a:pPr lvl="3"/>
             <a:r>
-              <a:rPr kumimoji="1" lang="ja-JP" altLang="en-US" smtClean="0"/>
+              <a:rPr kumimoji="1" lang="ja-JP" altLang="en-US"/>
               <a:t>第 </a:t>
             </a:r>
             <a:r>
-              <a:rPr kumimoji="1" lang="en-US" altLang="ja-JP" smtClean="0"/>
+              <a:rPr kumimoji="1" lang="en-US" altLang="ja-JP"/>
               <a:t>4 </a:t>
             </a:r>
             <a:r>
-              <a:rPr kumimoji="1" lang="ja-JP" altLang="en-US" smtClean="0"/>
+              <a:rPr kumimoji="1" lang="ja-JP" altLang="en-US"/>
               <a:t>レベル</a:t>
             </a:r>
           </a:p>
           <a:p>
             <a:pPr lvl="4"/>
             <a:r>
-              <a:rPr kumimoji="1" lang="ja-JP" altLang="en-US" smtClean="0"/>
+              <a:rPr kumimoji="1" lang="ja-JP" altLang="en-US"/>
               <a:t>第 </a:t>
             </a:r>
             <a:r>
-              <a:rPr kumimoji="1" lang="en-US" altLang="ja-JP" smtClean="0"/>
+              <a:rPr kumimoji="1" lang="en-US" altLang="ja-JP"/>
               <a:t>5 </a:t>
             </a:r>
             <a:r>
-              <a:rPr kumimoji="1" lang="ja-JP" altLang="en-US" smtClean="0"/>
+              <a:rPr kumimoji="1" lang="ja-JP" altLang="en-US"/>
               <a:t>レベル</a:t>
             </a:r>
-            <a:endParaRPr kumimoji="1" lang="ja-JP" altLang="en-US"/>
           </a:p>
         </p:txBody>
       </p:sp>
@@ -1426,70 +1431,69 @@
           <a:p>
             <a:pPr lvl="0"/>
             <a:r>
-              <a:rPr kumimoji="1" lang="ja-JP" altLang="en-US" smtClean="0"/>
+              <a:rPr kumimoji="1" lang="ja-JP" altLang="en-US"/>
               <a:t>マスタ テキストの書式設定</a:t>
             </a:r>
           </a:p>
           <a:p>
             <a:pPr lvl="1"/>
             <a:r>
-              <a:rPr kumimoji="1" lang="ja-JP" altLang="en-US" smtClean="0"/>
+              <a:rPr kumimoji="1" lang="ja-JP" altLang="en-US"/>
               <a:t>第 </a:t>
             </a:r>
             <a:r>
-              <a:rPr kumimoji="1" lang="en-US" altLang="ja-JP" smtClean="0"/>
+              <a:rPr kumimoji="1" lang="en-US" altLang="ja-JP"/>
               <a:t>2 </a:t>
             </a:r>
             <a:r>
-              <a:rPr kumimoji="1" lang="ja-JP" altLang="en-US" smtClean="0"/>
+              <a:rPr kumimoji="1" lang="ja-JP" altLang="en-US"/>
               <a:t>レベル</a:t>
             </a:r>
           </a:p>
           <a:p>
             <a:pPr lvl="2"/>
             <a:r>
-              <a:rPr kumimoji="1" lang="ja-JP" altLang="en-US" smtClean="0"/>
+              <a:rPr kumimoji="1" lang="ja-JP" altLang="en-US"/>
               <a:t>第 </a:t>
             </a:r>
             <a:r>
-              <a:rPr kumimoji="1" lang="en-US" altLang="ja-JP" smtClean="0"/>
+              <a:rPr kumimoji="1" lang="en-US" altLang="ja-JP"/>
               <a:t>3 </a:t>
             </a:r>
             <a:r>
-              <a:rPr kumimoji="1" lang="ja-JP" altLang="en-US" smtClean="0"/>
+              <a:rPr kumimoji="1" lang="ja-JP" altLang="en-US"/>
               <a:t>レベル</a:t>
             </a:r>
           </a:p>
           <a:p>
             <a:pPr lvl="3"/>
             <a:r>
-              <a:rPr kumimoji="1" lang="ja-JP" altLang="en-US" smtClean="0"/>
+              <a:rPr kumimoji="1" lang="ja-JP" altLang="en-US"/>
               <a:t>第 </a:t>
             </a:r>
             <a:r>
-              <a:rPr kumimoji="1" lang="en-US" altLang="ja-JP" smtClean="0"/>
+              <a:rPr kumimoji="1" lang="en-US" altLang="ja-JP"/>
               <a:t>4 </a:t>
             </a:r>
             <a:r>
-              <a:rPr kumimoji="1" lang="ja-JP" altLang="en-US" smtClean="0"/>
+              <a:rPr kumimoji="1" lang="ja-JP" altLang="en-US"/>
               <a:t>レベル</a:t>
             </a:r>
           </a:p>
           <a:p>
             <a:pPr lvl="4"/>
             <a:r>
-              <a:rPr kumimoji="1" lang="ja-JP" altLang="en-US" smtClean="0"/>
+              <a:rPr kumimoji="1" lang="ja-JP" altLang="en-US"/>
               <a:t>第 </a:t>
             </a:r>
             <a:r>
-              <a:rPr kumimoji="1" lang="en-US" altLang="ja-JP" smtClean="0"/>
+              <a:rPr kumimoji="1" lang="en-US" altLang="ja-JP"/>
               <a:t>5 </a:t>
             </a:r>
             <a:r>
-              <a:rPr kumimoji="1" lang="ja-JP" altLang="en-US" smtClean="0"/>
+              <a:rPr kumimoji="1" lang="ja-JP" altLang="en-US"/>
               <a:t>レベル</a:t>
             </a:r>
-            <a:endParaRPr kumimoji="1" lang="ja-JP" altLang="en-US"/>
           </a:p>
         </p:txBody>
       </p:sp>
@@ -1511,7 +1515,7 @@
             <a:fld id="{E90ED720-0104-4369-84BC-D37694168613}" type="datetimeFigureOut">
               <a:rPr kumimoji="1" lang="ja-JP" altLang="en-US" smtClean="0"/>
               <a:pPr/>
-              <a:t>18/10/10</a:t>
+              <a:t>2026/9/28</a:t>
             </a:fld>
             <a:endParaRPr kumimoji="1" lang="ja-JP" altLang="en-US"/>
           </a:p>
@@ -1605,10 +1609,9 @@
           </a:lstStyle>
           <a:p>
             <a:r>
-              <a:rPr kumimoji="1" lang="ja-JP" altLang="en-US" smtClean="0"/>
+              <a:rPr kumimoji="1" lang="ja-JP" altLang="en-US"/>
               <a:t>マスタ タイトルの書式設定</a:t>
             </a:r>
-            <a:endParaRPr kumimoji="1" lang="ja-JP" altLang="en-US"/>
           </a:p>
         </p:txBody>
       </p:sp>
@@ -1671,7 +1674,7 @@
           <a:p>
             <a:pPr lvl="0"/>
             <a:r>
-              <a:rPr kumimoji="1" lang="ja-JP" altLang="en-US" smtClean="0"/>
+              <a:rPr kumimoji="1" lang="ja-JP" altLang="en-US"/>
               <a:t>マスタ テキストの書式設定</a:t>
             </a:r>
           </a:p>
@@ -1727,70 +1730,69 @@
           <a:p>
             <a:pPr lvl="0"/>
             <a:r>
-              <a:rPr kumimoji="1" lang="ja-JP" altLang="en-US" smtClean="0"/>
+              <a:rPr kumimoji="1" lang="ja-JP" altLang="en-US"/>
               <a:t>マスタ テキストの書式設定</a:t>
             </a:r>
           </a:p>
           <a:p>
             <a:pPr lvl="1"/>
             <a:r>
-              <a:rPr kumimoji="1" lang="ja-JP" altLang="en-US" smtClean="0"/>
+              <a:rPr kumimoji="1" lang="ja-JP" altLang="en-US"/>
               <a:t>第 </a:t>
             </a:r>
             <a:r>
-              <a:rPr kumimoji="1" lang="en-US" altLang="ja-JP" smtClean="0"/>
+              <a:rPr kumimoji="1" lang="en-US" altLang="ja-JP"/>
               <a:t>2 </a:t>
             </a:r>
             <a:r>
-              <a:rPr kumimoji="1" lang="ja-JP" altLang="en-US" smtClean="0"/>
+              <a:rPr kumimoji="1" lang="ja-JP" altLang="en-US"/>
               <a:t>レベル</a:t>
             </a:r>
           </a:p>
           <a:p>
             <a:pPr lvl="2"/>
             <a:r>
-              <a:rPr kumimoji="1" lang="ja-JP" altLang="en-US" smtClean="0"/>
+              <a:rPr kumimoji="1" lang="ja-JP" altLang="en-US"/>
               <a:t>第 </a:t>
             </a:r>
             <a:r>
-              <a:rPr kumimoji="1" lang="en-US" altLang="ja-JP" smtClean="0"/>
+              <a:rPr kumimoji="1" lang="en-US" altLang="ja-JP"/>
               <a:t>3 </a:t>
             </a:r>
             <a:r>
-              <a:rPr kumimoji="1" lang="ja-JP" altLang="en-US" smtClean="0"/>
+              <a:rPr kumimoji="1" lang="ja-JP" altLang="en-US"/>
               <a:t>レベル</a:t>
             </a:r>
           </a:p>
           <a:p>
             <a:pPr lvl="3"/>
             <a:r>
-              <a:rPr kumimoji="1" lang="ja-JP" altLang="en-US" smtClean="0"/>
+              <a:rPr kumimoji="1" lang="ja-JP" altLang="en-US"/>
               <a:t>第 </a:t>
             </a:r>
             <a:r>
-              <a:rPr kumimoji="1" lang="en-US" altLang="ja-JP" smtClean="0"/>
+              <a:rPr kumimoji="1" lang="en-US" altLang="ja-JP"/>
               <a:t>4 </a:t>
             </a:r>
             <a:r>
-              <a:rPr kumimoji="1" lang="ja-JP" altLang="en-US" smtClean="0"/>
+              <a:rPr kumimoji="1" lang="ja-JP" altLang="en-US"/>
               <a:t>レベル</a:t>
             </a:r>
           </a:p>
           <a:p>
             <a:pPr lvl="4"/>
             <a:r>
-              <a:rPr kumimoji="1" lang="ja-JP" altLang="en-US" smtClean="0"/>
+              <a:rPr kumimoji="1" lang="ja-JP" altLang="en-US"/>
               <a:t>第 </a:t>
             </a:r>
             <a:r>
-              <a:rPr kumimoji="1" lang="en-US" altLang="ja-JP" smtClean="0"/>
+              <a:rPr kumimoji="1" lang="en-US" altLang="ja-JP"/>
               <a:t>5 </a:t>
             </a:r>
             <a:r>
-              <a:rPr kumimoji="1" lang="ja-JP" altLang="en-US" smtClean="0"/>
+              <a:rPr kumimoji="1" lang="ja-JP" altLang="en-US"/>
               <a:t>レベル</a:t>
             </a:r>
-            <a:endParaRPr kumimoji="1" lang="ja-JP" altLang="en-US"/>
           </a:p>
         </p:txBody>
       </p:sp>
@@ -1853,7 +1855,7 @@
           <a:p>
             <a:pPr lvl="0"/>
             <a:r>
-              <a:rPr kumimoji="1" lang="ja-JP" altLang="en-US" smtClean="0"/>
+              <a:rPr kumimoji="1" lang="ja-JP" altLang="en-US"/>
               <a:t>マスタ テキストの書式設定</a:t>
             </a:r>
           </a:p>
@@ -1909,70 +1911,69 @@
           <a:p>
             <a:pPr lvl="0"/>
             <a:r>
-              <a:rPr kumimoji="1" lang="ja-JP" altLang="en-US" smtClean="0"/>
+              <a:rPr kumimoji="1" lang="ja-JP" altLang="en-US"/>
               <a:t>マスタ テキストの書式設定</a:t>
             </a:r>
           </a:p>
           <a:p>
             <a:pPr lvl="1"/>
             <a:r>
-              <a:rPr kumimoji="1" lang="ja-JP" altLang="en-US" smtClean="0"/>
+              <a:rPr kumimoji="1" lang="ja-JP" altLang="en-US"/>
               <a:t>第 </a:t>
             </a:r>
             <a:r>
-              <a:rPr kumimoji="1" lang="en-US" altLang="ja-JP" smtClean="0"/>
+              <a:rPr kumimoji="1" lang="en-US" altLang="ja-JP"/>
               <a:t>2 </a:t>
             </a:r>
             <a:r>
-              <a:rPr kumimoji="1" lang="ja-JP" altLang="en-US" smtClean="0"/>
+              <a:rPr kumimoji="1" lang="ja-JP" altLang="en-US"/>
               <a:t>レベル</a:t>
             </a:r>
           </a:p>
           <a:p>
             <a:pPr lvl="2"/>
             <a:r>
-              <a:rPr kumimoji="1" lang="ja-JP" altLang="en-US" smtClean="0"/>
+              <a:rPr kumimoji="1" lang="ja-JP" altLang="en-US"/>
               <a:t>第 </a:t>
             </a:r>
             <a:r>
-              <a:rPr kumimoji="1" lang="en-US" altLang="ja-JP" smtClean="0"/>
+              <a:rPr kumimoji="1" lang="en-US" altLang="ja-JP"/>
               <a:t>3 </a:t>
             </a:r>
             <a:r>
-              <a:rPr kumimoji="1" lang="ja-JP" altLang="en-US" smtClean="0"/>
+              <a:rPr kumimoji="1" lang="ja-JP" altLang="en-US"/>
               <a:t>レベル</a:t>
             </a:r>
           </a:p>
           <a:p>
             <a:pPr lvl="3"/>
             <a:r>
-              <a:rPr kumimoji="1" lang="ja-JP" altLang="en-US" smtClean="0"/>
+              <a:rPr kumimoji="1" lang="ja-JP" altLang="en-US"/>
               <a:t>第 </a:t>
             </a:r>
             <a:r>
-              <a:rPr kumimoji="1" lang="en-US" altLang="ja-JP" smtClean="0"/>
+              <a:rPr kumimoji="1" lang="en-US" altLang="ja-JP"/>
               <a:t>4 </a:t>
             </a:r>
             <a:r>
-              <a:rPr kumimoji="1" lang="ja-JP" altLang="en-US" smtClean="0"/>
+              <a:rPr kumimoji="1" lang="ja-JP" altLang="en-US"/>
               <a:t>レベル</a:t>
             </a:r>
           </a:p>
           <a:p>
             <a:pPr lvl="4"/>
             <a:r>
-              <a:rPr kumimoji="1" lang="ja-JP" altLang="en-US" smtClean="0"/>
+              <a:rPr kumimoji="1" lang="ja-JP" altLang="en-US"/>
               <a:t>第 </a:t>
             </a:r>
             <a:r>
-              <a:rPr kumimoji="1" lang="en-US" altLang="ja-JP" smtClean="0"/>
+              <a:rPr kumimoji="1" lang="en-US" altLang="ja-JP"/>
               <a:t>5 </a:t>
             </a:r>
             <a:r>
-              <a:rPr kumimoji="1" lang="ja-JP" altLang="en-US" smtClean="0"/>
+              <a:rPr kumimoji="1" lang="ja-JP" altLang="en-US"/>
               <a:t>レベル</a:t>
             </a:r>
-            <a:endParaRPr kumimoji="1" lang="ja-JP" altLang="en-US"/>
           </a:p>
         </p:txBody>
       </p:sp>
@@ -1994,7 +1995,7 @@
             <a:fld id="{E90ED720-0104-4369-84BC-D37694168613}" type="datetimeFigureOut">
               <a:rPr kumimoji="1" lang="ja-JP" altLang="en-US" smtClean="0"/>
               <a:pPr/>
-              <a:t>18/10/10</a:t>
+              <a:t>2026/9/28</a:t>
             </a:fld>
             <a:endParaRPr kumimoji="1" lang="ja-JP" altLang="en-US"/>
           </a:p>
@@ -2084,10 +2085,9 @@
           <a:lstStyle/>
           <a:p>
             <a:r>
-              <a:rPr kumimoji="1" lang="ja-JP" altLang="en-US" smtClean="0"/>
+              <a:rPr kumimoji="1" lang="ja-JP" altLang="en-US"/>
               <a:t>マスタ タイトルの書式設定</a:t>
             </a:r>
-            <a:endParaRPr kumimoji="1" lang="ja-JP" altLang="en-US"/>
           </a:p>
         </p:txBody>
       </p:sp>
@@ -2109,7 +2109,7 @@
             <a:fld id="{E90ED720-0104-4369-84BC-D37694168613}" type="datetimeFigureOut">
               <a:rPr kumimoji="1" lang="ja-JP" altLang="en-US" smtClean="0"/>
               <a:pPr/>
-              <a:t>18/10/10</a:t>
+              <a:t>2026/9/28</a:t>
             </a:fld>
             <a:endParaRPr kumimoji="1" lang="ja-JP" altLang="en-US"/>
           </a:p>
@@ -2201,7 +2201,7 @@
             <a:fld id="{E90ED720-0104-4369-84BC-D37694168613}" type="datetimeFigureOut">
               <a:rPr kumimoji="1" lang="ja-JP" altLang="en-US" smtClean="0"/>
               <a:pPr/>
-              <a:t>18/10/10</a:t>
+              <a:t>2026/9/28</a:t>
             </a:fld>
             <a:endParaRPr kumimoji="1" lang="ja-JP" altLang="en-US"/>
           </a:p>
@@ -2300,10 +2300,9 @@
           </a:lstStyle>
           <a:p>
             <a:r>
-              <a:rPr kumimoji="1" lang="ja-JP" altLang="en-US" smtClean="0"/>
+              <a:rPr kumimoji="1" lang="ja-JP" altLang="en-US"/>
               <a:t>マスタ タイトルの書式設定</a:t>
             </a:r>
-            <a:endParaRPr kumimoji="1" lang="ja-JP" altLang="en-US"/>
           </a:p>
         </p:txBody>
       </p:sp>
@@ -2357,70 +2356,69 @@
           <a:p>
             <a:pPr lvl="0"/>
             <a:r>
-              <a:rPr kumimoji="1" lang="ja-JP" altLang="en-US" smtClean="0"/>
+              <a:rPr kumimoji="1" lang="ja-JP" altLang="en-US"/>
               <a:t>マスタ テキストの書式設定</a:t>
             </a:r>
           </a:p>
           <a:p>
             <a:pPr lvl="1"/>
             <a:r>
-              <a:rPr kumimoji="1" lang="ja-JP" altLang="en-US" smtClean="0"/>
+              <a:rPr kumimoji="1" lang="ja-JP" altLang="en-US"/>
               <a:t>第 </a:t>
             </a:r>
             <a:r>
-              <a:rPr kumimoji="1" lang="en-US" altLang="ja-JP" smtClean="0"/>
+              <a:rPr kumimoji="1" lang="en-US" altLang="ja-JP"/>
               <a:t>2 </a:t>
             </a:r>
             <a:r>
-              <a:rPr kumimoji="1" lang="ja-JP" altLang="en-US" smtClean="0"/>
+              <a:rPr kumimoji="1" lang="ja-JP" altLang="en-US"/>
               <a:t>レベル</a:t>
             </a:r>
           </a:p>
           <a:p>
             <a:pPr lvl="2"/>
             <a:r>
-              <a:rPr kumimoji="1" lang="ja-JP" altLang="en-US" smtClean="0"/>
+              <a:rPr kumimoji="1" lang="ja-JP" altLang="en-US"/>
               <a:t>第 </a:t>
             </a:r>
             <a:r>
-              <a:rPr kumimoji="1" lang="en-US" altLang="ja-JP" smtClean="0"/>
+              <a:rPr kumimoji="1" lang="en-US" altLang="ja-JP"/>
               <a:t>3 </a:t>
             </a:r>
             <a:r>
-              <a:rPr kumimoji="1" lang="ja-JP" altLang="en-US" smtClean="0"/>
+              <a:rPr kumimoji="1" lang="ja-JP" altLang="en-US"/>
               <a:t>レベル</a:t>
             </a:r>
           </a:p>
           <a:p>
             <a:pPr lvl="3"/>
             <a:r>
-              <a:rPr kumimoji="1" lang="ja-JP" altLang="en-US" smtClean="0"/>
+              <a:rPr kumimoji="1" lang="ja-JP" altLang="en-US"/>
               <a:t>第 </a:t>
             </a:r>
             <a:r>
-              <a:rPr kumimoji="1" lang="en-US" altLang="ja-JP" smtClean="0"/>
+              <a:rPr kumimoji="1" lang="en-US" altLang="ja-JP"/>
               <a:t>4 </a:t>
             </a:r>
             <a:r>
-              <a:rPr kumimoji="1" lang="ja-JP" altLang="en-US" smtClean="0"/>
+              <a:rPr kumimoji="1" lang="ja-JP" altLang="en-US"/>
               <a:t>レベル</a:t>
             </a:r>
           </a:p>
           <a:p>
             <a:pPr lvl="4"/>
             <a:r>
-              <a:rPr kumimoji="1" lang="ja-JP" altLang="en-US" smtClean="0"/>
+              <a:rPr kumimoji="1" lang="ja-JP" altLang="en-US"/>
               <a:t>第 </a:t>
             </a:r>
             <a:r>
-              <a:rPr kumimoji="1" lang="en-US" altLang="ja-JP" smtClean="0"/>
+              <a:rPr kumimoji="1" lang="en-US" altLang="ja-JP"/>
               <a:t>5 </a:t>
             </a:r>
             <a:r>
-              <a:rPr kumimoji="1" lang="ja-JP" altLang="en-US" smtClean="0"/>
+              <a:rPr kumimoji="1" lang="ja-JP" altLang="en-US"/>
               <a:t>レベル</a:t>
             </a:r>
-            <a:endParaRPr kumimoji="1" lang="ja-JP" altLang="en-US"/>
           </a:p>
         </p:txBody>
       </p:sp>
@@ -2483,7 +2481,7 @@
           <a:p>
             <a:pPr lvl="0"/>
             <a:r>
-              <a:rPr kumimoji="1" lang="ja-JP" altLang="en-US" smtClean="0"/>
+              <a:rPr kumimoji="1" lang="ja-JP" altLang="en-US"/>
               <a:t>マスタ テキストの書式設定</a:t>
             </a:r>
           </a:p>
@@ -2507,7 +2505,7 @@
             <a:fld id="{E90ED720-0104-4369-84BC-D37694168613}" type="datetimeFigureOut">
               <a:rPr kumimoji="1" lang="ja-JP" altLang="en-US" smtClean="0"/>
               <a:pPr/>
-              <a:t>18/10/10</a:t>
+              <a:t>2026/9/28</a:t>
             </a:fld>
             <a:endParaRPr kumimoji="1" lang="ja-JP" altLang="en-US"/>
           </a:p>
@@ -2606,10 +2604,9 @@
           </a:lstStyle>
           <a:p>
             <a:r>
-              <a:rPr kumimoji="1" lang="ja-JP" altLang="en-US" smtClean="0"/>
+              <a:rPr kumimoji="1" lang="ja-JP" altLang="en-US"/>
               <a:t>マスタ タイトルの書式設定</a:t>
             </a:r>
-            <a:endParaRPr kumimoji="1" lang="ja-JP" altLang="en-US"/>
           </a:p>
         </p:txBody>
       </p:sp>
@@ -2733,7 +2730,7 @@
           <a:p>
             <a:pPr lvl="0"/>
             <a:r>
-              <a:rPr kumimoji="1" lang="ja-JP" altLang="en-US" smtClean="0"/>
+              <a:rPr kumimoji="1" lang="ja-JP" altLang="en-US"/>
               <a:t>マスタ テキストの書式設定</a:t>
             </a:r>
           </a:p>
@@ -2757,7 +2754,7 @@
             <a:fld id="{E90ED720-0104-4369-84BC-D37694168613}" type="datetimeFigureOut">
               <a:rPr kumimoji="1" lang="ja-JP" altLang="en-US" smtClean="0"/>
               <a:pPr/>
-              <a:t>18/10/10</a:t>
+              <a:t>2026/9/28</a:t>
             </a:fld>
             <a:endParaRPr kumimoji="1" lang="ja-JP" altLang="en-US"/>
           </a:p>
@@ -2862,10 +2859,9 @@
           <a:lstStyle/>
           <a:p>
             <a:r>
-              <a:rPr kumimoji="1" lang="ja-JP" altLang="en-US" smtClean="0"/>
+              <a:rPr kumimoji="1" lang="ja-JP" altLang="en-US"/>
               <a:t>マスタ タイトルの書式設定</a:t>
             </a:r>
-            <a:endParaRPr kumimoji="1" lang="ja-JP" altLang="en-US"/>
           </a:p>
         </p:txBody>
       </p:sp>
@@ -2896,70 +2892,69 @@
           <a:p>
             <a:pPr lvl="0"/>
             <a:r>
-              <a:rPr kumimoji="1" lang="ja-JP" altLang="en-US" smtClean="0"/>
+              <a:rPr kumimoji="1" lang="ja-JP" altLang="en-US"/>
               <a:t>マスタ テキストの書式設定</a:t>
             </a:r>
           </a:p>
           <a:p>
             <a:pPr lvl="1"/>
             <a:r>
-              <a:rPr kumimoji="1" lang="ja-JP" altLang="en-US" smtClean="0"/>
+              <a:rPr kumimoji="1" lang="ja-JP" altLang="en-US"/>
               <a:t>第 </a:t>
             </a:r>
             <a:r>
-              <a:rPr kumimoji="1" lang="en-US" altLang="ja-JP" smtClean="0"/>
+              <a:rPr kumimoji="1" lang="en-US" altLang="ja-JP"/>
               <a:t>2 </a:t>
             </a:r>
             <a:r>
-              <a:rPr kumimoji="1" lang="ja-JP" altLang="en-US" smtClean="0"/>
+              <a:rPr kumimoji="1" lang="ja-JP" altLang="en-US"/>
               <a:t>レベル</a:t>
             </a:r>
           </a:p>
           <a:p>
             <a:pPr lvl="2"/>
             <a:r>
-              <a:rPr kumimoji="1" lang="ja-JP" altLang="en-US" smtClean="0"/>
+              <a:rPr kumimoji="1" lang="ja-JP" altLang="en-US"/>
               <a:t>第 </a:t>
             </a:r>
             <a:r>
-              <a:rPr kumimoji="1" lang="en-US" altLang="ja-JP" smtClean="0"/>
+              <a:rPr kumimoji="1" lang="en-US" altLang="ja-JP"/>
               <a:t>3 </a:t>
             </a:r>
             <a:r>
-              <a:rPr kumimoji="1" lang="ja-JP" altLang="en-US" smtClean="0"/>
+              <a:rPr kumimoji="1" lang="ja-JP" altLang="en-US"/>
               <a:t>レベル</a:t>
             </a:r>
           </a:p>
           <a:p>
             <a:pPr lvl="3"/>
             <a:r>
-              <a:rPr kumimoji="1" lang="ja-JP" altLang="en-US" smtClean="0"/>
+              <a:rPr kumimoji="1" lang="ja-JP" altLang="en-US"/>
               <a:t>第 </a:t>
             </a:r>
             <a:r>
-              <a:rPr kumimoji="1" lang="en-US" altLang="ja-JP" smtClean="0"/>
+              <a:rPr kumimoji="1" lang="en-US" altLang="ja-JP"/>
               <a:t>4 </a:t>
             </a:r>
             <a:r>
-              <a:rPr kumimoji="1" lang="ja-JP" altLang="en-US" smtClean="0"/>
+              <a:rPr kumimoji="1" lang="ja-JP" altLang="en-US"/>
               <a:t>レベル</a:t>
             </a:r>
           </a:p>
           <a:p>
             <a:pPr lvl="4"/>
             <a:r>
-              <a:rPr kumimoji="1" lang="ja-JP" altLang="en-US" smtClean="0"/>
+              <a:rPr kumimoji="1" lang="ja-JP" altLang="en-US"/>
               <a:t>第 </a:t>
             </a:r>
             <a:r>
-              <a:rPr kumimoji="1" lang="en-US" altLang="ja-JP" smtClean="0"/>
+              <a:rPr kumimoji="1" lang="en-US" altLang="ja-JP"/>
               <a:t>5 </a:t>
             </a:r>
             <a:r>
-              <a:rPr kumimoji="1" lang="ja-JP" altLang="en-US" smtClean="0"/>
+              <a:rPr kumimoji="1" lang="ja-JP" altLang="en-US"/>
               <a:t>レベル</a:t>
             </a:r>
-            <a:endParaRPr kumimoji="1" lang="ja-JP" altLang="en-US"/>
           </a:p>
         </p:txBody>
       </p:sp>
@@ -2999,7 +2994,7 @@
             <a:fld id="{E90ED720-0104-4369-84BC-D37694168613}" type="datetimeFigureOut">
               <a:rPr kumimoji="1" lang="ja-JP" altLang="en-US" smtClean="0"/>
               <a:pPr/>
-              <a:t>18/10/10</a:t>
+              <a:t>2026/9/28</a:t>
             </a:fld>
             <a:endParaRPr kumimoji="1" lang="ja-JP" altLang="en-US"/>
           </a:p>
@@ -3393,44 +3388,32 @@
           <a:lstStyle/>
           <a:p>
             <a:r>
-              <a:rPr kumimoji="1" lang="ja-JP" altLang="en-US" dirty="0" smtClean="0"/>
+              <a:rPr kumimoji="1" lang="ja-JP" altLang="en-US" dirty="0"/>
               <a:t>プログラミング言語論</a:t>
             </a:r>
-            <a:r>
-              <a:rPr kumimoji="1" lang="en-US" altLang="ja-JP" dirty="0" smtClean="0"/>
-              <a:t/>
-            </a:r>
             <a:br>
-              <a:rPr kumimoji="1" lang="en-US" altLang="ja-JP" dirty="0" smtClean="0"/>
+              <a:rPr kumimoji="1" lang="en-US" altLang="ja-JP" dirty="0"/>
             </a:br>
             <a:r>
-              <a:rPr lang="ja-JP" altLang="en-US" dirty="0" smtClean="0"/>
+              <a:rPr lang="ja-JP" altLang="en-US" dirty="0"/>
               <a:t>第２回</a:t>
             </a:r>
-            <a:r>
-              <a:rPr lang="en-US" altLang="ja-JP" dirty="0" smtClean="0"/>
-              <a:t/>
-            </a:r>
             <a:br>
-              <a:rPr lang="en-US" altLang="ja-JP" dirty="0" smtClean="0"/>
+              <a:rPr lang="en-US" altLang="ja-JP" dirty="0"/>
             </a:br>
             <a:r>
-              <a:rPr lang="ja-JP" altLang="en-US" dirty="0" smtClean="0"/>
+              <a:rPr lang="ja-JP" altLang="en-US" dirty="0"/>
               <a:t>命令型言語</a:t>
             </a:r>
-            <a:r>
-              <a:rPr lang="en-US" altLang="ja-JP" dirty="0" smtClean="0"/>
-              <a:t/>
-            </a:r>
             <a:br>
-              <a:rPr lang="en-US" altLang="ja-JP" dirty="0" smtClean="0"/>
+              <a:rPr lang="en-US" altLang="ja-JP" dirty="0"/>
             </a:br>
             <a:r>
-              <a:rPr lang="ja-JP" altLang="en-US" dirty="0" smtClean="0"/>
+              <a:rPr lang="ja-JP" altLang="en-US" dirty="0"/>
               <a:t>（</a:t>
             </a:r>
             <a:r>
-              <a:rPr lang="ja-JP" altLang="en-US" sz="3100" dirty="0" smtClean="0"/>
+              <a:rPr lang="ja-JP" altLang="en-US" sz="3100" dirty="0"/>
               <a:t>構造化プログラミング、制御フロー）</a:t>
             </a:r>
             <a:endParaRPr kumimoji="1" lang="ja-JP" altLang="en-US" dirty="0"/>
@@ -3445,8 +3428,8 @@
         </p:nvSpPr>
         <p:spPr>
           <a:xfrm>
-            <a:off x="2644852" y="5107071"/>
-            <a:ext cx="3945782" cy="523220"/>
+            <a:off x="3518674" y="5143512"/>
+            <a:ext cx="2137355" cy="523220"/>
           </a:xfrm>
           <a:prstGeom prst="rect">
             <a:avLst/>
@@ -3459,11 +3442,15 @@
           </a:bodyPr>
           <a:lstStyle/>
           <a:p>
-            <a:r>
-              <a:rPr kumimoji="1" lang="ja-JP" altLang="en-US" sz="2800" dirty="0" smtClean="0"/>
-              <a:t>情報工学科   篠埜　功</a:t>
-            </a:r>
-            <a:endParaRPr kumimoji="1" lang="ja-JP" altLang="en-US" sz="2800" dirty="0"/>
+            <a:pPr algn="ctr"/>
+            <a:r>
+              <a:rPr kumimoji="1" lang="ja-JP" altLang="en-US" sz="2800"/>
+              <a:t>篠埜　</a:t>
+            </a:r>
+            <a:r>
+              <a:rPr kumimoji="1" lang="ja-JP" altLang="en-US" sz="2800" dirty="0"/>
+              <a:t>功</a:t>
+            </a:r>
           </a:p>
         </p:txBody>
       </p:sp>
@@ -3510,19 +3497,19 @@
           <a:lstStyle/>
           <a:p>
             <a:r>
-              <a:rPr lang="en-US" altLang="ja-JP" dirty="0" smtClean="0"/>
+              <a:rPr lang="en-US" altLang="ja-JP" dirty="0"/>
               <a:t>e</a:t>
             </a:r>
             <a:r>
-              <a:rPr kumimoji="1" lang="en-US" altLang="ja-JP" dirty="0" smtClean="0"/>
+              <a:rPr kumimoji="1" lang="en-US" altLang="ja-JP" dirty="0"/>
               <a:t>lse</a:t>
             </a:r>
             <a:r>
-              <a:rPr kumimoji="1" lang="ja-JP" altLang="en-US" dirty="0" smtClean="0"/>
+              <a:rPr kumimoji="1" lang="ja-JP" altLang="en-US" dirty="0"/>
               <a:t>パート無しの</a:t>
             </a:r>
             <a:r>
-              <a:rPr lang="ja-JP" altLang="en-US" dirty="0" smtClean="0"/>
+              <a:rPr lang="ja-JP" altLang="en-US" dirty="0"/>
               <a:t>場合</a:t>
             </a:r>
             <a:endParaRPr kumimoji="1" lang="ja-JP" altLang="en-US" dirty="0"/>
@@ -3551,59 +3538,59 @@
           <a:lstStyle/>
           <a:p>
             <a:r>
-              <a:rPr lang="ja-JP" altLang="en-US" sz="2800" dirty="0" smtClean="0"/>
+              <a:rPr lang="ja-JP" altLang="en-US" sz="2800" dirty="0"/>
               <a:t>（例） </a:t>
             </a:r>
             <a:r>
-              <a:rPr lang="en-US" altLang="ja-JP" sz="2800" b="1" dirty="0" smtClean="0"/>
+              <a:rPr lang="en-US" altLang="ja-JP" sz="2800" b="1" dirty="0"/>
               <a:t>if</a:t>
             </a:r>
             <a:r>
-              <a:rPr lang="en-US" altLang="ja-JP" sz="2800" dirty="0" smtClean="0"/>
+              <a:rPr lang="en-US" altLang="ja-JP" sz="2800" dirty="0"/>
               <a:t> x=0 </a:t>
             </a:r>
             <a:r>
-              <a:rPr lang="en-US" altLang="ja-JP" sz="2800" b="1" dirty="0" smtClean="0"/>
+              <a:rPr lang="en-US" altLang="ja-JP" sz="2800" b="1" dirty="0"/>
               <a:t>then</a:t>
             </a:r>
             <a:r>
-              <a:rPr lang="en-US" altLang="ja-JP" sz="2800" dirty="0" smtClean="0"/>
+              <a:rPr lang="en-US" altLang="ja-JP" sz="2800" dirty="0"/>
               <a:t> </a:t>
             </a:r>
           </a:p>
           <a:p>
             <a:r>
-              <a:rPr lang="en-US" altLang="ja-JP" sz="2800" dirty="0" smtClean="0"/>
+              <a:rPr lang="en-US" altLang="ja-JP" sz="2800" dirty="0"/>
               <a:t>              </a:t>
             </a:r>
             <a:r>
-              <a:rPr lang="en-US" altLang="ja-JP" sz="2800" b="1" dirty="0" smtClean="0"/>
+              <a:rPr lang="en-US" altLang="ja-JP" sz="2800" b="1" dirty="0"/>
               <a:t>begin</a:t>
             </a:r>
             <a:r>
-              <a:rPr lang="en-US" altLang="ja-JP" sz="2800" dirty="0" smtClean="0"/>
+              <a:rPr lang="en-US" altLang="ja-JP" sz="2800" dirty="0"/>
               <a:t> </a:t>
             </a:r>
           </a:p>
           <a:p>
             <a:r>
-              <a:rPr lang="en-US" altLang="ja-JP" sz="2800" dirty="0" smtClean="0"/>
+              <a:rPr lang="en-US" altLang="ja-JP" sz="2800" dirty="0"/>
               <a:t>                 x:=1;</a:t>
             </a:r>
           </a:p>
           <a:p>
             <a:r>
-              <a:rPr lang="en-US" altLang="ja-JP" sz="2800" dirty="0" smtClean="0"/>
+              <a:rPr lang="en-US" altLang="ja-JP" sz="2800" dirty="0"/>
               <a:t>                 y:=3</a:t>
             </a:r>
           </a:p>
           <a:p>
             <a:r>
-              <a:rPr lang="en-US" altLang="ja-JP" sz="2800" dirty="0" smtClean="0"/>
+              <a:rPr lang="en-US" altLang="ja-JP" sz="2800" dirty="0"/>
               <a:t>              </a:t>
             </a:r>
             <a:r>
-              <a:rPr lang="en-US" altLang="ja-JP" sz="2800" b="1" dirty="0" smtClean="0"/>
+              <a:rPr lang="en-US" altLang="ja-JP" sz="2800" b="1" dirty="0"/>
               <a:t>end</a:t>
             </a:r>
           </a:p>
@@ -3672,7 +3659,7 @@
           <a:lstStyle/>
           <a:p>
             <a:r>
-              <a:rPr lang="en-US" altLang="ja-JP" sz="2800" dirty="0" smtClean="0"/>
+              <a:rPr lang="en-US" altLang="ja-JP" sz="2800" dirty="0"/>
               <a:t>Entry</a:t>
             </a:r>
           </a:p>
@@ -3721,7 +3708,7 @@
           <a:p>
             <a:pPr algn="ctr"/>
             <a:r>
-              <a:rPr lang="en-US" altLang="ja-JP" sz="2800" dirty="0" smtClean="0">
+              <a:rPr lang="en-US" altLang="ja-JP" sz="2800" dirty="0">
                 <a:solidFill>
                   <a:schemeClr val="tx1"/>
                 </a:solidFill>
@@ -3800,7 +3787,7 @@
           <a:lstStyle/>
           <a:p>
             <a:r>
-              <a:rPr lang="en-US" altLang="ja-JP" sz="2800" dirty="0" smtClean="0"/>
+              <a:rPr lang="en-US" altLang="ja-JP" sz="2800" dirty="0"/>
               <a:t> x:=1</a:t>
             </a:r>
           </a:p>
@@ -3904,14 +3891,9 @@
           <a:lstStyle/>
           <a:p>
             <a:r>
-              <a:rPr lang="en-US" altLang="ja-JP" sz="2800" dirty="0" smtClean="0"/>
-              <a:t>Exi</a:t>
-            </a:r>
-            <a:r>
-              <a:rPr lang="en-US" altLang="ja-JP" sz="2800" dirty="0"/>
-              <a:t>t</a:t>
-            </a:r>
-            <a:endParaRPr lang="en-US" altLang="ja-JP" sz="2800" dirty="0" smtClean="0"/>
+              <a:rPr lang="en-US" altLang="ja-JP" sz="2800" dirty="0"/>
+              <a:t>Exit</a:t>
+            </a:r>
           </a:p>
         </p:txBody>
       </p:sp>
@@ -3938,7 +3920,7 @@
           <a:lstStyle/>
           <a:p>
             <a:r>
-              <a:rPr kumimoji="1" lang="en-US" altLang="ja-JP" sz="2400" dirty="0" smtClean="0"/>
+              <a:rPr kumimoji="1" lang="en-US" altLang="ja-JP" sz="2400" dirty="0"/>
               <a:t>T</a:t>
             </a:r>
             <a:endParaRPr kumimoji="1" lang="ja-JP" altLang="en-US" sz="2400" dirty="0"/>
@@ -3968,7 +3950,7 @@
           <a:lstStyle/>
           <a:p>
             <a:r>
-              <a:rPr kumimoji="1" lang="en-US" altLang="ja-JP" sz="2400" dirty="0" smtClean="0"/>
+              <a:rPr kumimoji="1" lang="en-US" altLang="ja-JP" sz="2400" dirty="0"/>
               <a:t>F</a:t>
             </a:r>
             <a:endParaRPr kumimoji="1" lang="ja-JP" altLang="en-US" sz="2400" dirty="0"/>
@@ -4034,7 +4016,7 @@
           <a:lstStyle/>
           <a:p>
             <a:r>
-              <a:rPr lang="en-US" altLang="ja-JP" sz="2800" dirty="0" smtClean="0"/>
+              <a:rPr lang="en-US" altLang="ja-JP" sz="2800" dirty="0"/>
               <a:t>  y := 3 </a:t>
             </a:r>
           </a:p>
@@ -4261,31 +4243,31 @@
           <a:lstStyle/>
           <a:p>
             <a:r>
-              <a:rPr lang="en-US" altLang="ja-JP" sz="2800" dirty="0" smtClean="0"/>
+              <a:rPr lang="en-US" altLang="ja-JP" sz="2800" dirty="0"/>
               <a:t>else</a:t>
             </a:r>
             <a:r>
-              <a:rPr lang="ja-JP" altLang="en-US" sz="2800" dirty="0" smtClean="0"/>
+              <a:rPr lang="ja-JP" altLang="en-US" sz="2800" dirty="0"/>
               <a:t>パート無しの</a:t>
             </a:r>
             <a:r>
-              <a:rPr lang="en-US" altLang="ja-JP" sz="2800" dirty="0" smtClean="0"/>
+              <a:rPr lang="en-US" altLang="ja-JP" sz="2800" dirty="0"/>
               <a:t>if</a:t>
             </a:r>
             <a:r>
-              <a:rPr lang="ja-JP" altLang="en-US" sz="2800" dirty="0" smtClean="0"/>
+              <a:rPr lang="ja-JP" altLang="en-US" sz="2800" dirty="0"/>
               <a:t>文</a:t>
             </a:r>
             <a:r>
-              <a:rPr lang="en-US" altLang="ja-JP" sz="2800" dirty="0" smtClean="0"/>
+              <a:rPr lang="en-US" altLang="ja-JP" sz="2800" dirty="0"/>
               <a:t> </a:t>
             </a:r>
             <a:r>
-              <a:rPr lang="en-US" altLang="ja-JP" sz="2800" b="1" dirty="0" smtClean="0"/>
+              <a:rPr lang="en-US" altLang="ja-JP" sz="2800" b="1" dirty="0"/>
               <a:t>if</a:t>
             </a:r>
             <a:r>
-              <a:rPr lang="en-US" altLang="ja-JP" sz="2800" dirty="0" smtClean="0"/>
+              <a:rPr lang="en-US" altLang="ja-JP" sz="2800" dirty="0"/>
               <a:t> </a:t>
             </a:r>
             <a:r>
@@ -4305,38 +4287,38 @@
               <a:t> </a:t>
             </a:r>
             <a:r>
-              <a:rPr lang="en-US" altLang="ja-JP" sz="2800" i="1" dirty="0" smtClean="0"/>
+              <a:rPr lang="en-US" altLang="ja-JP" sz="2800" i="1" dirty="0"/>
               <a:t>S </a:t>
             </a:r>
             <a:r>
-              <a:rPr lang="ja-JP" altLang="en-US" sz="2800" dirty="0" smtClean="0"/>
+              <a:rPr lang="ja-JP" altLang="en-US" sz="2800" dirty="0"/>
               <a:t>は、本体</a:t>
             </a:r>
             <a:r>
-              <a:rPr lang="en-US" altLang="ja-JP" sz="2800" i="1" dirty="0" smtClean="0"/>
+              <a:rPr lang="en-US" altLang="ja-JP" sz="2800" i="1" dirty="0"/>
               <a:t>S</a:t>
             </a:r>
             <a:r>
-              <a:rPr lang="ja-JP" altLang="en-US" sz="2800" dirty="0" smtClean="0"/>
+              <a:rPr lang="ja-JP" altLang="en-US" sz="2800" dirty="0"/>
               <a:t>が</a:t>
             </a:r>
             <a:r>
-              <a:rPr lang="en-US" altLang="ja-JP" sz="2800" dirty="0" smtClean="0"/>
+              <a:rPr lang="en-US" altLang="ja-JP" sz="2800" dirty="0"/>
               <a:t>single entry / single exit</a:t>
             </a:r>
             <a:r>
-              <a:rPr lang="ja-JP" altLang="en-US" sz="2800" dirty="0" smtClean="0"/>
+              <a:rPr lang="ja-JP" altLang="en-US" sz="2800" dirty="0"/>
               <a:t>なら</a:t>
             </a:r>
             <a:r>
-              <a:rPr lang="en-US" altLang="ja-JP" sz="2800" dirty="0" smtClean="0"/>
+              <a:rPr lang="en-US" altLang="ja-JP" sz="2800" dirty="0"/>
               <a:t>single entry / single exit</a:t>
             </a:r>
             <a:r>
-              <a:rPr lang="ja-JP" altLang="en-US" sz="2800" dirty="0" smtClean="0"/>
+              <a:rPr lang="ja-JP" altLang="en-US" sz="2800" dirty="0"/>
               <a:t>である。</a:t>
             </a:r>
-            <a:endParaRPr kumimoji="1" lang="en-US" altLang="ja-JP" sz="2800" dirty="0" smtClean="0"/>
+            <a:endParaRPr kumimoji="1" lang="en-US" altLang="ja-JP" sz="2800" dirty="0"/>
           </a:p>
         </p:txBody>
       </p:sp>
@@ -4383,11 +4365,11 @@
           <a:lstStyle/>
           <a:p>
             <a:r>
-              <a:rPr kumimoji="1" lang="ja-JP" altLang="en-US" dirty="0" smtClean="0"/>
+              <a:rPr kumimoji="1" lang="ja-JP" altLang="en-US" dirty="0"/>
               <a:t>練習問題</a:t>
             </a:r>
             <a:r>
-              <a:rPr lang="ja-JP" altLang="en-US" dirty="0" smtClean="0"/>
+              <a:rPr lang="ja-JP" altLang="en-US" dirty="0"/>
               <a:t>１</a:t>
             </a:r>
             <a:endParaRPr kumimoji="1" lang="ja-JP" altLang="en-US" dirty="0"/>
@@ -4417,54 +4399,54 @@
           <a:lstStyle/>
           <a:p>
             <a:r>
-              <a:rPr lang="ja-JP" altLang="en-US" sz="2800" dirty="0" smtClean="0"/>
+              <a:rPr lang="ja-JP" altLang="en-US" sz="2800" dirty="0"/>
               <a:t>以下のプログラム断片の制御フローを図示せよ。</a:t>
             </a:r>
-            <a:endParaRPr lang="en-US" altLang="ja-JP" sz="2800" dirty="0" smtClean="0"/>
-          </a:p>
-          <a:p>
-            <a:r>
-              <a:rPr lang="en-US" altLang="ja-JP" sz="2800" b="1" dirty="0" smtClean="0"/>
+            <a:endParaRPr lang="en-US" altLang="ja-JP" sz="2800" dirty="0"/>
+          </a:p>
+          <a:p>
+            <a:r>
+              <a:rPr lang="en-US" altLang="ja-JP" sz="2800" b="1" dirty="0"/>
               <a:t>if </a:t>
             </a:r>
             <a:r>
-              <a:rPr lang="en-US" altLang="ja-JP" sz="2800" dirty="0" smtClean="0"/>
+              <a:rPr lang="en-US" altLang="ja-JP" sz="2800" dirty="0"/>
               <a:t>x &gt; 0 </a:t>
             </a:r>
             <a:r>
-              <a:rPr lang="en-US" altLang="ja-JP" sz="2800" b="1" dirty="0" smtClean="0"/>
+              <a:rPr lang="en-US" altLang="ja-JP" sz="2800" b="1" dirty="0"/>
               <a:t>then </a:t>
             </a:r>
             <a:r>
-              <a:rPr lang="en-US" altLang="ja-JP" sz="2800" dirty="0" smtClean="0"/>
+              <a:rPr lang="en-US" altLang="ja-JP" sz="2800" dirty="0"/>
               <a:t>x := x – 1</a:t>
             </a:r>
           </a:p>
           <a:p>
             <a:r>
-              <a:rPr lang="en-US" altLang="ja-JP" sz="2800" b="1" dirty="0" smtClean="0"/>
+              <a:rPr lang="en-US" altLang="ja-JP" sz="2800" b="1" dirty="0"/>
               <a:t>else if </a:t>
             </a:r>
             <a:r>
-              <a:rPr lang="en-US" altLang="ja-JP" sz="2800" dirty="0" smtClean="0"/>
+              <a:rPr lang="en-US" altLang="ja-JP" sz="2800" dirty="0"/>
               <a:t>y &gt; 0 </a:t>
             </a:r>
             <a:r>
-              <a:rPr lang="en-US" altLang="ja-JP" sz="2800" b="1" dirty="0" smtClean="0"/>
+              <a:rPr lang="en-US" altLang="ja-JP" sz="2800" b="1" dirty="0"/>
               <a:t>then </a:t>
             </a:r>
             <a:r>
-              <a:rPr lang="en-US" altLang="ja-JP" sz="2800" dirty="0" smtClean="0"/>
+              <a:rPr lang="en-US" altLang="ja-JP" sz="2800" dirty="0"/>
               <a:t>y := y – 1</a:t>
             </a:r>
           </a:p>
           <a:p>
             <a:r>
-              <a:rPr kumimoji="1" lang="en-US" altLang="ja-JP" sz="2800" b="1" dirty="0" smtClean="0"/>
+              <a:rPr kumimoji="1" lang="en-US" altLang="ja-JP" sz="2800" b="1" dirty="0"/>
               <a:t>        else </a:t>
             </a:r>
             <a:r>
-              <a:rPr kumimoji="1" lang="en-US" altLang="ja-JP" sz="2800" dirty="0" smtClean="0"/>
+              <a:rPr kumimoji="1" lang="en-US" altLang="ja-JP" sz="2800" dirty="0"/>
               <a:t>y := y + 1</a:t>
             </a:r>
             <a:endParaRPr kumimoji="1" lang="ja-JP" altLang="en-US" sz="2800" dirty="0"/>
@@ -4512,15 +4494,15 @@
           <a:lstStyle/>
           <a:p>
             <a:r>
-              <a:rPr lang="ja-JP" altLang="en-US" dirty="0" smtClean="0"/>
+              <a:rPr lang="ja-JP" altLang="en-US" dirty="0"/>
               <a:t>繰り返し文（</a:t>
             </a:r>
             <a:r>
-              <a:rPr lang="en-US" altLang="ja-JP" dirty="0" smtClean="0"/>
+              <a:rPr lang="en-US" altLang="ja-JP" dirty="0"/>
               <a:t>loop</a:t>
             </a:r>
             <a:r>
-              <a:rPr lang="ja-JP" altLang="en-US" dirty="0" smtClean="0"/>
+              <a:rPr lang="ja-JP" altLang="en-US" dirty="0"/>
               <a:t>）</a:t>
             </a:r>
             <a:endParaRPr kumimoji="1" lang="ja-JP" altLang="en-US" dirty="0"/>
@@ -4550,53 +4532,52 @@
           <a:lstStyle/>
           <a:p>
             <a:r>
-              <a:rPr lang="en-US" altLang="ja-JP" sz="2800" dirty="0" smtClean="0"/>
+              <a:rPr lang="en-US" altLang="ja-JP" sz="2800" dirty="0"/>
               <a:t> </a:t>
             </a:r>
             <a:r>
-              <a:rPr lang="ja-JP" altLang="en-US" sz="2800" dirty="0" smtClean="0"/>
+              <a:rPr lang="ja-JP" altLang="en-US" sz="2800" dirty="0"/>
               <a:t>繰り返し文は</a:t>
             </a:r>
             <a:r>
-              <a:rPr lang="en-US" altLang="ja-JP" sz="2800" dirty="0" smtClean="0"/>
+              <a:rPr lang="en-US" altLang="ja-JP" sz="2800" dirty="0"/>
               <a:t>Pascal</a:t>
             </a:r>
             <a:r>
-              <a:rPr lang="ja-JP" altLang="en-US" sz="2800" dirty="0" smtClean="0"/>
+              <a:rPr lang="ja-JP" altLang="en-US" sz="2800" dirty="0"/>
               <a:t>等では以下の形で書かれる。</a:t>
             </a:r>
-            <a:endParaRPr lang="en-US" altLang="ja-JP" sz="2800" dirty="0" smtClean="0"/>
-          </a:p>
-          <a:p>
-            <a:r>
-              <a:rPr kumimoji="1" lang="en-US" altLang="ja-JP" sz="2800" dirty="0" smtClean="0"/>
+            <a:endParaRPr lang="en-US" altLang="ja-JP" sz="2800" dirty="0"/>
+          </a:p>
+          <a:p>
+            <a:r>
+              <a:rPr kumimoji="1" lang="en-US" altLang="ja-JP" sz="2800" dirty="0"/>
               <a:t>    </a:t>
             </a:r>
             <a:r>
-              <a:rPr kumimoji="1" lang="en-US" altLang="ja-JP" sz="2800" b="1" dirty="0" smtClean="0"/>
+              <a:rPr kumimoji="1" lang="en-US" altLang="ja-JP" sz="2800" b="1" dirty="0"/>
               <a:t>while</a:t>
             </a:r>
             <a:r>
-              <a:rPr kumimoji="1" lang="en-US" altLang="ja-JP" sz="2800" dirty="0" smtClean="0"/>
+              <a:rPr kumimoji="1" lang="en-US" altLang="ja-JP" sz="2800" dirty="0"/>
               <a:t> </a:t>
             </a:r>
             <a:r>
-              <a:rPr kumimoji="1" lang="ja-JP" altLang="en-US" sz="2800" dirty="0" smtClean="0"/>
+              <a:rPr kumimoji="1" lang="ja-JP" altLang="en-US" sz="2800" dirty="0"/>
               <a:t>式 </a:t>
             </a:r>
             <a:r>
-              <a:rPr kumimoji="1" lang="en-US" altLang="ja-JP" sz="2800" b="1" dirty="0" smtClean="0"/>
+              <a:rPr kumimoji="1" lang="en-US" altLang="ja-JP" sz="2800" b="1" dirty="0"/>
               <a:t>do</a:t>
             </a:r>
             <a:r>
-              <a:rPr kumimoji="1" lang="en-US" altLang="ja-JP" sz="2800" dirty="0" smtClean="0"/>
+              <a:rPr kumimoji="1" lang="en-US" altLang="ja-JP" sz="2800" dirty="0"/>
               <a:t> </a:t>
             </a:r>
             <a:r>
-              <a:rPr kumimoji="1" lang="ja-JP" altLang="en-US" sz="2800" dirty="0" smtClean="0"/>
+              <a:rPr kumimoji="1" lang="ja-JP" altLang="en-US" sz="2800" dirty="0"/>
               <a:t>文</a:t>
             </a:r>
-            <a:endParaRPr kumimoji="1" lang="ja-JP" altLang="en-US" sz="2800" dirty="0"/>
           </a:p>
         </p:txBody>
       </p:sp>
@@ -4623,11 +4604,11 @@
           <a:lstStyle/>
           <a:p>
             <a:r>
-              <a:rPr kumimoji="1" lang="ja-JP" altLang="en-US" sz="2800" dirty="0" smtClean="0"/>
+              <a:rPr kumimoji="1" lang="ja-JP" altLang="en-US" sz="2800" dirty="0"/>
               <a:t>（例） </a:t>
             </a:r>
             <a:r>
-              <a:rPr kumimoji="1" lang="en-US" altLang="ja-JP" sz="2800" dirty="0" smtClean="0"/>
+              <a:rPr kumimoji="1" lang="en-US" altLang="ja-JP" sz="2800" dirty="0"/>
               <a:t>while x &gt; 0 do x := x-1</a:t>
             </a:r>
             <a:endParaRPr kumimoji="1" lang="ja-JP" altLang="en-US" sz="2800" dirty="0"/>
@@ -4657,23 +4638,23 @@
           <a:lstStyle/>
           <a:p>
             <a:r>
-              <a:rPr kumimoji="1" lang="en-US" altLang="ja-JP" sz="2800" dirty="0" smtClean="0"/>
+              <a:rPr kumimoji="1" lang="en-US" altLang="ja-JP" sz="2800" dirty="0"/>
               <a:t>while</a:t>
             </a:r>
             <a:r>
-              <a:rPr kumimoji="1" lang="ja-JP" altLang="en-US" sz="2800" dirty="0" smtClean="0"/>
+              <a:rPr kumimoji="1" lang="ja-JP" altLang="en-US" sz="2800" dirty="0"/>
               <a:t>文</a:t>
             </a:r>
             <a:r>
-              <a:rPr kumimoji="1" lang="en-US" altLang="ja-JP" sz="2800" dirty="0" smtClean="0"/>
+              <a:rPr kumimoji="1" lang="en-US" altLang="ja-JP" sz="2800" dirty="0"/>
               <a:t> </a:t>
             </a:r>
             <a:r>
-              <a:rPr lang="en-US" altLang="ja-JP" sz="2800" b="1" dirty="0" smtClean="0"/>
+              <a:rPr lang="en-US" altLang="ja-JP" sz="2800" b="1" dirty="0"/>
               <a:t>while</a:t>
             </a:r>
             <a:r>
-              <a:rPr lang="en-US" altLang="ja-JP" sz="2800" dirty="0" smtClean="0"/>
+              <a:rPr lang="en-US" altLang="ja-JP" sz="2800" dirty="0"/>
               <a:t> </a:t>
             </a:r>
             <a:r>
@@ -4693,15 +4674,15 @@
               <a:t> </a:t>
             </a:r>
             <a:r>
-              <a:rPr lang="en-US" altLang="ja-JP" sz="2800" i="1" dirty="0" smtClean="0"/>
+              <a:rPr lang="en-US" altLang="ja-JP" sz="2800" i="1" dirty="0"/>
               <a:t>S </a:t>
             </a:r>
             <a:r>
-              <a:rPr lang="ja-JP" altLang="en-US" sz="2800" dirty="0" smtClean="0"/>
+              <a:rPr lang="ja-JP" altLang="en-US" sz="2800" dirty="0"/>
               <a:t>は</a:t>
             </a:r>
             <a:r>
-              <a:rPr kumimoji="1" lang="ja-JP" altLang="en-US" sz="2800" dirty="0" smtClean="0"/>
+              <a:rPr kumimoji="1" lang="ja-JP" altLang="en-US" sz="2800" dirty="0"/>
               <a:t>、本体の文</a:t>
             </a:r>
             <a:r>
@@ -4709,26 +4690,25 @@
               <a:t>S</a:t>
             </a:r>
             <a:r>
-              <a:rPr kumimoji="1" lang="ja-JP" altLang="en-US" sz="2800" dirty="0" smtClean="0"/>
+              <a:rPr kumimoji="1" lang="ja-JP" altLang="en-US" sz="2800" dirty="0"/>
               <a:t>が</a:t>
             </a:r>
             <a:r>
-              <a:rPr kumimoji="1" lang="en-US" altLang="ja-JP" sz="2800" dirty="0" smtClean="0"/>
+              <a:rPr kumimoji="1" lang="en-US" altLang="ja-JP" sz="2800" dirty="0"/>
               <a:t>single entry, single exit</a:t>
             </a:r>
             <a:r>
-              <a:rPr kumimoji="1" lang="ja-JP" altLang="en-US" sz="2800" dirty="0" smtClean="0"/>
+              <a:rPr kumimoji="1" lang="ja-JP" altLang="en-US" sz="2800" dirty="0"/>
               <a:t>なら</a:t>
             </a:r>
             <a:r>
-              <a:rPr kumimoji="1" lang="en-US" altLang="ja-JP" sz="2800" dirty="0" smtClean="0"/>
+              <a:rPr kumimoji="1" lang="en-US" altLang="ja-JP" sz="2800" dirty="0"/>
               <a:t>single entry, single exit</a:t>
             </a:r>
             <a:r>
-              <a:rPr kumimoji="1" lang="ja-JP" altLang="en-US" sz="2800" dirty="0" smtClean="0"/>
+              <a:rPr kumimoji="1" lang="ja-JP" altLang="en-US" sz="2800" dirty="0"/>
               <a:t>である。</a:t>
             </a:r>
-            <a:endParaRPr kumimoji="1" lang="ja-JP" altLang="en-US" sz="2800" dirty="0"/>
           </a:p>
         </p:txBody>
       </p:sp>
@@ -4795,7 +4775,7 @@
           <a:lstStyle/>
           <a:p>
             <a:r>
-              <a:rPr lang="en-US" altLang="ja-JP" sz="2800" dirty="0" smtClean="0"/>
+              <a:rPr lang="en-US" altLang="ja-JP" sz="2800" dirty="0"/>
               <a:t>Entry</a:t>
             </a:r>
           </a:p>
@@ -4844,7 +4824,7 @@
           <a:p>
             <a:pPr algn="ctr"/>
             <a:r>
-              <a:rPr lang="en-US" altLang="ja-JP" sz="2800" dirty="0" smtClean="0">
+              <a:rPr lang="en-US" altLang="ja-JP" sz="2800" dirty="0">
                 <a:solidFill>
                   <a:schemeClr val="tx1"/>
                 </a:solidFill>
@@ -4956,7 +4936,7 @@
           <a:lstStyle/>
           <a:p>
             <a:r>
-              <a:rPr kumimoji="1" lang="en-US" altLang="ja-JP" sz="2800" dirty="0" smtClean="0"/>
+              <a:rPr kumimoji="1" lang="en-US" altLang="ja-JP" sz="2800" dirty="0"/>
               <a:t> x := x-1</a:t>
             </a:r>
             <a:endParaRPr kumimoji="1" lang="ja-JP" altLang="en-US" sz="2800" dirty="0"/>
@@ -5163,7 +5143,7 @@
           <a:lstStyle/>
           <a:p>
             <a:r>
-              <a:rPr kumimoji="1" lang="en-US" altLang="ja-JP" sz="2400" dirty="0" smtClean="0"/>
+              <a:rPr kumimoji="1" lang="en-US" altLang="ja-JP" sz="2400" dirty="0"/>
               <a:t>T</a:t>
             </a:r>
             <a:endParaRPr kumimoji="1" lang="ja-JP" altLang="en-US" sz="2400" dirty="0"/>
@@ -5193,7 +5173,7 @@
           <a:lstStyle/>
           <a:p>
             <a:r>
-              <a:rPr kumimoji="1" lang="en-US" altLang="ja-JP" sz="2400" dirty="0" smtClean="0"/>
+              <a:rPr kumimoji="1" lang="en-US" altLang="ja-JP" sz="2400" dirty="0"/>
               <a:t>F</a:t>
             </a:r>
             <a:endParaRPr kumimoji="1" lang="ja-JP" altLang="en-US" sz="2400" dirty="0"/>
@@ -5226,7 +5206,7 @@
           <a:lstStyle/>
           <a:p>
             <a:r>
-              <a:rPr lang="en-US" altLang="ja-JP" sz="2800" dirty="0" smtClean="0"/>
+              <a:rPr lang="en-US" altLang="ja-JP" sz="2800" dirty="0"/>
               <a:t>Exit</a:t>
             </a:r>
           </a:p>
@@ -5328,13 +5308,6 @@
   <p:clrMapOvr>
     <a:masterClrMapping/>
   </p:clrMapOvr>
-  <p:timing>
-    <p:tnLst>
-      <p:par>
-        <p:cTn xmlns:p14="http://schemas.microsoft.com/office/powerpoint/2010/main" id="1" dur="indefinite" restart="never" nodeType="tmRoot"/>
-      </p:par>
-    </p:tnLst>
-  </p:timing>
 </p:sld>
 </file>
 
@@ -5378,10 +5351,9 @@
           <a:lstStyle/>
           <a:p>
             <a:r>
-              <a:rPr kumimoji="1" lang="ja-JP" altLang="en-US" sz="4000" dirty="0" smtClean="0"/>
+              <a:rPr kumimoji="1" lang="ja-JP" altLang="en-US" sz="4000" dirty="0"/>
               <a:t>選択文</a:t>
             </a:r>
-            <a:endParaRPr kumimoji="1" lang="ja-JP" altLang="en-US" sz="4000" dirty="0"/>
           </a:p>
         </p:txBody>
       </p:sp>
@@ -5408,129 +5380,129 @@
           <a:lstStyle/>
           <a:p>
             <a:r>
-              <a:rPr kumimoji="1" lang="ja-JP" altLang="en-US" sz="2800" dirty="0" smtClean="0"/>
+              <a:rPr kumimoji="1" lang="ja-JP" altLang="en-US" sz="2800" dirty="0"/>
               <a:t>選択文は</a:t>
             </a:r>
             <a:r>
-              <a:rPr kumimoji="1" lang="en-US" altLang="ja-JP" sz="2800" dirty="0" smtClean="0"/>
+              <a:rPr kumimoji="1" lang="en-US" altLang="ja-JP" sz="2800" dirty="0"/>
               <a:t>Pascal</a:t>
             </a:r>
             <a:r>
-              <a:rPr kumimoji="1" lang="ja-JP" altLang="en-US" sz="2800" dirty="0" smtClean="0"/>
+              <a:rPr kumimoji="1" lang="ja-JP" altLang="en-US" sz="2800" dirty="0"/>
               <a:t>等では以下のような形で書かれる。</a:t>
             </a:r>
-            <a:endParaRPr kumimoji="1" lang="en-US" altLang="ja-JP" sz="2800" dirty="0" smtClean="0"/>
-          </a:p>
-          <a:p>
-            <a:r>
-              <a:rPr lang="en-US" altLang="ja-JP" sz="2800" dirty="0" smtClean="0"/>
+            <a:endParaRPr kumimoji="1" lang="en-US" altLang="ja-JP" sz="2800" dirty="0"/>
+          </a:p>
+          <a:p>
+            <a:r>
+              <a:rPr lang="en-US" altLang="ja-JP" sz="2800" dirty="0"/>
               <a:t>    </a:t>
             </a:r>
             <a:r>
-              <a:rPr lang="en-US" altLang="ja-JP" sz="2800" b="1" dirty="0" smtClean="0"/>
+              <a:rPr lang="en-US" altLang="ja-JP" sz="2800" b="1" dirty="0"/>
               <a:t>case</a:t>
             </a:r>
             <a:r>
-              <a:rPr lang="en-US" altLang="ja-JP" sz="2800" dirty="0" smtClean="0"/>
+              <a:rPr lang="en-US" altLang="ja-JP" sz="2800" dirty="0"/>
               <a:t> </a:t>
             </a:r>
             <a:r>
-              <a:rPr lang="ja-JP" altLang="en-US" sz="2800" dirty="0" smtClean="0"/>
+              <a:rPr lang="ja-JP" altLang="en-US" sz="2800" dirty="0"/>
               <a:t>式 </a:t>
             </a:r>
             <a:r>
-              <a:rPr lang="en-US" altLang="ja-JP" sz="2800" b="1" dirty="0" smtClean="0"/>
+              <a:rPr lang="en-US" altLang="ja-JP" sz="2800" b="1" dirty="0"/>
               <a:t>of</a:t>
             </a:r>
           </a:p>
           <a:p>
             <a:r>
-              <a:rPr kumimoji="1" lang="en-US" altLang="ja-JP" sz="2800" dirty="0" smtClean="0"/>
+              <a:rPr kumimoji="1" lang="en-US" altLang="ja-JP" sz="2800" dirty="0"/>
               <a:t>        constant1 : </a:t>
             </a:r>
             <a:r>
-              <a:rPr kumimoji="1" lang="ja-JP" altLang="en-US" sz="2800" dirty="0" smtClean="0"/>
+              <a:rPr kumimoji="1" lang="ja-JP" altLang="en-US" sz="2800" dirty="0"/>
               <a:t>文</a:t>
             </a:r>
             <a:r>
-              <a:rPr kumimoji="1" lang="en-US" altLang="ja-JP" sz="2800" dirty="0" smtClean="0"/>
+              <a:rPr kumimoji="1" lang="en-US" altLang="ja-JP" sz="2800" dirty="0"/>
               <a:t>1;</a:t>
             </a:r>
           </a:p>
           <a:p>
             <a:r>
-              <a:rPr lang="en-US" altLang="ja-JP" sz="2800" dirty="0" smtClean="0"/>
+              <a:rPr lang="en-US" altLang="ja-JP" sz="2800" dirty="0"/>
               <a:t>        constant2 : </a:t>
             </a:r>
             <a:r>
-              <a:rPr lang="ja-JP" altLang="en-US" sz="2800" dirty="0" smtClean="0"/>
+              <a:rPr lang="ja-JP" altLang="en-US" sz="2800" dirty="0"/>
               <a:t>文</a:t>
             </a:r>
             <a:r>
-              <a:rPr lang="en-US" altLang="ja-JP" sz="2800" dirty="0" smtClean="0"/>
+              <a:rPr lang="en-US" altLang="ja-JP" sz="2800" dirty="0"/>
               <a:t>2;</a:t>
             </a:r>
           </a:p>
           <a:p>
             <a:r>
-              <a:rPr kumimoji="1" lang="en-US" altLang="ja-JP" sz="2800" dirty="0" smtClean="0"/>
+              <a:rPr kumimoji="1" lang="en-US" altLang="ja-JP" sz="2800" dirty="0"/>
               <a:t>        …</a:t>
             </a:r>
           </a:p>
           <a:p>
             <a:r>
-              <a:rPr lang="en-US" altLang="ja-JP" sz="2800" dirty="0" smtClean="0"/>
+              <a:rPr lang="en-US" altLang="ja-JP" sz="2800" dirty="0"/>
               <a:t>        </a:t>
             </a:r>
             <a:r>
-              <a:rPr lang="en-US" altLang="ja-JP" sz="2800" dirty="0" err="1" smtClean="0"/>
+              <a:rPr lang="en-US" altLang="ja-JP" sz="2800" dirty="0" err="1"/>
               <a:t>constantn</a:t>
             </a:r>
             <a:r>
-              <a:rPr lang="en-US" altLang="ja-JP" sz="2800" dirty="0" smtClean="0"/>
+              <a:rPr lang="en-US" altLang="ja-JP" sz="2800" dirty="0"/>
               <a:t> : </a:t>
             </a:r>
             <a:r>
-              <a:rPr lang="ja-JP" altLang="en-US" sz="2800" dirty="0" smtClean="0"/>
+              <a:rPr lang="ja-JP" altLang="en-US" sz="2800" dirty="0"/>
               <a:t>文</a:t>
             </a:r>
             <a:r>
-              <a:rPr lang="en-US" altLang="ja-JP" sz="2800" dirty="0" smtClean="0"/>
+              <a:rPr lang="en-US" altLang="ja-JP" sz="2800" dirty="0"/>
               <a:t>n</a:t>
             </a:r>
           </a:p>
           <a:p>
             <a:r>
-              <a:rPr kumimoji="1" lang="en-US" altLang="ja-JP" sz="2800" dirty="0" smtClean="0"/>
+              <a:rPr kumimoji="1" lang="en-US" altLang="ja-JP" sz="2800" dirty="0"/>
               <a:t>    </a:t>
             </a:r>
             <a:r>
-              <a:rPr kumimoji="1" lang="en-US" altLang="ja-JP" sz="2800" b="1" dirty="0" smtClean="0"/>
+              <a:rPr kumimoji="1" lang="en-US" altLang="ja-JP" sz="2800" b="1" dirty="0"/>
               <a:t>end</a:t>
             </a:r>
           </a:p>
           <a:p>
             <a:r>
-              <a:rPr lang="ja-JP" altLang="en-US" sz="2800" dirty="0" smtClean="0"/>
+              <a:rPr lang="ja-JP" altLang="en-US" sz="2800" dirty="0"/>
               <a:t>（</a:t>
             </a:r>
             <a:r>
-              <a:rPr lang="en-US" altLang="ja-JP" sz="2800" dirty="0" smtClean="0"/>
+              <a:rPr lang="en-US" altLang="ja-JP" sz="2800" dirty="0"/>
               <a:t>C</a:t>
             </a:r>
             <a:r>
-              <a:rPr lang="ja-JP" altLang="en-US" sz="2800" dirty="0" smtClean="0"/>
+              <a:rPr lang="ja-JP" altLang="en-US" sz="2800" dirty="0"/>
               <a:t>では選択文は</a:t>
             </a:r>
             <a:r>
-              <a:rPr lang="en-US" altLang="ja-JP" sz="2800" dirty="0" smtClean="0"/>
+              <a:rPr lang="en-US" altLang="ja-JP" sz="2800" dirty="0"/>
               <a:t>switch</a:t>
             </a:r>
             <a:r>
-              <a:rPr lang="ja-JP" altLang="en-US" sz="2800" dirty="0" smtClean="0"/>
+              <a:rPr lang="ja-JP" altLang="en-US" sz="2800" dirty="0"/>
               <a:t>文）</a:t>
             </a:r>
-            <a:endParaRPr lang="en-US" altLang="ja-JP" sz="2800" dirty="0" smtClean="0"/>
+            <a:endParaRPr lang="en-US" altLang="ja-JP" sz="2800" dirty="0"/>
           </a:p>
         </p:txBody>
       </p:sp>
@@ -5557,59 +5529,59 @@
           <a:lstStyle/>
           <a:p>
             <a:r>
-              <a:rPr lang="ja-JP" altLang="en-US" sz="2800" dirty="0" smtClean="0"/>
+              <a:rPr lang="ja-JP" altLang="en-US" sz="2800" dirty="0"/>
               <a:t>（例） </a:t>
             </a:r>
             <a:r>
-              <a:rPr lang="en-US" altLang="ja-JP" sz="2800" b="1" dirty="0" smtClean="0"/>
+              <a:rPr lang="en-US" altLang="ja-JP" sz="2800" b="1" dirty="0"/>
               <a:t>case</a:t>
             </a:r>
             <a:r>
-              <a:rPr lang="en-US" altLang="ja-JP" sz="2800" dirty="0" smtClean="0"/>
+              <a:rPr lang="en-US" altLang="ja-JP" sz="2800" dirty="0"/>
               <a:t> x </a:t>
             </a:r>
             <a:r>
-              <a:rPr lang="en-US" altLang="ja-JP" sz="2800" b="1" dirty="0" smtClean="0"/>
+              <a:rPr lang="en-US" altLang="ja-JP" sz="2800" b="1" dirty="0"/>
               <a:t>of</a:t>
             </a:r>
           </a:p>
           <a:p>
             <a:r>
-              <a:rPr kumimoji="1" lang="en-US" altLang="ja-JP" sz="2800" dirty="0" smtClean="0"/>
+              <a:rPr kumimoji="1" lang="en-US" altLang="ja-JP" sz="2800" dirty="0"/>
               <a:t>              1 : </a:t>
             </a:r>
             <a:r>
-              <a:rPr kumimoji="1" lang="en-US" altLang="ja-JP" sz="2800" b="1" dirty="0" smtClean="0"/>
+              <a:rPr kumimoji="1" lang="en-US" altLang="ja-JP" sz="2800" b="1" dirty="0"/>
               <a:t>begin</a:t>
             </a:r>
             <a:r>
-              <a:rPr kumimoji="1" lang="en-US" altLang="ja-JP" sz="2800" dirty="0" smtClean="0"/>
+              <a:rPr kumimoji="1" lang="en-US" altLang="ja-JP" sz="2800" dirty="0"/>
               <a:t> y:=x; x:=0 </a:t>
             </a:r>
             <a:r>
-              <a:rPr kumimoji="1" lang="en-US" altLang="ja-JP" sz="2800" b="1" dirty="0" smtClean="0"/>
+              <a:rPr kumimoji="1" lang="en-US" altLang="ja-JP" sz="2800" b="1" dirty="0"/>
               <a:t>end;</a:t>
             </a:r>
           </a:p>
           <a:p>
             <a:r>
-              <a:rPr lang="en-US" altLang="ja-JP" sz="2800" dirty="0" smtClean="0"/>
+              <a:rPr lang="en-US" altLang="ja-JP" sz="2800" dirty="0"/>
               <a:t>              2:  y:=x+1;</a:t>
             </a:r>
           </a:p>
           <a:p>
             <a:r>
-              <a:rPr lang="en-US" altLang="ja-JP" sz="2800" dirty="0" smtClean="0"/>
+              <a:rPr lang="en-US" altLang="ja-JP" sz="2800" dirty="0"/>
               <a:t>              4:  y:=x+2</a:t>
             </a:r>
           </a:p>
           <a:p>
             <a:r>
-              <a:rPr kumimoji="1" lang="en-US" altLang="ja-JP" sz="2800" dirty="0" smtClean="0"/>
+              <a:rPr kumimoji="1" lang="en-US" altLang="ja-JP" sz="2800" dirty="0"/>
               <a:t>          </a:t>
             </a:r>
             <a:r>
-              <a:rPr kumimoji="1" lang="en-US" altLang="ja-JP" sz="2800" b="1" dirty="0" smtClean="0"/>
+              <a:rPr kumimoji="1" lang="en-US" altLang="ja-JP" sz="2800" b="1" dirty="0"/>
               <a:t>end</a:t>
             </a:r>
           </a:p>
@@ -5678,7 +5650,7 @@
           <a:lstStyle/>
           <a:p>
             <a:r>
-              <a:rPr lang="en-US" altLang="ja-JP" sz="2800" dirty="0" smtClean="0"/>
+              <a:rPr lang="en-US" altLang="ja-JP" sz="2800" dirty="0"/>
               <a:t>Entry</a:t>
             </a:r>
           </a:p>
@@ -5710,7 +5682,7 @@
           <a:lstStyle/>
           <a:p>
             <a:r>
-              <a:rPr lang="en-US" altLang="ja-JP" sz="2800" dirty="0" smtClean="0"/>
+              <a:rPr lang="en-US" altLang="ja-JP" sz="2800" dirty="0"/>
               <a:t>y := x</a:t>
             </a:r>
           </a:p>
@@ -5742,7 +5714,7 @@
           <a:lstStyle/>
           <a:p>
             <a:r>
-              <a:rPr lang="en-US" altLang="ja-JP" sz="2800" dirty="0" smtClean="0"/>
+              <a:rPr lang="en-US" altLang="ja-JP" sz="2800" dirty="0"/>
               <a:t> y := x+2</a:t>
             </a:r>
           </a:p>
@@ -5880,7 +5852,7 @@
           <a:lstStyle/>
           <a:p>
             <a:r>
-              <a:rPr kumimoji="1" lang="en-US" altLang="ja-JP" sz="2800" dirty="0" smtClean="0"/>
+              <a:rPr kumimoji="1" lang="en-US" altLang="ja-JP" sz="2800" dirty="0"/>
               <a:t>1</a:t>
             </a:r>
             <a:endParaRPr kumimoji="1" lang="ja-JP" altLang="en-US" sz="2800" dirty="0"/>
@@ -5910,7 +5882,7 @@
           <a:lstStyle/>
           <a:p>
             <a:r>
-              <a:rPr kumimoji="1" lang="en-US" altLang="ja-JP" sz="2800" dirty="0" smtClean="0"/>
+              <a:rPr kumimoji="1" lang="en-US" altLang="ja-JP" sz="2800" dirty="0"/>
               <a:t>4</a:t>
             </a:r>
             <a:endParaRPr kumimoji="1" lang="ja-JP" altLang="en-US" sz="2800" dirty="0"/>
@@ -5976,7 +5948,7 @@
           <a:lstStyle/>
           <a:p>
             <a:r>
-              <a:rPr lang="en-US" altLang="ja-JP" sz="2800" dirty="0" smtClean="0"/>
+              <a:rPr lang="en-US" altLang="ja-JP" sz="2800" dirty="0"/>
               <a:t>  x := 0 </a:t>
             </a:r>
           </a:p>
@@ -6025,7 +5997,7 @@
           <a:p>
             <a:pPr algn="ctr"/>
             <a:r>
-              <a:rPr kumimoji="1" lang="en-US" altLang="ja-JP" sz="2800" dirty="0" smtClean="0">
+              <a:rPr kumimoji="1" lang="en-US" altLang="ja-JP" sz="2800" dirty="0">
                 <a:solidFill>
                   <a:schemeClr val="tx1"/>
                 </a:solidFill>
@@ -6174,7 +6146,7 @@
           <a:lstStyle/>
           <a:p>
             <a:r>
-              <a:rPr kumimoji="1" lang="en-US" altLang="ja-JP" sz="2800" dirty="0" smtClean="0"/>
+              <a:rPr kumimoji="1" lang="en-US" altLang="ja-JP" sz="2800" dirty="0"/>
               <a:t>2</a:t>
             </a:r>
             <a:endParaRPr kumimoji="1" lang="ja-JP" altLang="en-US" sz="2800" dirty="0"/>
@@ -6204,7 +6176,7 @@
           <a:lstStyle/>
           <a:p>
             <a:r>
-              <a:rPr lang="en-US" altLang="ja-JP" sz="2800" dirty="0" smtClean="0"/>
+              <a:rPr lang="en-US" altLang="ja-JP" sz="2800" dirty="0"/>
               <a:t>  y := x+1 </a:t>
             </a:r>
           </a:p>
@@ -6346,7 +6318,7 @@
           <a:lstStyle/>
           <a:p>
             <a:r>
-              <a:rPr lang="en-US" altLang="ja-JP" sz="2800" dirty="0" smtClean="0"/>
+              <a:rPr lang="en-US" altLang="ja-JP" sz="2800" dirty="0"/>
               <a:t>Exit</a:t>
             </a:r>
           </a:p>
@@ -6572,18 +6544,9 @@
           <a:lstStyle/>
           <a:p>
             <a:r>
-              <a:rPr kumimoji="1" lang="ja-JP" altLang="en-US" dirty="0" smtClean="0"/>
-              <a:t>練習</a:t>
-            </a:r>
-            <a:r>
-              <a:rPr kumimoji="1" lang="ja-JP" altLang="en-US" dirty="0" smtClean="0"/>
-              <a:t>問題</a:t>
-            </a:r>
-            <a:r>
-              <a:rPr kumimoji="1" lang="ja-JP" altLang="en-US" dirty="0" smtClean="0"/>
-              <a:t>２</a:t>
-            </a:r>
-            <a:endParaRPr kumimoji="1" lang="ja-JP" altLang="en-US" dirty="0"/>
+              <a:rPr kumimoji="1" lang="ja-JP" altLang="en-US" dirty="0"/>
+              <a:t>練習問題２</a:t>
+            </a:r>
           </a:p>
         </p:txBody>
       </p:sp>
@@ -6610,90 +6573,90 @@
           <a:lstStyle/>
           <a:p>
             <a:r>
-              <a:rPr lang="ja-JP" altLang="en-US" sz="2800" dirty="0" smtClean="0"/>
+              <a:rPr lang="ja-JP" altLang="en-US" sz="2800" dirty="0"/>
               <a:t>以下のプログラム断片の制御フローを図示せよ。</a:t>
             </a:r>
-            <a:endParaRPr lang="en-US" altLang="ja-JP" sz="2800" dirty="0" smtClean="0"/>
-          </a:p>
-          <a:p>
-            <a:r>
-              <a:rPr lang="en-US" altLang="ja-JP" sz="2800" dirty="0" smtClean="0"/>
+            <a:endParaRPr lang="en-US" altLang="ja-JP" sz="2800" dirty="0"/>
+          </a:p>
+          <a:p>
+            <a:r>
+              <a:rPr lang="en-US" altLang="ja-JP" sz="2800" dirty="0"/>
               <a:t>y := 3;</a:t>
             </a:r>
           </a:p>
           <a:p>
             <a:r>
-              <a:rPr lang="en-US" altLang="ja-JP" sz="2800" b="1" dirty="0" smtClean="0"/>
+              <a:rPr lang="en-US" altLang="ja-JP" sz="2800" b="1" dirty="0"/>
               <a:t>case</a:t>
             </a:r>
             <a:r>
-              <a:rPr lang="en-US" altLang="ja-JP" sz="2800" dirty="0" smtClean="0"/>
+              <a:rPr lang="en-US" altLang="ja-JP" sz="2800" dirty="0"/>
               <a:t> x </a:t>
             </a:r>
             <a:r>
-              <a:rPr lang="en-US" altLang="ja-JP" sz="2800" b="1" dirty="0" smtClean="0"/>
+              <a:rPr lang="en-US" altLang="ja-JP" sz="2800" b="1" dirty="0"/>
               <a:t>of</a:t>
             </a:r>
           </a:p>
           <a:p>
             <a:r>
-              <a:rPr lang="en-US" altLang="ja-JP" sz="2800" dirty="0" smtClean="0"/>
+              <a:rPr lang="en-US" altLang="ja-JP" sz="2800" dirty="0"/>
               <a:t>    1 : y := 1;</a:t>
             </a:r>
           </a:p>
           <a:p>
             <a:r>
-              <a:rPr lang="en-US" altLang="ja-JP" sz="2800" dirty="0" smtClean="0"/>
+              <a:rPr lang="en-US" altLang="ja-JP" sz="2800" dirty="0"/>
               <a:t>    2 : y := x * 2;</a:t>
             </a:r>
           </a:p>
           <a:p>
             <a:r>
-              <a:rPr lang="en-US" altLang="ja-JP" sz="2800" dirty="0" smtClean="0"/>
+              <a:rPr lang="en-US" altLang="ja-JP" sz="2800" dirty="0"/>
               <a:t>    3 : </a:t>
             </a:r>
             <a:r>
-              <a:rPr lang="en-US" altLang="ja-JP" sz="2800" b="1" dirty="0" smtClean="0"/>
+              <a:rPr lang="en-US" altLang="ja-JP" sz="2800" b="1" dirty="0"/>
               <a:t>if</a:t>
             </a:r>
             <a:r>
-              <a:rPr lang="en-US" altLang="ja-JP" sz="2800" dirty="0" smtClean="0"/>
+              <a:rPr lang="en-US" altLang="ja-JP" sz="2800" dirty="0"/>
               <a:t> z = 0 </a:t>
             </a:r>
             <a:r>
-              <a:rPr lang="en-US" altLang="ja-JP" sz="2800" b="1" dirty="0" smtClean="0"/>
+              <a:rPr lang="en-US" altLang="ja-JP" sz="2800" b="1" dirty="0"/>
               <a:t>then</a:t>
             </a:r>
           </a:p>
           <a:p>
             <a:r>
-              <a:rPr lang="en-US" altLang="ja-JP" sz="2800" dirty="0" smtClean="0"/>
+              <a:rPr lang="en-US" altLang="ja-JP" sz="2800" dirty="0"/>
               <a:t>              y := y * y</a:t>
             </a:r>
           </a:p>
           <a:p>
             <a:r>
-              <a:rPr lang="en-US" altLang="ja-JP" sz="2800" dirty="0" smtClean="0"/>
+              <a:rPr lang="en-US" altLang="ja-JP" sz="2800" dirty="0"/>
               <a:t>         </a:t>
             </a:r>
             <a:r>
-              <a:rPr lang="en-US" altLang="ja-JP" sz="2800" b="1" dirty="0" smtClean="0"/>
+              <a:rPr lang="en-US" altLang="ja-JP" sz="2800" b="1" dirty="0"/>
               <a:t>else</a:t>
             </a:r>
             <a:r>
-              <a:rPr lang="en-US" altLang="ja-JP" sz="2800" dirty="0" smtClean="0"/>
+              <a:rPr lang="en-US" altLang="ja-JP" sz="2800" dirty="0"/>
               <a:t> </a:t>
             </a:r>
           </a:p>
           <a:p>
             <a:r>
-              <a:rPr lang="en-US" altLang="ja-JP" sz="2800" dirty="0" smtClean="0"/>
+              <a:rPr lang="en-US" altLang="ja-JP" sz="2800" dirty="0"/>
               <a:t>              y := y * y * y</a:t>
             </a:r>
           </a:p>
           <a:p>
             <a:r>
-              <a:rPr lang="en-US" altLang="ja-JP" sz="2800" b="1" dirty="0" smtClean="0"/>
+              <a:rPr lang="en-US" altLang="ja-JP" sz="2800" b="1" dirty="0"/>
               <a:t>end</a:t>
             </a:r>
           </a:p>
@@ -6742,10 +6705,9 @@
           <a:lstStyle/>
           <a:p>
             <a:r>
-              <a:rPr kumimoji="1" lang="ja-JP" altLang="en-US" sz="3600" dirty="0" smtClean="0"/>
+              <a:rPr kumimoji="1" lang="ja-JP" altLang="en-US" sz="3600" dirty="0"/>
               <a:t>繰り返し文における特殊ケースの扱い</a:t>
             </a:r>
-            <a:endParaRPr kumimoji="1" lang="ja-JP" altLang="en-US" sz="3600" dirty="0"/>
           </a:p>
         </p:txBody>
       </p:sp>
@@ -6772,64 +6734,64 @@
           <a:lstStyle/>
           <a:p>
             <a:r>
-              <a:rPr lang="en-US" altLang="ja-JP" sz="2800" dirty="0" smtClean="0"/>
+              <a:rPr lang="en-US" altLang="ja-JP" sz="2800" dirty="0"/>
               <a:t>b</a:t>
             </a:r>
             <a:r>
-              <a:rPr kumimoji="1" lang="en-US" altLang="ja-JP" sz="2800" dirty="0" smtClean="0"/>
+              <a:rPr kumimoji="1" lang="en-US" altLang="ja-JP" sz="2800" dirty="0"/>
               <a:t>reak</a:t>
             </a:r>
             <a:r>
-              <a:rPr kumimoji="1" lang="ja-JP" altLang="en-US" sz="2800" dirty="0" smtClean="0"/>
+              <a:rPr kumimoji="1" lang="ja-JP" altLang="en-US" sz="2800" dirty="0"/>
               <a:t>文、</a:t>
             </a:r>
             <a:r>
-              <a:rPr kumimoji="1" lang="en-US" altLang="ja-JP" sz="2800" dirty="0" smtClean="0"/>
+              <a:rPr kumimoji="1" lang="en-US" altLang="ja-JP" sz="2800" dirty="0"/>
               <a:t>continue</a:t>
             </a:r>
             <a:r>
-              <a:rPr kumimoji="1" lang="ja-JP" altLang="en-US" sz="2800" dirty="0" smtClean="0"/>
+              <a:rPr kumimoji="1" lang="ja-JP" altLang="en-US" sz="2800" dirty="0"/>
               <a:t>文</a:t>
             </a:r>
             <a:r>
-              <a:rPr kumimoji="1" lang="en-US" altLang="ja-JP" sz="2800" dirty="0" smtClean="0"/>
+              <a:rPr kumimoji="1" lang="en-US" altLang="ja-JP" sz="2800" dirty="0"/>
               <a:t>(C</a:t>
             </a:r>
             <a:r>
-              <a:rPr lang="ja-JP" altLang="en-US" sz="2800" dirty="0" smtClean="0"/>
+              <a:rPr lang="ja-JP" altLang="en-US" sz="2800" dirty="0"/>
               <a:t>言語</a:t>
             </a:r>
             <a:r>
-              <a:rPr kumimoji="1" lang="ja-JP" altLang="en-US" sz="2800" dirty="0" smtClean="0"/>
+              <a:rPr kumimoji="1" lang="ja-JP" altLang="en-US" sz="2800" dirty="0"/>
               <a:t>等</a:t>
             </a:r>
             <a:r>
-              <a:rPr kumimoji="1" lang="en-US" altLang="ja-JP" sz="2800" dirty="0" smtClean="0"/>
+              <a:rPr kumimoji="1" lang="en-US" altLang="ja-JP" sz="2800" dirty="0"/>
               <a:t>)</a:t>
             </a:r>
           </a:p>
           <a:p>
             <a:r>
-              <a:rPr lang="en-US" altLang="ja-JP" sz="2800" dirty="0" smtClean="0"/>
+              <a:rPr lang="en-US" altLang="ja-JP" sz="2800" dirty="0"/>
               <a:t>b</a:t>
             </a:r>
             <a:r>
-              <a:rPr kumimoji="1" lang="en-US" altLang="ja-JP" sz="2800" dirty="0" smtClean="0"/>
+              <a:rPr kumimoji="1" lang="en-US" altLang="ja-JP" sz="2800" dirty="0"/>
               <a:t>reak</a:t>
             </a:r>
             <a:r>
-              <a:rPr kumimoji="1" lang="ja-JP" altLang="en-US" sz="2800" dirty="0" smtClean="0"/>
+              <a:rPr kumimoji="1" lang="ja-JP" altLang="en-US" sz="2800" dirty="0"/>
               <a:t>文が実行されると、それが属する最も内側の繰り返し文を脱出する。（繰り返し文の次の文へ制御が移る。）</a:t>
             </a:r>
-            <a:endParaRPr kumimoji="1" lang="en-US" altLang="ja-JP" sz="2800" dirty="0" smtClean="0"/>
-          </a:p>
-          <a:p>
-            <a:r>
-              <a:rPr lang="en-US" altLang="ja-JP" sz="2800" dirty="0" smtClean="0"/>
+            <a:endParaRPr kumimoji="1" lang="en-US" altLang="ja-JP" sz="2800" dirty="0"/>
+          </a:p>
+          <a:p>
+            <a:r>
+              <a:rPr lang="en-US" altLang="ja-JP" sz="2800" dirty="0"/>
               <a:t>continue</a:t>
             </a:r>
             <a:r>
-              <a:rPr lang="ja-JP" altLang="en-US" sz="2800" dirty="0" smtClean="0"/>
+              <a:rPr lang="ja-JP" altLang="en-US" sz="2800" dirty="0"/>
               <a:t>文が実行されると、それが属する最も内側の繰り返し文のループ継続部（ループ本体の終わり）に制御が移る。</a:t>
             </a:r>
             <a:endParaRPr kumimoji="1" lang="ja-JP" altLang="en-US" sz="2800" dirty="0"/>
@@ -6877,11 +6839,11 @@
           <a:lstStyle/>
           <a:p>
             <a:r>
-              <a:rPr lang="en-US" altLang="ja-JP" dirty="0" smtClean="0"/>
+              <a:rPr lang="en-US" altLang="ja-JP" dirty="0"/>
               <a:t>break</a:t>
             </a:r>
             <a:r>
-              <a:rPr lang="ja-JP" altLang="en-US" dirty="0" smtClean="0"/>
+              <a:rPr lang="ja-JP" altLang="en-US" dirty="0"/>
               <a:t>文の使用例</a:t>
             </a:r>
             <a:endParaRPr kumimoji="1" lang="ja-JP" altLang="en-US" dirty="0"/>
@@ -6911,62 +6873,62 @@
           <a:lstStyle/>
           <a:p>
             <a:r>
-              <a:rPr lang="en-US" altLang="ja-JP" sz="2800" b="1" dirty="0" smtClean="0"/>
+              <a:rPr lang="en-US" altLang="ja-JP" sz="2800" b="1" dirty="0"/>
               <a:t>while</a:t>
             </a:r>
             <a:r>
-              <a:rPr lang="en-US" altLang="ja-JP" sz="2800" dirty="0" smtClean="0"/>
+              <a:rPr lang="en-US" altLang="ja-JP" sz="2800" dirty="0"/>
               <a:t> x&gt;0 </a:t>
             </a:r>
             <a:r>
-              <a:rPr lang="en-US" altLang="ja-JP" sz="2800" b="1" dirty="0" smtClean="0"/>
+              <a:rPr lang="en-US" altLang="ja-JP" sz="2800" b="1" dirty="0"/>
               <a:t>do</a:t>
             </a:r>
           </a:p>
           <a:p>
             <a:r>
-              <a:rPr lang="en-US" altLang="ja-JP" sz="2800" b="1" dirty="0" smtClean="0"/>
+              <a:rPr lang="en-US" altLang="ja-JP" sz="2800" b="1" dirty="0"/>
               <a:t>    begin</a:t>
             </a:r>
           </a:p>
           <a:p>
             <a:r>
-              <a:rPr lang="en-US" altLang="ja-JP" sz="2800" dirty="0" smtClean="0"/>
+              <a:rPr lang="en-US" altLang="ja-JP" sz="2800" dirty="0"/>
               <a:t>        </a:t>
             </a:r>
             <a:r>
-              <a:rPr lang="en-US" altLang="ja-JP" sz="2800" b="1" dirty="0" smtClean="0"/>
+              <a:rPr lang="en-US" altLang="ja-JP" sz="2800" b="1" dirty="0"/>
               <a:t>if</a:t>
             </a:r>
             <a:r>
-              <a:rPr lang="en-US" altLang="ja-JP" sz="2800" dirty="0" smtClean="0"/>
+              <a:rPr lang="en-US" altLang="ja-JP" sz="2800" dirty="0"/>
               <a:t> x=5 </a:t>
             </a:r>
             <a:r>
-              <a:rPr lang="en-US" altLang="ja-JP" sz="2800" b="1" dirty="0" smtClean="0"/>
+              <a:rPr lang="en-US" altLang="ja-JP" sz="2800" b="1" dirty="0"/>
               <a:t>then</a:t>
             </a:r>
           </a:p>
           <a:p>
             <a:r>
-              <a:rPr kumimoji="1" lang="en-US" altLang="ja-JP" sz="2800" dirty="0" smtClean="0"/>
+              <a:rPr kumimoji="1" lang="en-US" altLang="ja-JP" sz="2800" dirty="0"/>
               <a:t>            break;</a:t>
             </a:r>
-            <a:endParaRPr lang="en-US" altLang="ja-JP" sz="2800" b="1" dirty="0" smtClean="0"/>
-          </a:p>
-          <a:p>
-            <a:r>
-              <a:rPr kumimoji="1" lang="en-US" altLang="ja-JP" sz="2800" dirty="0" smtClean="0"/>
+            <a:endParaRPr lang="en-US" altLang="ja-JP" sz="2800" b="1" dirty="0"/>
+          </a:p>
+          <a:p>
+            <a:r>
+              <a:rPr kumimoji="1" lang="en-US" altLang="ja-JP" sz="2800" dirty="0"/>
               <a:t>        x := x-1</a:t>
             </a:r>
           </a:p>
           <a:p>
             <a:r>
-              <a:rPr lang="en-US" altLang="ja-JP" sz="2800" dirty="0" smtClean="0"/>
+              <a:rPr lang="en-US" altLang="ja-JP" sz="2800" dirty="0"/>
               <a:t>   </a:t>
             </a:r>
             <a:r>
-              <a:rPr lang="en-US" altLang="ja-JP" sz="2800" b="1" dirty="0" smtClean="0"/>
+              <a:rPr lang="en-US" altLang="ja-JP" sz="2800" b="1" dirty="0"/>
               <a:t> end</a:t>
             </a:r>
             <a:endParaRPr kumimoji="1" lang="ja-JP" altLang="en-US" sz="2800" b="1" dirty="0"/>
@@ -6996,50 +6958,50 @@
           <a:lstStyle/>
           <a:p>
             <a:r>
-              <a:rPr lang="en-US" altLang="ja-JP" sz="2800" dirty="0" smtClean="0"/>
+              <a:rPr lang="en-US" altLang="ja-JP" sz="2800" dirty="0"/>
               <a:t>b</a:t>
             </a:r>
             <a:r>
-              <a:rPr kumimoji="1" lang="en-US" altLang="ja-JP" sz="2800" dirty="0" smtClean="0"/>
+              <a:rPr kumimoji="1" lang="en-US" altLang="ja-JP" sz="2800" dirty="0"/>
               <a:t>reak</a:t>
             </a:r>
             <a:r>
-              <a:rPr kumimoji="1" lang="ja-JP" altLang="en-US" sz="2800" dirty="0" smtClean="0"/>
+              <a:rPr kumimoji="1" lang="ja-JP" altLang="en-US" sz="2800" dirty="0"/>
               <a:t>文によって、</a:t>
             </a:r>
             <a:r>
-              <a:rPr kumimoji="1" lang="en-US" altLang="ja-JP" sz="2800" dirty="0" smtClean="0"/>
+              <a:rPr kumimoji="1" lang="en-US" altLang="ja-JP" sz="2800" dirty="0"/>
               <a:t>if</a:t>
             </a:r>
             <a:r>
-              <a:rPr kumimoji="1" lang="ja-JP" altLang="en-US" sz="2800" dirty="0" smtClean="0"/>
+              <a:rPr kumimoji="1" lang="ja-JP" altLang="en-US" sz="2800" dirty="0"/>
               <a:t>文の出口は</a:t>
             </a:r>
             <a:r>
-              <a:rPr lang="en-US" altLang="ja-JP" sz="2800" dirty="0" smtClean="0"/>
+              <a:rPr lang="en-US" altLang="ja-JP" sz="2800" dirty="0"/>
               <a:t>2</a:t>
             </a:r>
             <a:r>
-              <a:rPr lang="ja-JP" altLang="en-US" sz="2800" dirty="0" smtClean="0"/>
+              <a:rPr lang="ja-JP" altLang="en-US" sz="2800" dirty="0"/>
               <a:t>つになったが、</a:t>
             </a:r>
             <a:r>
-              <a:rPr lang="en-US" altLang="ja-JP" sz="2800" dirty="0" smtClean="0"/>
+              <a:rPr lang="en-US" altLang="ja-JP" sz="2800" dirty="0"/>
               <a:t>while</a:t>
             </a:r>
             <a:r>
-              <a:rPr lang="ja-JP" altLang="en-US" sz="2800" dirty="0" smtClean="0"/>
+              <a:rPr lang="ja-JP" altLang="en-US" sz="2800" dirty="0"/>
               <a:t>文全体は</a:t>
             </a:r>
             <a:r>
-              <a:rPr lang="en-US" altLang="ja-JP" sz="2800" dirty="0" smtClean="0"/>
+              <a:rPr lang="en-US" altLang="ja-JP" sz="2800" dirty="0"/>
               <a:t>single entry, single exit</a:t>
             </a:r>
             <a:r>
-              <a:rPr lang="ja-JP" altLang="en-US" sz="2800" dirty="0" smtClean="0"/>
+              <a:rPr lang="ja-JP" altLang="en-US" sz="2800" dirty="0"/>
               <a:t>である。</a:t>
             </a:r>
-            <a:endParaRPr kumimoji="1" lang="en-US" altLang="ja-JP" sz="2800" dirty="0" smtClean="0"/>
+            <a:endParaRPr kumimoji="1" lang="en-US" altLang="ja-JP" sz="2800" dirty="0"/>
           </a:p>
         </p:txBody>
       </p:sp>
@@ -7106,7 +7068,7 @@
           <a:lstStyle/>
           <a:p>
             <a:r>
-              <a:rPr lang="en-US" altLang="ja-JP" sz="2800" dirty="0" smtClean="0"/>
+              <a:rPr lang="en-US" altLang="ja-JP" sz="2800" dirty="0"/>
               <a:t>Entry</a:t>
             </a:r>
           </a:p>
@@ -7155,7 +7117,7 @@
           <a:p>
             <a:pPr algn="ctr"/>
             <a:r>
-              <a:rPr lang="en-US" altLang="ja-JP" sz="2800" dirty="0" smtClean="0">
+              <a:rPr lang="en-US" altLang="ja-JP" sz="2800" dirty="0">
                 <a:solidFill>
                   <a:schemeClr val="tx1"/>
                 </a:solidFill>
@@ -7270,7 +7232,7 @@
           <a:lstStyle/>
           <a:p>
             <a:r>
-              <a:rPr lang="en-US" altLang="ja-JP" sz="2800" dirty="0" smtClean="0"/>
+              <a:rPr lang="en-US" altLang="ja-JP" sz="2800" dirty="0"/>
               <a:t>Exit</a:t>
             </a:r>
           </a:p>
@@ -7299,7 +7261,7 @@
           <a:lstStyle/>
           <a:p>
             <a:r>
-              <a:rPr kumimoji="1" lang="en-US" altLang="ja-JP" sz="2800" dirty="0" smtClean="0"/>
+              <a:rPr kumimoji="1" lang="en-US" altLang="ja-JP" sz="2800" dirty="0"/>
               <a:t>T</a:t>
             </a:r>
             <a:endParaRPr kumimoji="1" lang="ja-JP" altLang="en-US" sz="2800" dirty="0"/>
@@ -7329,7 +7291,7 @@
           <a:lstStyle/>
           <a:p>
             <a:r>
-              <a:rPr kumimoji="1" lang="en-US" altLang="ja-JP" sz="2800" dirty="0" smtClean="0"/>
+              <a:rPr kumimoji="1" lang="en-US" altLang="ja-JP" sz="2800" dirty="0"/>
               <a:t>F</a:t>
             </a:r>
             <a:endParaRPr kumimoji="1" lang="ja-JP" altLang="en-US" sz="2800" dirty="0"/>
@@ -7359,7 +7321,7 @@
           <a:lstStyle/>
           <a:p>
             <a:r>
-              <a:rPr lang="en-US" altLang="ja-JP" sz="2800" dirty="0" smtClean="0"/>
+              <a:rPr lang="en-US" altLang="ja-JP" sz="2800" dirty="0"/>
               <a:t>  x := x-1</a:t>
             </a:r>
           </a:p>
@@ -7408,7 +7370,7 @@
           <a:p>
             <a:pPr algn="ctr"/>
             <a:r>
-              <a:rPr lang="en-US" altLang="ja-JP" sz="2800" dirty="0" smtClean="0">
+              <a:rPr lang="en-US" altLang="ja-JP" sz="2800" dirty="0">
                 <a:solidFill>
                   <a:schemeClr val="tx1"/>
                 </a:solidFill>
@@ -7484,7 +7446,7 @@
           <a:lstStyle/>
           <a:p>
             <a:r>
-              <a:rPr kumimoji="1" lang="en-US" altLang="ja-JP" sz="2800" dirty="0" smtClean="0"/>
+              <a:rPr kumimoji="1" lang="en-US" altLang="ja-JP" sz="2800" dirty="0"/>
               <a:t>T</a:t>
             </a:r>
             <a:endParaRPr kumimoji="1" lang="ja-JP" altLang="en-US" sz="2800" dirty="0"/>
@@ -7776,7 +7738,7 @@
           <a:lstStyle/>
           <a:p>
             <a:r>
-              <a:rPr kumimoji="1" lang="en-US" altLang="ja-JP" sz="2800" dirty="0" smtClean="0"/>
+              <a:rPr kumimoji="1" lang="en-US" altLang="ja-JP" sz="2800" dirty="0"/>
               <a:t>F</a:t>
             </a:r>
             <a:endParaRPr kumimoji="1" lang="ja-JP" altLang="en-US" sz="2800" dirty="0"/>
@@ -7871,18 +7833,9 @@
           <a:lstStyle/>
           <a:p>
             <a:r>
-              <a:rPr kumimoji="1" lang="ja-JP" altLang="en-US" dirty="0" smtClean="0"/>
-              <a:t>練習</a:t>
-            </a:r>
-            <a:r>
-              <a:rPr kumimoji="1" lang="ja-JP" altLang="en-US" dirty="0" smtClean="0"/>
-              <a:t>問題</a:t>
-            </a:r>
-            <a:r>
-              <a:rPr kumimoji="1" lang="ja-JP" altLang="en-US" dirty="0" smtClean="0"/>
-              <a:t>３</a:t>
-            </a:r>
-            <a:endParaRPr kumimoji="1" lang="ja-JP" altLang="en-US" dirty="0"/>
+              <a:rPr kumimoji="1" lang="ja-JP" altLang="en-US" dirty="0"/>
+              <a:t>練習問題３</a:t>
+            </a:r>
           </a:p>
         </p:txBody>
       </p:sp>
@@ -7909,75 +7862,75 @@
           <a:lstStyle/>
           <a:p>
             <a:r>
-              <a:rPr lang="ja-JP" altLang="en-US" sz="2800" dirty="0" smtClean="0"/>
+              <a:rPr lang="ja-JP" altLang="en-US" sz="2800" dirty="0"/>
               <a:t>以下のプログラム断片の制御フローを図示せよ。</a:t>
             </a:r>
-            <a:endParaRPr lang="en-US" altLang="ja-JP" sz="2800" dirty="0" smtClean="0"/>
-          </a:p>
-          <a:p>
-            <a:r>
-              <a:rPr lang="en-US" altLang="ja-JP" sz="2800" b="1" dirty="0" smtClean="0"/>
+            <a:endParaRPr lang="en-US" altLang="ja-JP" sz="2800" dirty="0"/>
+          </a:p>
+          <a:p>
+            <a:r>
+              <a:rPr lang="en-US" altLang="ja-JP" sz="2800" b="1" dirty="0"/>
               <a:t>while</a:t>
             </a:r>
             <a:r>
-              <a:rPr lang="en-US" altLang="ja-JP" sz="2800" dirty="0" smtClean="0"/>
+              <a:rPr lang="en-US" altLang="ja-JP" sz="2800" dirty="0"/>
               <a:t> x&gt;0  </a:t>
             </a:r>
             <a:r>
-              <a:rPr lang="en-US" altLang="ja-JP" sz="2800" b="1" dirty="0" smtClean="0"/>
+              <a:rPr lang="en-US" altLang="ja-JP" sz="2800" b="1" dirty="0"/>
               <a:t>do</a:t>
             </a:r>
           </a:p>
           <a:p>
             <a:r>
-              <a:rPr lang="en-US" altLang="ja-JP" sz="2800" b="1" dirty="0" smtClean="0"/>
+              <a:rPr lang="en-US" altLang="ja-JP" sz="2800" b="1" dirty="0"/>
               <a:t>    begin</a:t>
             </a:r>
           </a:p>
           <a:p>
             <a:r>
-              <a:rPr lang="en-US" altLang="ja-JP" sz="2800" dirty="0" smtClean="0"/>
+              <a:rPr lang="en-US" altLang="ja-JP" sz="2800" dirty="0"/>
               <a:t>        </a:t>
             </a:r>
             <a:r>
-              <a:rPr lang="en-US" altLang="ja-JP" sz="2800" b="1" dirty="0" smtClean="0"/>
+              <a:rPr lang="en-US" altLang="ja-JP" sz="2800" b="1" dirty="0"/>
               <a:t>if</a:t>
             </a:r>
             <a:r>
-              <a:rPr lang="en-US" altLang="ja-JP" sz="2800" dirty="0" smtClean="0"/>
+              <a:rPr lang="en-US" altLang="ja-JP" sz="2800" dirty="0"/>
               <a:t> x=3 </a:t>
             </a:r>
             <a:r>
-              <a:rPr lang="en-US" altLang="ja-JP" sz="2800" b="1" dirty="0" smtClean="0"/>
+              <a:rPr lang="en-US" altLang="ja-JP" sz="2800" b="1" dirty="0"/>
               <a:t>then</a:t>
             </a:r>
           </a:p>
           <a:p>
             <a:r>
-              <a:rPr kumimoji="1" lang="en-US" altLang="ja-JP" sz="2800" dirty="0" smtClean="0"/>
+              <a:rPr kumimoji="1" lang="en-US" altLang="ja-JP" sz="2800" dirty="0"/>
               <a:t>            break;</a:t>
             </a:r>
-            <a:endParaRPr lang="en-US" altLang="ja-JP" sz="2800" b="1" dirty="0" smtClean="0"/>
-          </a:p>
-          <a:p>
-            <a:r>
-              <a:rPr kumimoji="1" lang="en-US" altLang="ja-JP" sz="2800" dirty="0" smtClean="0"/>
+            <a:endParaRPr lang="en-US" altLang="ja-JP" sz="2800" b="1" dirty="0"/>
+          </a:p>
+          <a:p>
+            <a:r>
+              <a:rPr kumimoji="1" lang="en-US" altLang="ja-JP" sz="2800" dirty="0"/>
               <a:t>        y := y + 1;</a:t>
             </a:r>
           </a:p>
           <a:p>
             <a:r>
-              <a:rPr kumimoji="1" lang="en-US" altLang="ja-JP" sz="2800" dirty="0" smtClean="0"/>
+              <a:rPr kumimoji="1" lang="en-US" altLang="ja-JP" sz="2800" dirty="0"/>
               <a:t>        x := x - 1</a:t>
             </a:r>
           </a:p>
           <a:p>
             <a:r>
-              <a:rPr lang="en-US" altLang="ja-JP" sz="2800" dirty="0" smtClean="0"/>
+              <a:rPr lang="en-US" altLang="ja-JP" sz="2800" dirty="0"/>
               <a:t>   </a:t>
             </a:r>
             <a:r>
-              <a:rPr lang="en-US" altLang="ja-JP" sz="2800" b="1" dirty="0" smtClean="0"/>
+              <a:rPr lang="en-US" altLang="ja-JP" sz="2800" b="1" dirty="0"/>
               <a:t> end</a:t>
             </a:r>
             <a:endParaRPr kumimoji="1" lang="ja-JP" altLang="en-US" sz="2800" b="1" dirty="0"/>
@@ -8025,18 +7978,9 @@
           <a:lstStyle/>
           <a:p>
             <a:r>
-              <a:rPr kumimoji="1" lang="ja-JP" altLang="en-US" dirty="0" smtClean="0"/>
-              <a:t>練習</a:t>
-            </a:r>
-            <a:r>
-              <a:rPr kumimoji="1" lang="ja-JP" altLang="en-US" dirty="0" smtClean="0"/>
-              <a:t>問題</a:t>
-            </a:r>
-            <a:r>
-              <a:rPr kumimoji="1" lang="ja-JP" altLang="en-US" dirty="0" smtClean="0"/>
-              <a:t>４</a:t>
-            </a:r>
-            <a:endParaRPr kumimoji="1" lang="ja-JP" altLang="en-US" dirty="0"/>
+              <a:rPr kumimoji="1" lang="ja-JP" altLang="en-US" dirty="0"/>
+              <a:t>練習問題４</a:t>
+            </a:r>
           </a:p>
         </p:txBody>
       </p:sp>
@@ -8063,130 +8007,130 @@
           <a:lstStyle/>
           <a:p>
             <a:r>
-              <a:rPr lang="ja-JP" altLang="en-US" sz="2800" dirty="0" smtClean="0"/>
+              <a:rPr lang="ja-JP" altLang="en-US" sz="2800" dirty="0"/>
               <a:t>以下のプログラム断片の制御フローを図示せよ。</a:t>
             </a:r>
-            <a:endParaRPr lang="en-US" altLang="ja-JP" sz="2800" dirty="0" smtClean="0"/>
-          </a:p>
-          <a:p>
-            <a:r>
-              <a:rPr lang="en-US" altLang="ja-JP" sz="2800" b="1" dirty="0" smtClean="0"/>
+            <a:endParaRPr lang="en-US" altLang="ja-JP" sz="2800" dirty="0"/>
+          </a:p>
+          <a:p>
+            <a:r>
+              <a:rPr lang="en-US" altLang="ja-JP" sz="2800" b="1" dirty="0"/>
               <a:t>while</a:t>
             </a:r>
             <a:r>
-              <a:rPr lang="en-US" altLang="ja-JP" sz="2800" dirty="0" smtClean="0"/>
+              <a:rPr lang="en-US" altLang="ja-JP" sz="2800" dirty="0"/>
               <a:t> x&gt;0 </a:t>
             </a:r>
             <a:r>
-              <a:rPr lang="en-US" altLang="ja-JP" sz="2800" b="1" dirty="0" smtClean="0"/>
+              <a:rPr lang="en-US" altLang="ja-JP" sz="2800" b="1" dirty="0"/>
               <a:t>do</a:t>
             </a:r>
           </a:p>
           <a:p>
             <a:r>
-              <a:rPr lang="en-US" altLang="ja-JP" sz="2800" b="1" dirty="0" smtClean="0"/>
+              <a:rPr lang="en-US" altLang="ja-JP" sz="2800" b="1" dirty="0"/>
               <a:t>    begin</a:t>
             </a:r>
           </a:p>
           <a:p>
             <a:r>
-              <a:rPr lang="en-US" altLang="ja-JP" sz="2800" b="1" dirty="0" smtClean="0"/>
+              <a:rPr lang="en-US" altLang="ja-JP" sz="2800" b="1" dirty="0"/>
               <a:t>        while </a:t>
             </a:r>
             <a:r>
-              <a:rPr lang="en-US" altLang="ja-JP" sz="2800" dirty="0" smtClean="0"/>
+              <a:rPr lang="en-US" altLang="ja-JP" sz="2800" dirty="0"/>
               <a:t>y&gt;0</a:t>
             </a:r>
             <a:r>
-              <a:rPr lang="en-US" altLang="ja-JP" sz="2800" b="1" dirty="0" smtClean="0"/>
+              <a:rPr lang="en-US" altLang="ja-JP" sz="2800" b="1" dirty="0"/>
               <a:t> do</a:t>
             </a:r>
           </a:p>
           <a:p>
             <a:r>
-              <a:rPr lang="en-US" altLang="ja-JP" sz="2800" dirty="0" smtClean="0"/>
+              <a:rPr lang="en-US" altLang="ja-JP" sz="2800" dirty="0"/>
               <a:t>            </a:t>
             </a:r>
             <a:r>
-              <a:rPr lang="en-US" altLang="ja-JP" sz="2800" b="1" dirty="0" smtClean="0"/>
+              <a:rPr lang="en-US" altLang="ja-JP" sz="2800" b="1" dirty="0"/>
               <a:t>begin</a:t>
             </a:r>
           </a:p>
           <a:p>
             <a:r>
-              <a:rPr lang="en-US" altLang="ja-JP" sz="2800" dirty="0" smtClean="0"/>
+              <a:rPr lang="en-US" altLang="ja-JP" sz="2800" dirty="0"/>
               <a:t>                </a:t>
             </a:r>
             <a:r>
-              <a:rPr lang="en-US" altLang="ja-JP" sz="2800" b="1" dirty="0" smtClean="0"/>
+              <a:rPr lang="en-US" altLang="ja-JP" sz="2800" b="1" dirty="0"/>
               <a:t>if</a:t>
             </a:r>
             <a:r>
-              <a:rPr lang="en-US" altLang="ja-JP" sz="2800" dirty="0" smtClean="0"/>
+              <a:rPr lang="en-US" altLang="ja-JP" sz="2800" dirty="0"/>
               <a:t> x=3 </a:t>
             </a:r>
             <a:r>
-              <a:rPr lang="en-US" altLang="ja-JP" sz="2800" b="1" dirty="0" smtClean="0"/>
+              <a:rPr lang="en-US" altLang="ja-JP" sz="2800" b="1" dirty="0"/>
               <a:t>then</a:t>
             </a:r>
           </a:p>
           <a:p>
             <a:r>
-              <a:rPr kumimoji="1" lang="en-US" altLang="ja-JP" sz="2800" dirty="0" smtClean="0"/>
+              <a:rPr kumimoji="1" lang="en-US" altLang="ja-JP" sz="2800" dirty="0"/>
               <a:t>                    </a:t>
             </a:r>
             <a:r>
-              <a:rPr kumimoji="1" lang="en-US" altLang="ja-JP" sz="2800" b="1" dirty="0" smtClean="0"/>
+              <a:rPr kumimoji="1" lang="en-US" altLang="ja-JP" sz="2800" b="1" dirty="0"/>
               <a:t>break</a:t>
             </a:r>
             <a:r>
-              <a:rPr kumimoji="1" lang="en-US" altLang="ja-JP" sz="2800" dirty="0" smtClean="0"/>
+              <a:rPr kumimoji="1" lang="en-US" altLang="ja-JP" sz="2800" dirty="0"/>
               <a:t>;</a:t>
             </a:r>
           </a:p>
           <a:p>
             <a:r>
-              <a:rPr lang="en-US" altLang="ja-JP" sz="2800" b="1" dirty="0" smtClean="0"/>
+              <a:rPr lang="en-US" altLang="ja-JP" sz="2800" b="1" dirty="0"/>
               <a:t>                </a:t>
             </a:r>
             <a:r>
-              <a:rPr lang="en-US" altLang="ja-JP" sz="2800" dirty="0" smtClean="0"/>
+              <a:rPr lang="en-US" altLang="ja-JP" sz="2800" dirty="0"/>
               <a:t>z := z + 1;</a:t>
             </a:r>
           </a:p>
           <a:p>
             <a:r>
-              <a:rPr kumimoji="1" lang="en-US" altLang="ja-JP" sz="2800" dirty="0" smtClean="0"/>
+              <a:rPr kumimoji="1" lang="en-US" altLang="ja-JP" sz="2800" dirty="0"/>
               <a:t>                y := y - 1</a:t>
             </a:r>
           </a:p>
           <a:p>
             <a:r>
-              <a:rPr kumimoji="1" lang="en-US" altLang="ja-JP" sz="2800" dirty="0" smtClean="0"/>
+              <a:rPr kumimoji="1" lang="en-US" altLang="ja-JP" sz="2800" dirty="0"/>
               <a:t>            </a:t>
             </a:r>
             <a:r>
-              <a:rPr kumimoji="1" lang="en-US" altLang="ja-JP" sz="2800" b="1" dirty="0" smtClean="0"/>
+              <a:rPr kumimoji="1" lang="en-US" altLang="ja-JP" sz="2800" b="1" dirty="0"/>
               <a:t>end</a:t>
             </a:r>
             <a:r>
-              <a:rPr kumimoji="1" lang="en-US" altLang="ja-JP" sz="2800" dirty="0" smtClean="0"/>
+              <a:rPr kumimoji="1" lang="en-US" altLang="ja-JP" sz="2800" dirty="0"/>
               <a:t>;</a:t>
             </a:r>
           </a:p>
           <a:p>
             <a:r>
-              <a:rPr kumimoji="1" lang="en-US" altLang="ja-JP" sz="2800" dirty="0" smtClean="0"/>
+              <a:rPr kumimoji="1" lang="en-US" altLang="ja-JP" sz="2800" dirty="0"/>
               <a:t>        x := x – 1</a:t>
             </a:r>
           </a:p>
           <a:p>
             <a:r>
-              <a:rPr lang="en-US" altLang="ja-JP" sz="2800" dirty="0" smtClean="0"/>
+              <a:rPr lang="en-US" altLang="ja-JP" sz="2800" dirty="0"/>
               <a:t>   </a:t>
             </a:r>
             <a:r>
-              <a:rPr lang="en-US" altLang="ja-JP" sz="2800" b="1" dirty="0" smtClean="0"/>
+              <a:rPr lang="en-US" altLang="ja-JP" sz="2800" b="1" dirty="0"/>
               <a:t> end</a:t>
             </a:r>
             <a:endParaRPr kumimoji="1" lang="ja-JP" altLang="en-US" sz="2800" b="1" dirty="0"/>
@@ -8239,11 +8183,11 @@
           <a:lstStyle/>
           <a:p>
             <a:r>
-              <a:rPr lang="en-US" altLang="ja-JP" dirty="0" smtClean="0"/>
+              <a:rPr lang="en-US" altLang="ja-JP" dirty="0"/>
               <a:t>continue</a:t>
             </a:r>
             <a:r>
-              <a:rPr lang="ja-JP" altLang="en-US" dirty="0" smtClean="0"/>
+              <a:rPr lang="ja-JP" altLang="en-US" dirty="0"/>
               <a:t>文の使用例</a:t>
             </a:r>
             <a:endParaRPr kumimoji="1" lang="ja-JP" altLang="en-US" dirty="0"/>
@@ -8273,99 +8217,99 @@
           <a:lstStyle/>
           <a:p>
             <a:r>
-              <a:rPr lang="en-US" altLang="ja-JP" sz="2800" b="1" dirty="0" smtClean="0"/>
+              <a:rPr lang="en-US" altLang="ja-JP" sz="2800" b="1" dirty="0"/>
               <a:t>while</a:t>
             </a:r>
             <a:r>
-              <a:rPr lang="en-US" altLang="ja-JP" sz="2800" dirty="0" smtClean="0"/>
+              <a:rPr lang="en-US" altLang="ja-JP" sz="2800" dirty="0"/>
               <a:t> x&gt;0 </a:t>
             </a:r>
             <a:r>
-              <a:rPr lang="en-US" altLang="ja-JP" sz="2800" b="1" dirty="0" smtClean="0"/>
+              <a:rPr lang="en-US" altLang="ja-JP" sz="2800" b="1" dirty="0"/>
               <a:t>do</a:t>
             </a:r>
           </a:p>
           <a:p>
             <a:r>
-              <a:rPr lang="en-US" altLang="ja-JP" sz="2800" b="1" dirty="0" smtClean="0"/>
+              <a:rPr lang="en-US" altLang="ja-JP" sz="2800" b="1" dirty="0"/>
               <a:t>    begin</a:t>
             </a:r>
           </a:p>
           <a:p>
             <a:r>
-              <a:rPr lang="ja-JP" altLang="en-US" sz="2800" dirty="0" smtClean="0"/>
+              <a:rPr lang="ja-JP" altLang="en-US" sz="2800" dirty="0"/>
               <a:t>    </a:t>
             </a:r>
             <a:r>
-              <a:rPr lang="en-US" altLang="ja-JP" sz="2800" dirty="0" smtClean="0"/>
+              <a:rPr lang="en-US" altLang="ja-JP" sz="2800" dirty="0"/>
               <a:t>    </a:t>
             </a:r>
             <a:r>
-              <a:rPr lang="en-US" altLang="ja-JP" sz="2800" b="1" dirty="0" smtClean="0"/>
+              <a:rPr lang="en-US" altLang="ja-JP" sz="2800" b="1" dirty="0"/>
               <a:t>if</a:t>
             </a:r>
             <a:r>
-              <a:rPr lang="en-US" altLang="ja-JP" sz="2800" dirty="0" smtClean="0"/>
+              <a:rPr lang="en-US" altLang="ja-JP" sz="2800" dirty="0"/>
               <a:t> x </a:t>
             </a:r>
             <a:r>
-              <a:rPr lang="en-US" altLang="ja-JP" sz="2800" dirty="0" smtClean="0">
+              <a:rPr lang="en-US" altLang="ja-JP" sz="2800" dirty="0">
                 <a:sym typeface="Symbol"/>
               </a:rPr>
               <a:t> </a:t>
             </a:r>
             <a:r>
-              <a:rPr lang="en-US" altLang="ja-JP" sz="2800" dirty="0" smtClean="0"/>
+              <a:rPr lang="en-US" altLang="ja-JP" sz="2800" dirty="0"/>
               <a:t>8 </a:t>
             </a:r>
             <a:r>
-              <a:rPr lang="en-US" altLang="ja-JP" sz="2800" b="1" dirty="0" smtClean="0"/>
+              <a:rPr lang="en-US" altLang="ja-JP" sz="2800" b="1" dirty="0"/>
               <a:t>then</a:t>
             </a:r>
           </a:p>
           <a:p>
             <a:r>
-              <a:rPr lang="en-US" altLang="ja-JP" sz="2800" b="1" dirty="0" smtClean="0"/>
+              <a:rPr lang="en-US" altLang="ja-JP" sz="2800" b="1" dirty="0"/>
               <a:t>            begin</a:t>
             </a:r>
           </a:p>
           <a:p>
             <a:r>
-              <a:rPr kumimoji="1" lang="en-US" altLang="ja-JP" sz="2800" dirty="0" smtClean="0"/>
+              <a:rPr kumimoji="1" lang="en-US" altLang="ja-JP" sz="2800" dirty="0"/>
               <a:t>                x := x-1;</a:t>
             </a:r>
           </a:p>
           <a:p>
             <a:r>
-              <a:rPr lang="en-US" altLang="ja-JP" sz="2800" dirty="0" smtClean="0"/>
+              <a:rPr lang="en-US" altLang="ja-JP" sz="2800" dirty="0"/>
               <a:t>                continue</a:t>
             </a:r>
           </a:p>
           <a:p>
             <a:r>
-              <a:rPr kumimoji="1" lang="en-US" altLang="ja-JP" sz="2800" dirty="0" smtClean="0"/>
+              <a:rPr kumimoji="1" lang="en-US" altLang="ja-JP" sz="2800" dirty="0"/>
               <a:t>            </a:t>
             </a:r>
             <a:r>
-              <a:rPr kumimoji="1" lang="en-US" altLang="ja-JP" sz="2800" b="1" dirty="0" smtClean="0"/>
+              <a:rPr kumimoji="1" lang="en-US" altLang="ja-JP" sz="2800" b="1" dirty="0"/>
               <a:t>end;</a:t>
             </a:r>
-            <a:endParaRPr lang="en-US" altLang="ja-JP" sz="2800" b="1" dirty="0" smtClean="0"/>
-          </a:p>
-          <a:p>
-            <a:r>
-              <a:rPr kumimoji="1" lang="en-US" altLang="ja-JP" sz="2800" dirty="0" smtClean="0"/>
+            <a:endParaRPr lang="en-US" altLang="ja-JP" sz="2800" b="1" dirty="0"/>
+          </a:p>
+          <a:p>
+            <a:r>
+              <a:rPr kumimoji="1" lang="en-US" altLang="ja-JP" sz="2800" dirty="0"/>
               <a:t>        x := x-5</a:t>
             </a:r>
-            <a:endParaRPr lang="en-US" altLang="ja-JP" sz="2800" dirty="0" smtClean="0"/>
-          </a:p>
-          <a:p>
-            <a:r>
-              <a:rPr kumimoji="1" lang="en-US" altLang="ja-JP" sz="2800" dirty="0" smtClean="0"/>
+            <a:endParaRPr lang="en-US" altLang="ja-JP" sz="2800" dirty="0"/>
+          </a:p>
+          <a:p>
+            <a:r>
+              <a:rPr kumimoji="1" lang="en-US" altLang="ja-JP" sz="2800" dirty="0"/>
               <a:t>   </a:t>
             </a:r>
             <a:r>
-              <a:rPr kumimoji="1" lang="en-US" altLang="ja-JP" sz="2800" b="1" dirty="0" smtClean="0"/>
+              <a:rPr kumimoji="1" lang="en-US" altLang="ja-JP" sz="2800" b="1" dirty="0"/>
               <a:t> end</a:t>
             </a:r>
           </a:p>
@@ -8394,46 +8338,46 @@
           <a:lstStyle/>
           <a:p>
             <a:r>
-              <a:rPr kumimoji="1" lang="en-US" altLang="ja-JP" sz="2800" dirty="0" smtClean="0"/>
+              <a:rPr kumimoji="1" lang="en-US" altLang="ja-JP" sz="2800" dirty="0"/>
               <a:t>continue</a:t>
             </a:r>
             <a:r>
-              <a:rPr kumimoji="1" lang="ja-JP" altLang="en-US" sz="2800" dirty="0" smtClean="0"/>
+              <a:rPr kumimoji="1" lang="ja-JP" altLang="en-US" sz="2800" dirty="0"/>
               <a:t>文によって、</a:t>
             </a:r>
             <a:r>
-              <a:rPr kumimoji="1" lang="en-US" altLang="ja-JP" sz="2800" dirty="0" smtClean="0"/>
+              <a:rPr kumimoji="1" lang="en-US" altLang="ja-JP" sz="2800" dirty="0"/>
               <a:t>if</a:t>
             </a:r>
             <a:r>
-              <a:rPr kumimoji="1" lang="ja-JP" altLang="en-US" sz="2800" dirty="0" smtClean="0"/>
+              <a:rPr kumimoji="1" lang="ja-JP" altLang="en-US" sz="2800" dirty="0"/>
               <a:t>文の出口は</a:t>
             </a:r>
             <a:r>
-              <a:rPr lang="en-US" altLang="ja-JP" sz="2800" dirty="0" smtClean="0"/>
+              <a:rPr lang="en-US" altLang="ja-JP" sz="2800" dirty="0"/>
               <a:t>2</a:t>
             </a:r>
             <a:r>
-              <a:rPr lang="ja-JP" altLang="en-US" sz="2800" dirty="0" smtClean="0"/>
+              <a:rPr lang="ja-JP" altLang="en-US" sz="2800" dirty="0"/>
               <a:t>つになったが、</a:t>
             </a:r>
             <a:r>
-              <a:rPr lang="en-US" altLang="ja-JP" sz="2800" dirty="0" smtClean="0"/>
+              <a:rPr lang="en-US" altLang="ja-JP" sz="2800" dirty="0"/>
               <a:t>while</a:t>
             </a:r>
             <a:r>
-              <a:rPr lang="ja-JP" altLang="en-US" sz="2800" dirty="0" smtClean="0"/>
+              <a:rPr lang="ja-JP" altLang="en-US" sz="2800" dirty="0"/>
               <a:t>文全体は</a:t>
             </a:r>
             <a:r>
-              <a:rPr lang="en-US" altLang="ja-JP" sz="2800" dirty="0" smtClean="0"/>
+              <a:rPr lang="en-US" altLang="ja-JP" sz="2800" dirty="0"/>
               <a:t>single entry, single exit</a:t>
             </a:r>
             <a:r>
-              <a:rPr lang="ja-JP" altLang="en-US" sz="2800" dirty="0" smtClean="0"/>
+              <a:rPr lang="ja-JP" altLang="en-US" sz="2800" dirty="0"/>
               <a:t>である。</a:t>
             </a:r>
-            <a:endParaRPr kumimoji="1" lang="en-US" altLang="ja-JP" sz="2800" dirty="0" smtClean="0"/>
+            <a:endParaRPr kumimoji="1" lang="en-US" altLang="ja-JP" sz="2800" dirty="0"/>
           </a:p>
         </p:txBody>
       </p:sp>
@@ -8500,7 +8444,7 @@
           <a:lstStyle/>
           <a:p>
             <a:r>
-              <a:rPr lang="en-US" altLang="ja-JP" sz="2800" dirty="0" smtClean="0"/>
+              <a:rPr lang="en-US" altLang="ja-JP" sz="2800" dirty="0"/>
               <a:t>Entry</a:t>
             </a:r>
           </a:p>
@@ -8549,7 +8493,7 @@
           <a:p>
             <a:pPr algn="ctr"/>
             <a:r>
-              <a:rPr lang="en-US" altLang="ja-JP" sz="2800" dirty="0" smtClean="0">
+              <a:rPr lang="en-US" altLang="ja-JP" sz="2800" dirty="0">
                 <a:solidFill>
                   <a:schemeClr val="tx1"/>
                 </a:solidFill>
@@ -8664,7 +8608,7 @@
           <a:lstStyle/>
           <a:p>
             <a:r>
-              <a:rPr lang="en-US" altLang="ja-JP" sz="2800" dirty="0" smtClean="0"/>
+              <a:rPr lang="en-US" altLang="ja-JP" sz="2800" dirty="0"/>
               <a:t>Exit</a:t>
             </a:r>
           </a:p>
@@ -8693,7 +8637,7 @@
           <a:lstStyle/>
           <a:p>
             <a:r>
-              <a:rPr kumimoji="1" lang="en-US" altLang="ja-JP" sz="2800" dirty="0" smtClean="0"/>
+              <a:rPr kumimoji="1" lang="en-US" altLang="ja-JP" sz="2800" dirty="0"/>
               <a:t>T</a:t>
             </a:r>
             <a:endParaRPr kumimoji="1" lang="ja-JP" altLang="en-US" sz="2800" dirty="0"/>
@@ -8723,7 +8667,7 @@
           <a:lstStyle/>
           <a:p>
             <a:r>
-              <a:rPr kumimoji="1" lang="en-US" altLang="ja-JP" sz="2800" dirty="0" smtClean="0"/>
+              <a:rPr kumimoji="1" lang="en-US" altLang="ja-JP" sz="2800" dirty="0"/>
               <a:t>F</a:t>
             </a:r>
             <a:endParaRPr kumimoji="1" lang="ja-JP" altLang="en-US" sz="2800" dirty="0"/>
@@ -8753,7 +8697,7 @@
           <a:lstStyle/>
           <a:p>
             <a:r>
-              <a:rPr lang="en-US" altLang="ja-JP" sz="2800" dirty="0" smtClean="0"/>
+              <a:rPr lang="en-US" altLang="ja-JP" sz="2800" dirty="0"/>
               <a:t>  x := x-1</a:t>
             </a:r>
           </a:p>
@@ -8802,7 +8746,7 @@
           <a:p>
             <a:pPr algn="ctr"/>
             <a:r>
-              <a:rPr lang="en-US" altLang="ja-JP" sz="2800" dirty="0" smtClean="0">
+              <a:rPr lang="en-US" altLang="ja-JP" sz="2800" dirty="0">
                 <a:solidFill>
                   <a:schemeClr val="tx1"/>
                 </a:solidFill>
@@ -8810,7 +8754,7 @@
               <a:t>x</a:t>
             </a:r>
             <a:r>
-              <a:rPr lang="en-US" altLang="ja-JP" sz="2800" dirty="0" smtClean="0">
+              <a:rPr lang="en-US" altLang="ja-JP" sz="2800" dirty="0">
                 <a:solidFill>
                   <a:schemeClr val="tx1"/>
                 </a:solidFill>
@@ -8819,7 +8763,7 @@
               <a:t></a:t>
             </a:r>
             <a:r>
-              <a:rPr lang="en-US" altLang="ja-JP" sz="2800" dirty="0" smtClean="0">
+              <a:rPr lang="en-US" altLang="ja-JP" sz="2800" dirty="0">
                 <a:solidFill>
                   <a:schemeClr val="tx1"/>
                 </a:solidFill>
@@ -8895,7 +8839,7 @@
           <a:lstStyle/>
           <a:p>
             <a:r>
-              <a:rPr kumimoji="1" lang="en-US" altLang="ja-JP" sz="2800" dirty="0" smtClean="0"/>
+              <a:rPr kumimoji="1" lang="en-US" altLang="ja-JP" sz="2800" dirty="0"/>
               <a:t>T</a:t>
             </a:r>
             <a:endParaRPr kumimoji="1" lang="ja-JP" altLang="en-US" sz="2800" dirty="0"/>
@@ -9185,7 +9129,7 @@
           <a:lstStyle/>
           <a:p>
             <a:r>
-              <a:rPr kumimoji="1" lang="en-US" altLang="ja-JP" sz="2800" dirty="0" smtClean="0"/>
+              <a:rPr kumimoji="1" lang="en-US" altLang="ja-JP" sz="2800" dirty="0"/>
               <a:t>F</a:t>
             </a:r>
             <a:endParaRPr kumimoji="1" lang="ja-JP" altLang="en-US" sz="2800" dirty="0"/>
@@ -9253,7 +9197,7 @@
           <a:lstStyle/>
           <a:p>
             <a:r>
-              <a:rPr lang="en-US" altLang="ja-JP" sz="2800" dirty="0" smtClean="0"/>
+              <a:rPr lang="en-US" altLang="ja-JP" sz="2800" dirty="0"/>
               <a:t>x := x-5</a:t>
             </a:r>
             <a:endParaRPr lang="ja-JP" altLang="en-US" sz="2800" dirty="0"/>
@@ -9386,10 +9330,9 @@
           <a:lstStyle/>
           <a:p>
             <a:r>
-              <a:rPr kumimoji="1" lang="ja-JP" altLang="en-US" dirty="0" smtClean="0"/>
+              <a:rPr kumimoji="1" lang="ja-JP" altLang="en-US" dirty="0"/>
               <a:t>命令型言語について</a:t>
             </a:r>
-            <a:endParaRPr kumimoji="1" lang="ja-JP" altLang="en-US" dirty="0"/>
           </a:p>
         </p:txBody>
       </p:sp>
@@ -9416,207 +9359,207 @@
           <a:lstStyle/>
           <a:p>
             <a:r>
-              <a:rPr kumimoji="1" lang="ja-JP" altLang="en-US" sz="2800" dirty="0" smtClean="0"/>
+              <a:rPr kumimoji="1" lang="ja-JP" altLang="en-US" sz="2800" dirty="0"/>
               <a:t>命令型言語では、計算とは</a:t>
             </a:r>
             <a:r>
-              <a:rPr lang="ja-JP" altLang="en-US" sz="2800" dirty="0" smtClean="0"/>
+              <a:rPr lang="ja-JP" altLang="en-US" sz="2800" dirty="0"/>
               <a:t>アクションの列であると見られる。</a:t>
             </a:r>
-            <a:endParaRPr lang="en-US" altLang="ja-JP" sz="2800" dirty="0" smtClean="0"/>
-          </a:p>
-          <a:p>
-            <a:r>
-              <a:rPr kumimoji="1" lang="ja-JP" altLang="en-US" sz="2800" dirty="0" smtClean="0"/>
+            <a:endParaRPr lang="en-US" altLang="ja-JP" sz="2800" dirty="0"/>
+          </a:p>
+          <a:p>
+            <a:r>
+              <a:rPr kumimoji="1" lang="ja-JP" altLang="en-US" sz="2800" dirty="0"/>
               <a:t>命令型言語の例：</a:t>
             </a:r>
-            <a:endParaRPr kumimoji="1" lang="en-US" altLang="ja-JP" sz="2800" dirty="0" smtClean="0"/>
-          </a:p>
-          <a:p>
-            <a:r>
-              <a:rPr lang="ja-JP" altLang="en-US" sz="2800" dirty="0" smtClean="0"/>
+            <a:endParaRPr kumimoji="1" lang="en-US" altLang="ja-JP" sz="2800" dirty="0"/>
+          </a:p>
+          <a:p>
+            <a:r>
+              <a:rPr lang="ja-JP" altLang="en-US" sz="2800" dirty="0"/>
               <a:t>    </a:t>
             </a:r>
             <a:r>
-              <a:rPr kumimoji="1" lang="en-US" altLang="ja-JP" sz="2800" dirty="0" smtClean="0"/>
+              <a:rPr kumimoji="1" lang="en-US" altLang="ja-JP" sz="2800" dirty="0"/>
               <a:t>Fortran</a:t>
             </a:r>
             <a:r>
-              <a:rPr lang="ja-JP" altLang="en-US" sz="2800" dirty="0" smtClean="0"/>
+              <a:rPr lang="ja-JP" altLang="en-US" sz="2800" dirty="0"/>
               <a:t> </a:t>
             </a:r>
             <a:r>
-              <a:rPr kumimoji="1" lang="en-US" altLang="ja-JP" sz="2800" dirty="0" smtClean="0"/>
+              <a:rPr kumimoji="1" lang="en-US" altLang="ja-JP" sz="2800" dirty="0"/>
               <a:t>(1957, John Backus, </a:t>
             </a:r>
             <a:r>
-              <a:rPr kumimoji="1" lang="ja-JP" altLang="en-US" sz="2800" dirty="0" smtClean="0"/>
+              <a:rPr kumimoji="1" lang="ja-JP" altLang="en-US" sz="2800" dirty="0"/>
               <a:t>アメリカ人、</a:t>
             </a:r>
             <a:r>
-              <a:rPr kumimoji="1" lang="en-US" altLang="ja-JP" sz="2800" dirty="0" smtClean="0"/>
+              <a:rPr kumimoji="1" lang="en-US" altLang="ja-JP" sz="2800" dirty="0"/>
               <a:t>1977 Turing</a:t>
             </a:r>
             <a:r>
-              <a:rPr kumimoji="1" lang="ja-JP" altLang="en-US" sz="2800" dirty="0" smtClean="0"/>
+              <a:rPr kumimoji="1" lang="ja-JP" altLang="en-US" sz="2800" dirty="0"/>
               <a:t>賞</a:t>
             </a:r>
             <a:r>
-              <a:rPr kumimoji="1" lang="en-US" altLang="ja-JP" sz="2800" dirty="0" smtClean="0"/>
+              <a:rPr kumimoji="1" lang="en-US" altLang="ja-JP" sz="2800" dirty="0"/>
               <a:t>), </a:t>
             </a:r>
           </a:p>
           <a:p>
             <a:r>
-              <a:rPr kumimoji="1" lang="en-US" altLang="ja-JP" sz="2800" dirty="0" smtClean="0"/>
+              <a:rPr kumimoji="1" lang="en-US" altLang="ja-JP" sz="2800" dirty="0"/>
               <a:t>  </a:t>
             </a:r>
             <a:r>
-              <a:rPr lang="ja-JP" altLang="en-US" sz="2800" dirty="0" smtClean="0"/>
+              <a:rPr lang="ja-JP" altLang="en-US" sz="2800" dirty="0"/>
               <a:t>  </a:t>
             </a:r>
             <a:r>
-              <a:rPr kumimoji="1" lang="en-US" altLang="ja-JP" sz="2800" dirty="0" err="1" smtClean="0"/>
+              <a:rPr kumimoji="1" lang="en-US" altLang="ja-JP" sz="2800" dirty="0" err="1"/>
               <a:t>Algol</a:t>
             </a:r>
             <a:r>
-              <a:rPr kumimoji="1" lang="en-US" altLang="ja-JP" sz="2800" dirty="0" smtClean="0"/>
+              <a:rPr kumimoji="1" lang="en-US" altLang="ja-JP" sz="2800" dirty="0"/>
               <a:t> 60 (1960, </a:t>
             </a:r>
             <a:r>
-              <a:rPr kumimoji="1" lang="ja-JP" altLang="en-US" sz="2800" dirty="0" smtClean="0"/>
+              <a:rPr kumimoji="1" lang="ja-JP" altLang="en-US" sz="2800" dirty="0"/>
               <a:t>国際委員会で作成</a:t>
             </a:r>
             <a:r>
-              <a:rPr kumimoji="1" lang="en-US" altLang="ja-JP" sz="2800" dirty="0" smtClean="0"/>
+              <a:rPr kumimoji="1" lang="en-US" altLang="ja-JP" sz="2800" dirty="0"/>
               <a:t>)</a:t>
             </a:r>
           </a:p>
           <a:p>
             <a:r>
-              <a:rPr lang="en-US" altLang="ja-JP" sz="2800" dirty="0" smtClean="0"/>
+              <a:rPr lang="en-US" altLang="ja-JP" sz="2800" dirty="0"/>
               <a:t>    </a:t>
             </a:r>
             <a:r>
-              <a:rPr kumimoji="1" lang="en-US" altLang="ja-JP" sz="2800" dirty="0" smtClean="0"/>
+              <a:rPr kumimoji="1" lang="en-US" altLang="ja-JP" sz="2800" dirty="0"/>
               <a:t>Pascal (1970</a:t>
             </a:r>
             <a:r>
-              <a:rPr lang="en-US" altLang="ja-JP" sz="2800" dirty="0" smtClean="0"/>
+              <a:rPr lang="en-US" altLang="ja-JP" sz="2800" dirty="0"/>
               <a:t>, </a:t>
             </a:r>
             <a:r>
-              <a:rPr lang="en-US" altLang="ja-JP" sz="2800" dirty="0" err="1" smtClean="0"/>
+              <a:rPr lang="en-US" altLang="ja-JP" sz="2800" dirty="0" err="1"/>
               <a:t>Niklaus</a:t>
             </a:r>
             <a:r>
-              <a:rPr lang="en-US" altLang="ja-JP" sz="2800" dirty="0" smtClean="0"/>
+              <a:rPr lang="en-US" altLang="ja-JP" sz="2800" dirty="0"/>
               <a:t> Wirth, </a:t>
             </a:r>
             <a:r>
-              <a:rPr lang="ja-JP" altLang="en-US" sz="2800" dirty="0" smtClean="0"/>
+              <a:rPr lang="ja-JP" altLang="en-US" sz="2800" dirty="0"/>
               <a:t>スイス人</a:t>
             </a:r>
             <a:r>
-              <a:rPr lang="en-US" altLang="ja-JP" sz="2800" dirty="0" smtClean="0"/>
+              <a:rPr lang="en-US" altLang="ja-JP" sz="2800" dirty="0"/>
               <a:t>, 1984 Turing</a:t>
             </a:r>
             <a:r>
-              <a:rPr lang="ja-JP" altLang="en-US" sz="2800" dirty="0" smtClean="0"/>
+              <a:rPr lang="ja-JP" altLang="en-US" sz="2800" dirty="0"/>
               <a:t>賞</a:t>
             </a:r>
             <a:r>
-              <a:rPr lang="en-US" altLang="ja-JP" sz="2800" dirty="0" smtClean="0"/>
+              <a:rPr lang="en-US" altLang="ja-JP" sz="2800" dirty="0"/>
               <a:t>), </a:t>
             </a:r>
           </a:p>
           <a:p>
             <a:r>
-              <a:rPr lang="en-US" altLang="ja-JP" sz="2800" dirty="0" smtClean="0"/>
+              <a:rPr lang="en-US" altLang="ja-JP" sz="2800" dirty="0"/>
               <a:t>    C (1972, Dennis Ritchie, </a:t>
             </a:r>
             <a:r>
-              <a:rPr lang="ja-JP" altLang="en-US" sz="2800" dirty="0" smtClean="0"/>
+              <a:rPr lang="ja-JP" altLang="en-US" sz="2800" dirty="0"/>
               <a:t>アメリカ人</a:t>
             </a:r>
             <a:r>
-              <a:rPr lang="en-US" altLang="ja-JP" sz="2800" dirty="0" smtClean="0"/>
+              <a:rPr lang="en-US" altLang="ja-JP" sz="2800" dirty="0"/>
               <a:t>, 1983 Turing</a:t>
             </a:r>
             <a:r>
-              <a:rPr lang="ja-JP" altLang="en-US" sz="2800" dirty="0" smtClean="0"/>
+              <a:rPr lang="ja-JP" altLang="en-US" sz="2800" dirty="0"/>
               <a:t>賞</a:t>
             </a:r>
             <a:r>
-              <a:rPr lang="en-US" altLang="ja-JP" sz="2800" dirty="0" smtClean="0"/>
+              <a:rPr lang="en-US" altLang="ja-JP" sz="2800" dirty="0"/>
               <a:t>)</a:t>
             </a:r>
           </a:p>
           <a:p>
             <a:r>
-              <a:rPr kumimoji="1" lang="en-US" altLang="ja-JP" sz="2800" dirty="0" smtClean="0"/>
+              <a:rPr kumimoji="1" lang="en-US" altLang="ja-JP" sz="2800" dirty="0"/>
               <a:t>Fortran</a:t>
             </a:r>
             <a:r>
-              <a:rPr kumimoji="1" lang="ja-JP" altLang="en-US" sz="2800" dirty="0" smtClean="0"/>
+              <a:rPr kumimoji="1" lang="ja-JP" altLang="en-US" sz="2800" dirty="0"/>
               <a:t>では</a:t>
             </a:r>
             <a:r>
-              <a:rPr kumimoji="1" lang="en-US" altLang="ja-JP" sz="2800" dirty="0" smtClean="0"/>
+              <a:rPr kumimoji="1" lang="en-US" altLang="ja-JP" sz="2800" dirty="0"/>
               <a:t>while</a:t>
             </a:r>
             <a:r>
-              <a:rPr kumimoji="1" lang="ja-JP" altLang="en-US" sz="2800" dirty="0" smtClean="0"/>
+              <a:rPr kumimoji="1" lang="ja-JP" altLang="en-US" sz="2800" dirty="0"/>
               <a:t>文などがなく、</a:t>
             </a:r>
             <a:r>
-              <a:rPr kumimoji="1" lang="en-US" altLang="ja-JP" sz="2800" dirty="0" err="1" smtClean="0"/>
+              <a:rPr kumimoji="1" lang="en-US" altLang="ja-JP" sz="2800" dirty="0" err="1"/>
               <a:t>goto</a:t>
             </a:r>
             <a:r>
-              <a:rPr lang="ja-JP" altLang="en-US" sz="2800" dirty="0" smtClean="0"/>
+              <a:rPr lang="ja-JP" altLang="en-US" sz="2800" dirty="0"/>
               <a:t>文が多用され、制御フローがつかみにくい。（</a:t>
             </a:r>
             <a:r>
-              <a:rPr lang="en-US" altLang="ja-JP" sz="2800" dirty="0" smtClean="0"/>
+              <a:rPr lang="en-US" altLang="ja-JP" sz="2800" dirty="0"/>
               <a:t>Fortran 90 (1991)</a:t>
             </a:r>
             <a:r>
-              <a:rPr lang="ja-JP" altLang="en-US" sz="2800" dirty="0" smtClean="0"/>
+              <a:rPr lang="ja-JP" altLang="en-US" sz="2800" dirty="0"/>
               <a:t>では対応）</a:t>
             </a:r>
-            <a:endParaRPr lang="en-US" altLang="ja-JP" sz="2800" dirty="0" smtClean="0"/>
-          </a:p>
-          <a:p>
-            <a:r>
-              <a:rPr lang="en-US" altLang="ja-JP" sz="2800" dirty="0" err="1" smtClean="0"/>
+            <a:endParaRPr lang="en-US" altLang="ja-JP" sz="2800" dirty="0"/>
+          </a:p>
+          <a:p>
+            <a:r>
+              <a:rPr lang="en-US" altLang="ja-JP" sz="2800" dirty="0" err="1"/>
               <a:t>Algol</a:t>
             </a:r>
             <a:r>
-              <a:rPr lang="en-US" altLang="ja-JP" sz="2800" dirty="0" smtClean="0"/>
+              <a:rPr lang="en-US" altLang="ja-JP" sz="2800" dirty="0"/>
               <a:t>, Pascal</a:t>
             </a:r>
             <a:r>
-              <a:rPr lang="ja-JP" altLang="en-US" sz="2800" dirty="0" smtClean="0"/>
+              <a:rPr lang="ja-JP" altLang="en-US" sz="2800" dirty="0"/>
               <a:t>などの言語では、プログラムの構造が明確になるような構成要素</a:t>
             </a:r>
             <a:r>
-              <a:rPr lang="en-US" altLang="ja-JP" sz="2800" dirty="0" smtClean="0"/>
+              <a:rPr lang="en-US" altLang="ja-JP" sz="2800" dirty="0"/>
               <a:t>(while, begin end</a:t>
             </a:r>
             <a:r>
-              <a:rPr lang="ja-JP" altLang="en-US" sz="2800" dirty="0" smtClean="0"/>
+              <a:rPr lang="ja-JP" altLang="en-US" sz="2800" dirty="0"/>
               <a:t>など</a:t>
             </a:r>
             <a:r>
-              <a:rPr lang="en-US" altLang="ja-JP" sz="2800" dirty="0" smtClean="0"/>
+              <a:rPr lang="en-US" altLang="ja-JP" sz="2800" dirty="0"/>
               <a:t>)</a:t>
             </a:r>
             <a:r>
-              <a:rPr lang="ja-JP" altLang="en-US" sz="2800" dirty="0" smtClean="0"/>
+              <a:rPr lang="ja-JP" altLang="en-US" sz="2800" dirty="0"/>
               <a:t>が取り入れられた。</a:t>
             </a:r>
-            <a:endParaRPr lang="en-US" altLang="ja-JP" sz="2800" dirty="0" smtClean="0"/>
+            <a:endParaRPr lang="en-US" altLang="ja-JP" sz="2800" dirty="0"/>
           </a:p>
         </p:txBody>
       </p:sp>
@@ -9668,16 +9611,8 @@
           <a:lstStyle/>
           <a:p>
             <a:r>
-              <a:rPr lang="ja-JP" altLang="en-US" sz="4000" dirty="0" smtClean="0"/>
-              <a:t>練習</a:t>
-            </a:r>
-            <a:r>
-              <a:rPr lang="ja-JP" altLang="en-US" sz="4000" dirty="0" smtClean="0"/>
-              <a:t>問題</a:t>
-            </a:r>
-            <a:r>
-              <a:rPr lang="ja-JP" altLang="en-US" sz="4000" dirty="0" smtClean="0"/>
-              <a:t>５</a:t>
+              <a:rPr lang="ja-JP" altLang="en-US" sz="4000" dirty="0"/>
+              <a:t>練習問題５</a:t>
             </a:r>
             <a:endParaRPr kumimoji="1" lang="ja-JP" altLang="en-US" sz="4000" dirty="0"/>
           </a:p>
@@ -9706,157 +9641,157 @@
           <a:lstStyle/>
           <a:p>
             <a:r>
-              <a:rPr lang="ja-JP" altLang="en-US" sz="2800" dirty="0" smtClean="0"/>
+              <a:rPr lang="ja-JP" altLang="en-US" sz="2800" dirty="0"/>
               <a:t>以下のプログラム断片の制御フローを図示せよ。</a:t>
             </a:r>
-            <a:endParaRPr lang="en-US" altLang="ja-JP" sz="2800" dirty="0" smtClean="0"/>
-          </a:p>
-          <a:p>
-            <a:r>
-              <a:rPr lang="en-US" altLang="ja-JP" sz="2800" b="1" dirty="0" smtClean="0"/>
+            <a:endParaRPr lang="en-US" altLang="ja-JP" sz="2800" dirty="0"/>
+          </a:p>
+          <a:p>
+            <a:r>
+              <a:rPr lang="en-US" altLang="ja-JP" sz="2800" b="1" dirty="0"/>
               <a:t>while</a:t>
             </a:r>
             <a:r>
-              <a:rPr lang="en-US" altLang="ja-JP" sz="2800" dirty="0" smtClean="0"/>
+              <a:rPr lang="en-US" altLang="ja-JP" sz="2800" dirty="0"/>
               <a:t> x&gt;0 </a:t>
             </a:r>
             <a:r>
-              <a:rPr lang="en-US" altLang="ja-JP" sz="2800" b="1" dirty="0" smtClean="0"/>
+              <a:rPr lang="en-US" altLang="ja-JP" sz="2800" b="1" dirty="0"/>
               <a:t>do</a:t>
             </a:r>
           </a:p>
           <a:p>
             <a:r>
-              <a:rPr lang="en-US" altLang="ja-JP" sz="2800" b="1" dirty="0" smtClean="0"/>
+              <a:rPr lang="en-US" altLang="ja-JP" sz="2800" b="1" dirty="0"/>
               <a:t>    begin</a:t>
             </a:r>
           </a:p>
           <a:p>
             <a:r>
-              <a:rPr lang="en-US" altLang="ja-JP" sz="2800" b="1" dirty="0" smtClean="0"/>
+              <a:rPr lang="en-US" altLang="ja-JP" sz="2800" b="1" dirty="0"/>
               <a:t>        while </a:t>
             </a:r>
             <a:r>
-              <a:rPr lang="en-US" altLang="ja-JP" sz="2800" dirty="0" smtClean="0"/>
+              <a:rPr lang="en-US" altLang="ja-JP" sz="2800" dirty="0"/>
               <a:t>y&gt;0</a:t>
             </a:r>
             <a:r>
-              <a:rPr lang="en-US" altLang="ja-JP" sz="2800" b="1" dirty="0" smtClean="0"/>
+              <a:rPr lang="en-US" altLang="ja-JP" sz="2800" b="1" dirty="0"/>
               <a:t> do</a:t>
             </a:r>
           </a:p>
           <a:p>
             <a:r>
-              <a:rPr lang="en-US" altLang="ja-JP" sz="2800" dirty="0" smtClean="0"/>
+              <a:rPr lang="en-US" altLang="ja-JP" sz="2800" dirty="0"/>
               <a:t>            </a:t>
             </a:r>
             <a:r>
-              <a:rPr lang="en-US" altLang="ja-JP" sz="2800" b="1" dirty="0" smtClean="0"/>
+              <a:rPr lang="en-US" altLang="ja-JP" sz="2800" b="1" dirty="0"/>
               <a:t>begin</a:t>
             </a:r>
           </a:p>
           <a:p>
             <a:r>
-              <a:rPr lang="en-US" altLang="ja-JP" sz="2800" dirty="0" smtClean="0"/>
+              <a:rPr lang="en-US" altLang="ja-JP" sz="2800" dirty="0"/>
               <a:t>                </a:t>
             </a:r>
             <a:r>
-              <a:rPr lang="en-US" altLang="ja-JP" sz="2800" b="1" dirty="0" smtClean="0"/>
+              <a:rPr lang="en-US" altLang="ja-JP" sz="2800" b="1" dirty="0"/>
               <a:t>if</a:t>
             </a:r>
             <a:r>
-              <a:rPr lang="en-US" altLang="ja-JP" sz="2800" dirty="0" smtClean="0"/>
+              <a:rPr lang="en-US" altLang="ja-JP" sz="2800" dirty="0"/>
               <a:t> x</a:t>
             </a:r>
             <a:r>
-              <a:rPr lang="en-US" altLang="ja-JP" sz="2800" dirty="0" smtClean="0">
+              <a:rPr lang="en-US" altLang="ja-JP" sz="2800" dirty="0">
                 <a:sym typeface="Symbol"/>
               </a:rPr>
               <a:t></a:t>
             </a:r>
             <a:r>
-              <a:rPr lang="en-US" altLang="ja-JP" sz="2800" dirty="0" smtClean="0"/>
+              <a:rPr lang="en-US" altLang="ja-JP" sz="2800" dirty="0"/>
               <a:t>3 </a:t>
             </a:r>
             <a:r>
-              <a:rPr lang="en-US" altLang="ja-JP" sz="2800" b="1" dirty="0" smtClean="0"/>
+              <a:rPr lang="en-US" altLang="ja-JP" sz="2800" b="1" dirty="0"/>
               <a:t>then</a:t>
             </a:r>
           </a:p>
           <a:p>
             <a:r>
-              <a:rPr lang="en-US" altLang="ja-JP" sz="2800" b="1" dirty="0" smtClean="0"/>
+              <a:rPr lang="en-US" altLang="ja-JP" sz="2800" b="1" dirty="0"/>
               <a:t>                    begin</a:t>
             </a:r>
           </a:p>
           <a:p>
             <a:r>
-              <a:rPr lang="en-US" altLang="ja-JP" sz="2800" b="1" dirty="0" smtClean="0"/>
+              <a:rPr lang="en-US" altLang="ja-JP" sz="2800" b="1" dirty="0"/>
               <a:t>                        </a:t>
             </a:r>
             <a:r>
-              <a:rPr lang="en-US" altLang="ja-JP" sz="2800" dirty="0" smtClean="0"/>
+              <a:rPr lang="en-US" altLang="ja-JP" sz="2800" dirty="0"/>
               <a:t>y := y – 1;</a:t>
             </a:r>
           </a:p>
           <a:p>
             <a:r>
-              <a:rPr kumimoji="1" lang="en-US" altLang="ja-JP" sz="2800" dirty="0" smtClean="0"/>
+              <a:rPr kumimoji="1" lang="en-US" altLang="ja-JP" sz="2800" dirty="0"/>
               <a:t>                        </a:t>
             </a:r>
             <a:r>
-              <a:rPr kumimoji="1" lang="en-US" altLang="ja-JP" sz="2800" b="1" dirty="0" smtClean="0"/>
+              <a:rPr kumimoji="1" lang="en-US" altLang="ja-JP" sz="2800" b="1" dirty="0"/>
               <a:t>continue</a:t>
             </a:r>
           </a:p>
           <a:p>
             <a:r>
-              <a:rPr lang="en-US" altLang="ja-JP" sz="2800" b="1" dirty="0" smtClean="0"/>
+              <a:rPr lang="en-US" altLang="ja-JP" sz="2800" b="1" dirty="0"/>
               <a:t>                    end</a:t>
             </a:r>
-            <a:endParaRPr kumimoji="1" lang="en-US" altLang="ja-JP" sz="2800" dirty="0" smtClean="0"/>
-          </a:p>
-          <a:p>
-            <a:r>
-              <a:rPr lang="en-US" altLang="ja-JP" sz="2800" b="1" dirty="0" smtClean="0"/>
+            <a:endParaRPr kumimoji="1" lang="en-US" altLang="ja-JP" sz="2800" dirty="0"/>
+          </a:p>
+          <a:p>
+            <a:r>
+              <a:rPr lang="en-US" altLang="ja-JP" sz="2800" b="1" dirty="0"/>
               <a:t>                </a:t>
             </a:r>
             <a:r>
-              <a:rPr lang="en-US" altLang="ja-JP" sz="2800" dirty="0" smtClean="0"/>
+              <a:rPr lang="en-US" altLang="ja-JP" sz="2800" dirty="0"/>
               <a:t>z := z + 1;</a:t>
             </a:r>
             <a:r>
-              <a:rPr kumimoji="1" lang="en-US" altLang="ja-JP" sz="2800" dirty="0" smtClean="0"/>
+              <a:rPr kumimoji="1" lang="en-US" altLang="ja-JP" sz="2800" dirty="0"/>
               <a:t>  y := y - 1</a:t>
             </a:r>
           </a:p>
           <a:p>
             <a:r>
-              <a:rPr kumimoji="1" lang="en-US" altLang="ja-JP" sz="2800" dirty="0" smtClean="0"/>
+              <a:rPr kumimoji="1" lang="en-US" altLang="ja-JP" sz="2800" dirty="0"/>
               <a:t>            </a:t>
             </a:r>
             <a:r>
-              <a:rPr kumimoji="1" lang="en-US" altLang="ja-JP" sz="2800" b="1" dirty="0" smtClean="0"/>
+              <a:rPr kumimoji="1" lang="en-US" altLang="ja-JP" sz="2800" b="1" dirty="0"/>
               <a:t>end</a:t>
             </a:r>
             <a:r>
-              <a:rPr kumimoji="1" lang="en-US" altLang="ja-JP" sz="2800" dirty="0" smtClean="0"/>
+              <a:rPr kumimoji="1" lang="en-US" altLang="ja-JP" sz="2800" dirty="0"/>
               <a:t>;</a:t>
             </a:r>
           </a:p>
           <a:p>
             <a:r>
-              <a:rPr kumimoji="1" lang="en-US" altLang="ja-JP" sz="2800" dirty="0" smtClean="0"/>
+              <a:rPr kumimoji="1" lang="en-US" altLang="ja-JP" sz="2800" dirty="0"/>
               <a:t>        x := x – 1</a:t>
             </a:r>
           </a:p>
           <a:p>
             <a:r>
-              <a:rPr lang="en-US" altLang="ja-JP" sz="2800" dirty="0" smtClean="0"/>
+              <a:rPr lang="en-US" altLang="ja-JP" sz="2800" dirty="0"/>
               <a:t>   </a:t>
             </a:r>
             <a:r>
-              <a:rPr lang="en-US" altLang="ja-JP" sz="2800" b="1" dirty="0" smtClean="0"/>
+              <a:rPr lang="en-US" altLang="ja-JP" sz="2800" b="1" dirty="0"/>
               <a:t> end</a:t>
             </a:r>
             <a:endParaRPr kumimoji="1" lang="ja-JP" altLang="en-US" sz="2800" b="1" dirty="0"/>
@@ -9911,18 +9846,17 @@
           <a:lstStyle/>
           <a:p>
             <a:r>
-              <a:rPr lang="en-US" altLang="ja-JP" dirty="0" err="1" smtClean="0"/>
+              <a:rPr lang="en-US" altLang="ja-JP" dirty="0" err="1"/>
               <a:t>g</a:t>
             </a:r>
             <a:r>
-              <a:rPr kumimoji="1" lang="en-US" altLang="ja-JP" dirty="0" err="1" smtClean="0"/>
+              <a:rPr kumimoji="1" lang="en-US" altLang="ja-JP" dirty="0" err="1"/>
               <a:t>oto</a:t>
             </a:r>
             <a:r>
-              <a:rPr kumimoji="1" lang="ja-JP" altLang="en-US" dirty="0" smtClean="0"/>
+              <a:rPr kumimoji="1" lang="ja-JP" altLang="en-US" dirty="0"/>
               <a:t>文</a:t>
             </a:r>
-            <a:endParaRPr kumimoji="1" lang="ja-JP" altLang="en-US" dirty="0"/>
           </a:p>
         </p:txBody>
       </p:sp>
@@ -9949,37 +9883,37 @@
           <a:lstStyle/>
           <a:p>
             <a:r>
-              <a:rPr lang="en-US" altLang="ja-JP" sz="2800" dirty="0" err="1" smtClean="0"/>
+              <a:rPr lang="en-US" altLang="ja-JP" sz="2800" dirty="0" err="1"/>
               <a:t>g</a:t>
             </a:r>
             <a:r>
-              <a:rPr kumimoji="1" lang="en-US" altLang="ja-JP" sz="2800" dirty="0" err="1" smtClean="0"/>
+              <a:rPr kumimoji="1" lang="en-US" altLang="ja-JP" sz="2800" dirty="0" err="1"/>
               <a:t>oto</a:t>
             </a:r>
             <a:r>
-              <a:rPr kumimoji="1" lang="ja-JP" altLang="en-US" sz="2800" dirty="0" smtClean="0"/>
+              <a:rPr kumimoji="1" lang="ja-JP" altLang="en-US" sz="2800" dirty="0"/>
               <a:t>文は、以下の形式で書かれる。</a:t>
             </a:r>
-            <a:endParaRPr kumimoji="1" lang="en-US" altLang="ja-JP" sz="2800" dirty="0" smtClean="0"/>
-          </a:p>
-          <a:p>
-            <a:r>
-              <a:rPr lang="en-US" altLang="ja-JP" sz="2800" b="1" dirty="0" smtClean="0"/>
+            <a:endParaRPr kumimoji="1" lang="en-US" altLang="ja-JP" sz="2800" dirty="0"/>
+          </a:p>
+          <a:p>
+            <a:r>
+              <a:rPr lang="en-US" altLang="ja-JP" sz="2800" b="1" dirty="0"/>
               <a:t>    </a:t>
             </a:r>
             <a:r>
-              <a:rPr lang="en-US" altLang="ja-JP" sz="2800" b="1" dirty="0" err="1" smtClean="0"/>
+              <a:rPr lang="en-US" altLang="ja-JP" sz="2800" b="1" dirty="0" err="1"/>
               <a:t>goto</a:t>
             </a:r>
             <a:r>
-              <a:rPr lang="en-US" altLang="ja-JP" sz="2800" b="1" dirty="0" smtClean="0"/>
+              <a:rPr lang="en-US" altLang="ja-JP" sz="2800" b="1" dirty="0"/>
               <a:t> </a:t>
             </a:r>
             <a:r>
-              <a:rPr lang="ja-JP" altLang="en-US" sz="2800" dirty="0" smtClean="0"/>
+              <a:rPr lang="ja-JP" altLang="en-US" sz="2800" dirty="0"/>
               <a:t>ラベル</a:t>
             </a:r>
-            <a:endParaRPr lang="en-US" altLang="ja-JP" sz="2800" dirty="0" smtClean="0"/>
+            <a:endParaRPr lang="en-US" altLang="ja-JP" sz="2800" dirty="0"/>
           </a:p>
         </p:txBody>
       </p:sp>
@@ -10011,35 +9945,35 @@
           <a:lstStyle/>
           <a:p>
             <a:r>
-              <a:rPr lang="en-US" altLang="ja-JP" sz="2800" dirty="0" err="1" smtClean="0"/>
+              <a:rPr lang="en-US" altLang="ja-JP" sz="2800" dirty="0" err="1"/>
               <a:t>goto</a:t>
             </a:r>
             <a:r>
-              <a:rPr lang="ja-JP" altLang="en-US" sz="2800" dirty="0" smtClean="0"/>
+              <a:rPr lang="ja-JP" altLang="en-US" sz="2800" dirty="0"/>
               <a:t>文により、</a:t>
             </a:r>
             <a:r>
-              <a:rPr lang="en-US" altLang="ja-JP" sz="2800" dirty="0" smtClean="0"/>
+              <a:rPr lang="en-US" altLang="ja-JP" sz="2800" dirty="0"/>
               <a:t>if</a:t>
             </a:r>
             <a:r>
-              <a:rPr lang="ja-JP" altLang="en-US" sz="2800" dirty="0" smtClean="0"/>
+              <a:rPr lang="ja-JP" altLang="en-US" sz="2800" dirty="0"/>
               <a:t>文だけでなく、</a:t>
             </a:r>
             <a:r>
-              <a:rPr lang="en-US" altLang="ja-JP" sz="2800" dirty="0" smtClean="0"/>
+              <a:rPr lang="en-US" altLang="ja-JP" sz="2800" dirty="0"/>
               <a:t>while</a:t>
             </a:r>
             <a:r>
-              <a:rPr lang="ja-JP" altLang="en-US" sz="2800" dirty="0" smtClean="0"/>
+              <a:rPr lang="ja-JP" altLang="en-US" sz="2800" dirty="0"/>
               <a:t>文の出口も</a:t>
             </a:r>
             <a:r>
-              <a:rPr lang="en-US" altLang="ja-JP" sz="2800" dirty="0" smtClean="0"/>
+              <a:rPr lang="en-US" altLang="ja-JP" sz="2800" dirty="0"/>
               <a:t>2</a:t>
             </a:r>
             <a:r>
-              <a:rPr lang="ja-JP" altLang="en-US" sz="2800" dirty="0" smtClean="0"/>
+              <a:rPr lang="ja-JP" altLang="en-US" sz="2800" dirty="0"/>
               <a:t>つになっている。</a:t>
             </a:r>
             <a:endParaRPr kumimoji="1" lang="ja-JP" altLang="en-US" sz="2800" dirty="0"/>
@@ -10068,76 +10002,76 @@
           <a:lstStyle/>
           <a:p>
             <a:r>
-              <a:rPr lang="ja-JP" altLang="en-US" sz="2800" dirty="0" smtClean="0"/>
+              <a:rPr lang="ja-JP" altLang="en-US" sz="2800" dirty="0"/>
               <a:t>（例）</a:t>
             </a:r>
-            <a:endParaRPr lang="en-US" altLang="ja-JP" sz="2800" dirty="0" smtClean="0"/>
-          </a:p>
-          <a:p>
-            <a:r>
-              <a:rPr lang="en-US" altLang="ja-JP" sz="2800" dirty="0" smtClean="0"/>
+            <a:endParaRPr lang="en-US" altLang="ja-JP" sz="2800" dirty="0"/>
+          </a:p>
+          <a:p>
+            <a:r>
+              <a:rPr lang="en-US" altLang="ja-JP" sz="2800" dirty="0"/>
               <a:t>   L:  x := x - 4;</a:t>
             </a:r>
           </a:p>
           <a:p>
             <a:r>
-              <a:rPr lang="en-US" altLang="ja-JP" sz="2800" dirty="0" smtClean="0"/>
+              <a:rPr lang="en-US" altLang="ja-JP" sz="2800" dirty="0"/>
               <a:t>   </a:t>
             </a:r>
             <a:r>
-              <a:rPr lang="en-US" altLang="ja-JP" sz="2800" b="1" dirty="0" smtClean="0"/>
+              <a:rPr lang="en-US" altLang="ja-JP" sz="2800" b="1" dirty="0"/>
               <a:t>while</a:t>
             </a:r>
             <a:r>
-              <a:rPr lang="en-US" altLang="ja-JP" sz="2800" dirty="0" smtClean="0"/>
+              <a:rPr lang="en-US" altLang="ja-JP" sz="2800" dirty="0"/>
               <a:t> x&gt;0 </a:t>
             </a:r>
             <a:r>
-              <a:rPr lang="en-US" altLang="ja-JP" sz="2800" b="1" dirty="0" smtClean="0"/>
+              <a:rPr lang="en-US" altLang="ja-JP" sz="2800" b="1" dirty="0"/>
               <a:t>do</a:t>
             </a:r>
           </a:p>
           <a:p>
             <a:r>
-              <a:rPr lang="en-US" altLang="ja-JP" sz="2800" dirty="0" smtClean="0"/>
+              <a:rPr lang="en-US" altLang="ja-JP" sz="2800" dirty="0"/>
               <a:t>       </a:t>
             </a:r>
             <a:r>
-              <a:rPr lang="en-US" altLang="ja-JP" sz="2800" b="1" dirty="0" smtClean="0"/>
+              <a:rPr lang="en-US" altLang="ja-JP" sz="2800" b="1" dirty="0"/>
               <a:t>if</a:t>
             </a:r>
             <a:r>
-              <a:rPr lang="en-US" altLang="ja-JP" sz="2800" dirty="0" smtClean="0"/>
+              <a:rPr lang="en-US" altLang="ja-JP" sz="2800" dirty="0"/>
               <a:t> x=8 </a:t>
             </a:r>
             <a:r>
-              <a:rPr lang="en-US" altLang="ja-JP" sz="2800" b="1" dirty="0" smtClean="0"/>
+              <a:rPr lang="en-US" altLang="ja-JP" sz="2800" b="1" dirty="0"/>
               <a:t>then</a:t>
             </a:r>
           </a:p>
           <a:p>
             <a:r>
-              <a:rPr lang="en-US" altLang="ja-JP" sz="2800" dirty="0" smtClean="0"/>
+              <a:rPr lang="en-US" altLang="ja-JP" sz="2800" dirty="0"/>
               <a:t>           </a:t>
             </a:r>
             <a:r>
-              <a:rPr lang="en-US" altLang="ja-JP" sz="2800" b="1" dirty="0" err="1" smtClean="0"/>
+              <a:rPr lang="en-US" altLang="ja-JP" sz="2800" b="1" dirty="0" err="1"/>
               <a:t>goto</a:t>
             </a:r>
             <a:r>
-              <a:rPr lang="en-US" altLang="ja-JP" sz="2800" dirty="0" smtClean="0"/>
+              <a:rPr lang="en-US" altLang="ja-JP" sz="2800" dirty="0"/>
               <a:t> L</a:t>
             </a:r>
           </a:p>
           <a:p>
             <a:r>
-              <a:rPr lang="en-US" altLang="ja-JP" sz="2800" b="1" dirty="0" smtClean="0"/>
+              <a:rPr lang="en-US" altLang="ja-JP" sz="2800" b="1" dirty="0"/>
               <a:t>       else</a:t>
             </a:r>
           </a:p>
           <a:p>
             <a:r>
-              <a:rPr lang="en-US" altLang="ja-JP" sz="2800" dirty="0" smtClean="0"/>
+              <a:rPr lang="en-US" altLang="ja-JP" sz="2800" dirty="0"/>
               <a:t>           x := x-1</a:t>
             </a:r>
           </a:p>
@@ -10206,7 +10140,7 @@
           <a:lstStyle/>
           <a:p>
             <a:r>
-              <a:rPr lang="en-US" altLang="ja-JP" sz="2800" dirty="0" smtClean="0"/>
+              <a:rPr lang="en-US" altLang="ja-JP" sz="2800" dirty="0"/>
               <a:t>Entry</a:t>
             </a:r>
           </a:p>
@@ -10255,7 +10189,7 @@
           <a:p>
             <a:pPr algn="ctr"/>
             <a:r>
-              <a:rPr lang="en-US" altLang="ja-JP" sz="2800" dirty="0" smtClean="0">
+              <a:rPr lang="en-US" altLang="ja-JP" sz="2800" dirty="0">
                 <a:solidFill>
                   <a:schemeClr val="tx1"/>
                 </a:solidFill>
@@ -10370,7 +10304,7 @@
           <a:lstStyle/>
           <a:p>
             <a:r>
-              <a:rPr lang="en-US" altLang="ja-JP" sz="2800" dirty="0" smtClean="0"/>
+              <a:rPr lang="en-US" altLang="ja-JP" sz="2800" dirty="0"/>
               <a:t>Exit</a:t>
             </a:r>
           </a:p>
@@ -10399,7 +10333,7 @@
           <a:lstStyle/>
           <a:p>
             <a:r>
-              <a:rPr kumimoji="1" lang="en-US" altLang="ja-JP" sz="2800" dirty="0" smtClean="0"/>
+              <a:rPr kumimoji="1" lang="en-US" altLang="ja-JP" sz="2800" dirty="0"/>
               <a:t>T</a:t>
             </a:r>
             <a:endParaRPr kumimoji="1" lang="ja-JP" altLang="en-US" sz="2800" dirty="0"/>
@@ -10429,7 +10363,7 @@
           <a:lstStyle/>
           <a:p>
             <a:r>
-              <a:rPr kumimoji="1" lang="en-US" altLang="ja-JP" sz="2800" dirty="0" smtClean="0"/>
+              <a:rPr kumimoji="1" lang="en-US" altLang="ja-JP" sz="2800" dirty="0"/>
               <a:t>F</a:t>
             </a:r>
             <a:endParaRPr kumimoji="1" lang="ja-JP" altLang="en-US" sz="2800" dirty="0"/>
@@ -10459,7 +10393,7 @@
           <a:lstStyle/>
           <a:p>
             <a:r>
-              <a:rPr lang="en-US" altLang="ja-JP" sz="2800" dirty="0" smtClean="0"/>
+              <a:rPr lang="en-US" altLang="ja-JP" sz="2800" dirty="0"/>
               <a:t>  x := x-1</a:t>
             </a:r>
           </a:p>
@@ -10508,7 +10442,7 @@
           <a:p>
             <a:pPr algn="ctr"/>
             <a:r>
-              <a:rPr lang="en-US" altLang="ja-JP" sz="2800" dirty="0" smtClean="0">
+              <a:rPr lang="en-US" altLang="ja-JP" sz="2800" dirty="0">
                 <a:solidFill>
                   <a:schemeClr val="tx1"/>
                 </a:solidFill>
@@ -10585,7 +10519,7 @@
           <a:lstStyle/>
           <a:p>
             <a:r>
-              <a:rPr lang="en-US" altLang="ja-JP" sz="2800" dirty="0" smtClean="0"/>
+              <a:rPr lang="en-US" altLang="ja-JP" sz="2800" dirty="0"/>
               <a:t>F</a:t>
             </a:r>
             <a:endParaRPr kumimoji="1" lang="ja-JP" altLang="en-US" sz="2800" dirty="0"/>
@@ -10830,7 +10764,7 @@
           <a:lstStyle/>
           <a:p>
             <a:r>
-              <a:rPr kumimoji="1" lang="en-US" altLang="ja-JP" sz="2800" dirty="0" smtClean="0"/>
+              <a:rPr kumimoji="1" lang="en-US" altLang="ja-JP" sz="2800" dirty="0"/>
               <a:t>T</a:t>
             </a:r>
             <a:endParaRPr kumimoji="1" lang="ja-JP" altLang="en-US" sz="2800" dirty="0"/>
@@ -10895,7 +10829,7 @@
           <a:lstStyle/>
           <a:p>
             <a:r>
-              <a:rPr lang="en-US" altLang="ja-JP" sz="2800" dirty="0" smtClean="0"/>
+              <a:rPr lang="en-US" altLang="ja-JP" sz="2800" dirty="0"/>
               <a:t>x := x - 4</a:t>
             </a:r>
             <a:endParaRPr lang="ja-JP" altLang="en-US" sz="2800" dirty="0"/>
@@ -11180,18 +11114,9 @@
           <a:lstStyle/>
           <a:p>
             <a:r>
-              <a:rPr kumimoji="1" lang="ja-JP" altLang="en-US" dirty="0" smtClean="0"/>
-              <a:t>練習</a:t>
-            </a:r>
-            <a:r>
-              <a:rPr kumimoji="1" lang="ja-JP" altLang="en-US" dirty="0" smtClean="0"/>
-              <a:t>問題</a:t>
-            </a:r>
-            <a:r>
-              <a:rPr kumimoji="1" lang="ja-JP" altLang="en-US" dirty="0" smtClean="0"/>
-              <a:t>６</a:t>
-            </a:r>
-            <a:endParaRPr kumimoji="1" lang="ja-JP" altLang="en-US" dirty="0"/>
+              <a:rPr kumimoji="1" lang="ja-JP" altLang="en-US" dirty="0"/>
+              <a:t>練習問題６</a:t>
+            </a:r>
           </a:p>
         </p:txBody>
       </p:sp>
@@ -11218,55 +11143,55 @@
           <a:lstStyle/>
           <a:p>
             <a:r>
-              <a:rPr lang="ja-JP" altLang="en-US" sz="2800" dirty="0" smtClean="0"/>
+              <a:rPr lang="ja-JP" altLang="en-US" sz="2800" dirty="0"/>
               <a:t>以下のプログラム断片の制御フローを図示せよ。</a:t>
             </a:r>
-            <a:endParaRPr lang="en-US" altLang="ja-JP" sz="2800" dirty="0" smtClean="0"/>
-          </a:p>
-          <a:p>
-            <a:r>
-              <a:rPr lang="en-US" altLang="ja-JP" sz="2800" dirty="0" smtClean="0"/>
+            <a:endParaRPr lang="en-US" altLang="ja-JP" sz="2800" dirty="0"/>
+          </a:p>
+          <a:p>
+            <a:r>
+              <a:rPr lang="en-US" altLang="ja-JP" sz="2800" dirty="0"/>
               <a:t>x := 10;</a:t>
             </a:r>
           </a:p>
           <a:p>
             <a:r>
-              <a:rPr lang="en-US" altLang="ja-JP" sz="2800" dirty="0" smtClean="0"/>
+              <a:rPr lang="en-US" altLang="ja-JP" sz="2800" dirty="0"/>
               <a:t>sum := 0;</a:t>
             </a:r>
           </a:p>
           <a:p>
             <a:r>
-              <a:rPr lang="en-US" altLang="ja-JP" sz="2800" dirty="0" smtClean="0"/>
+              <a:rPr lang="en-US" altLang="ja-JP" sz="2800" dirty="0"/>
               <a:t>L:  sum := sum + x;</a:t>
             </a:r>
           </a:p>
           <a:p>
             <a:r>
-              <a:rPr lang="en-US" altLang="ja-JP" sz="2800" dirty="0" smtClean="0"/>
+              <a:rPr lang="en-US" altLang="ja-JP" sz="2800" dirty="0"/>
               <a:t>x := x – 1;</a:t>
             </a:r>
           </a:p>
           <a:p>
             <a:r>
-              <a:rPr lang="en-US" altLang="ja-JP" sz="2800" dirty="0" smtClean="0"/>
+              <a:rPr lang="en-US" altLang="ja-JP" sz="2800" dirty="0"/>
               <a:t>if x &gt; 0 then</a:t>
             </a:r>
           </a:p>
           <a:p>
             <a:r>
-              <a:rPr lang="en-US" altLang="ja-JP" sz="2800" dirty="0" smtClean="0"/>
+              <a:rPr lang="en-US" altLang="ja-JP" sz="2800" dirty="0"/>
               <a:t>    </a:t>
             </a:r>
             <a:r>
-              <a:rPr lang="en-US" altLang="ja-JP" sz="2800" dirty="0" err="1" smtClean="0"/>
+              <a:rPr lang="en-US" altLang="ja-JP" sz="2800" dirty="0" err="1"/>
               <a:t>goto</a:t>
             </a:r>
             <a:r>
-              <a:rPr lang="en-US" altLang="ja-JP" sz="2800" smtClean="0"/>
+              <a:rPr lang="en-US" altLang="ja-JP" sz="2800"/>
               <a:t> L</a:t>
             </a:r>
-            <a:endParaRPr lang="en-US" altLang="ja-JP" sz="2800" dirty="0" smtClean="0"/>
+            <a:endParaRPr lang="en-US" altLang="ja-JP" sz="2800" dirty="0"/>
           </a:p>
         </p:txBody>
       </p:sp>
@@ -11318,10 +11243,9 @@
           <a:lstStyle/>
           <a:p>
             <a:r>
-              <a:rPr kumimoji="1" lang="ja-JP" altLang="en-US" dirty="0" smtClean="0"/>
+              <a:rPr kumimoji="1" lang="ja-JP" altLang="en-US" dirty="0"/>
               <a:t>練習問題７</a:t>
             </a:r>
-            <a:endParaRPr kumimoji="1" lang="ja-JP" altLang="en-US" dirty="0"/>
           </a:p>
         </p:txBody>
       </p:sp>
@@ -11348,30 +11272,30 @@
           <a:lstStyle/>
           <a:p>
             <a:r>
-              <a:rPr kumimoji="1" lang="ja-JP" altLang="en-US" sz="2800" dirty="0" smtClean="0"/>
+              <a:rPr kumimoji="1" lang="ja-JP" altLang="en-US" sz="2800" dirty="0"/>
               <a:t>以下のプログラム中の２か所の</a:t>
             </a:r>
             <a:r>
-              <a:rPr kumimoji="1" lang="en-US" altLang="ja-JP" sz="2800" dirty="0" smtClean="0"/>
+              <a:rPr kumimoji="1" lang="en-US" altLang="ja-JP" sz="2800" dirty="0"/>
               <a:t>if</a:t>
             </a:r>
             <a:r>
-              <a:rPr kumimoji="1" lang="ja-JP" altLang="en-US" sz="2800" dirty="0" smtClean="0"/>
+              <a:rPr kumimoji="1" lang="ja-JP" altLang="en-US" sz="2800" dirty="0"/>
               <a:t>文および内側の</a:t>
             </a:r>
             <a:r>
-              <a:rPr kumimoji="1" lang="en-US" altLang="ja-JP" sz="2800" dirty="0" smtClean="0"/>
+              <a:rPr kumimoji="1" lang="en-US" altLang="ja-JP" sz="2800" dirty="0"/>
               <a:t>while</a:t>
             </a:r>
             <a:r>
-              <a:rPr kumimoji="1" lang="ja-JP" altLang="en-US" sz="2800" dirty="0" smtClean="0"/>
+              <a:rPr kumimoji="1" lang="ja-JP" altLang="en-US" sz="2800" dirty="0"/>
               <a:t>文の入口</a:t>
             </a:r>
             <a:r>
-              <a:rPr lang="ja-JP" altLang="en-US" sz="2800" dirty="0" smtClean="0"/>
+              <a:rPr lang="ja-JP" altLang="en-US" sz="2800" dirty="0"/>
               <a:t>、出口はそれぞれいくつか。</a:t>
             </a:r>
-            <a:endParaRPr kumimoji="1" lang="en-US" altLang="ja-JP" sz="2800" dirty="0" smtClean="0"/>
+            <a:endParaRPr kumimoji="1" lang="en-US" altLang="ja-JP" sz="2800" dirty="0"/>
           </a:p>
         </p:txBody>
       </p:sp>
@@ -11398,162 +11322,162 @@
           <a:lstStyle/>
           <a:p>
             <a:r>
-              <a:rPr lang="en-US" altLang="ja-JP" sz="2800" b="1" dirty="0" smtClean="0"/>
+              <a:rPr lang="en-US" altLang="ja-JP" sz="2800" b="1" dirty="0"/>
               <a:t>while</a:t>
             </a:r>
             <a:r>
-              <a:rPr lang="en-US" altLang="ja-JP" sz="2800" dirty="0" smtClean="0"/>
+              <a:rPr lang="en-US" altLang="ja-JP" sz="2800" dirty="0"/>
               <a:t> x&gt;0 </a:t>
             </a:r>
             <a:r>
-              <a:rPr lang="en-US" altLang="ja-JP" sz="2800" b="1" dirty="0" smtClean="0"/>
+              <a:rPr lang="en-US" altLang="ja-JP" sz="2800" b="1" dirty="0"/>
               <a:t>do</a:t>
             </a:r>
           </a:p>
           <a:p>
             <a:r>
-              <a:rPr lang="en-US" altLang="ja-JP" sz="2800" b="1" dirty="0" smtClean="0"/>
+              <a:rPr lang="en-US" altLang="ja-JP" sz="2800" b="1" dirty="0"/>
               <a:t>    begin</a:t>
             </a:r>
           </a:p>
           <a:p>
             <a:r>
-              <a:rPr lang="en-US" altLang="ja-JP" sz="2800" b="1" dirty="0" smtClean="0"/>
+              <a:rPr lang="en-US" altLang="ja-JP" sz="2800" b="1" dirty="0"/>
               <a:t>        while </a:t>
             </a:r>
             <a:r>
-              <a:rPr lang="en-US" altLang="ja-JP" sz="2800" dirty="0" smtClean="0"/>
+              <a:rPr lang="en-US" altLang="ja-JP" sz="2800" dirty="0"/>
               <a:t>y&gt;0</a:t>
             </a:r>
             <a:r>
-              <a:rPr lang="en-US" altLang="ja-JP" sz="2800" b="1" dirty="0" smtClean="0"/>
+              <a:rPr lang="en-US" altLang="ja-JP" sz="2800" b="1" dirty="0"/>
               <a:t> do</a:t>
             </a:r>
           </a:p>
           <a:p>
             <a:r>
-              <a:rPr lang="en-US" altLang="ja-JP" sz="2800" dirty="0" smtClean="0"/>
+              <a:rPr lang="en-US" altLang="ja-JP" sz="2800" dirty="0"/>
               <a:t>            </a:t>
             </a:r>
             <a:r>
-              <a:rPr lang="en-US" altLang="ja-JP" sz="2800" b="1" dirty="0" smtClean="0"/>
+              <a:rPr lang="en-US" altLang="ja-JP" sz="2800" b="1" dirty="0"/>
               <a:t>begin</a:t>
             </a:r>
           </a:p>
           <a:p>
             <a:r>
-              <a:rPr lang="en-US" altLang="ja-JP" sz="2800" dirty="0" smtClean="0"/>
+              <a:rPr lang="en-US" altLang="ja-JP" sz="2800" dirty="0"/>
               <a:t>                </a:t>
             </a:r>
             <a:r>
-              <a:rPr lang="en-US" altLang="ja-JP" sz="2800" b="1" dirty="0" smtClean="0"/>
+              <a:rPr lang="en-US" altLang="ja-JP" sz="2800" b="1" dirty="0"/>
               <a:t>if</a:t>
             </a:r>
             <a:r>
-              <a:rPr lang="en-US" altLang="ja-JP" sz="2800" dirty="0" smtClean="0"/>
+              <a:rPr lang="en-US" altLang="ja-JP" sz="2800" dirty="0"/>
               <a:t> x=3 </a:t>
             </a:r>
             <a:r>
-              <a:rPr lang="en-US" altLang="ja-JP" sz="2800" b="1" dirty="0" smtClean="0"/>
+              <a:rPr lang="en-US" altLang="ja-JP" sz="2800" b="1" dirty="0"/>
               <a:t>then</a:t>
             </a:r>
           </a:p>
           <a:p>
             <a:r>
-              <a:rPr kumimoji="1" lang="en-US" altLang="ja-JP" sz="2800" dirty="0" smtClean="0"/>
+              <a:rPr kumimoji="1" lang="en-US" altLang="ja-JP" sz="2800" dirty="0"/>
               <a:t>                    </a:t>
             </a:r>
             <a:r>
-              <a:rPr kumimoji="1" lang="en-US" altLang="ja-JP" sz="2800" b="1" dirty="0" smtClean="0"/>
+              <a:rPr kumimoji="1" lang="en-US" altLang="ja-JP" sz="2800" b="1" dirty="0"/>
               <a:t>break</a:t>
             </a:r>
             <a:r>
-              <a:rPr kumimoji="1" lang="en-US" altLang="ja-JP" sz="2800" dirty="0" smtClean="0"/>
+              <a:rPr kumimoji="1" lang="en-US" altLang="ja-JP" sz="2800" dirty="0"/>
               <a:t>;</a:t>
             </a:r>
           </a:p>
           <a:p>
             <a:r>
-              <a:rPr lang="en-US" altLang="ja-JP" sz="2800" b="1" dirty="0" smtClean="0"/>
+              <a:rPr lang="en-US" altLang="ja-JP" sz="2800" b="1" dirty="0"/>
               <a:t>                </a:t>
             </a:r>
             <a:r>
-              <a:rPr lang="en-US" altLang="ja-JP" sz="2800" dirty="0" smtClean="0"/>
+              <a:rPr lang="en-US" altLang="ja-JP" sz="2800" dirty="0"/>
               <a:t>L:</a:t>
             </a:r>
             <a:r>
-              <a:rPr lang="en-US" altLang="ja-JP" sz="2800" b="1" dirty="0" smtClean="0"/>
+              <a:rPr lang="en-US" altLang="ja-JP" sz="2800" b="1" dirty="0"/>
               <a:t>  </a:t>
             </a:r>
             <a:r>
-              <a:rPr lang="en-US" altLang="ja-JP" sz="2800" dirty="0" smtClean="0"/>
+              <a:rPr lang="en-US" altLang="ja-JP" sz="2800" dirty="0"/>
               <a:t>z := z + 1;</a:t>
             </a:r>
           </a:p>
           <a:p>
             <a:r>
-              <a:rPr kumimoji="1" lang="en-US" altLang="ja-JP" sz="2800" dirty="0" smtClean="0"/>
+              <a:rPr kumimoji="1" lang="en-US" altLang="ja-JP" sz="2800" dirty="0"/>
               <a:t>                y := y - 1</a:t>
             </a:r>
           </a:p>
           <a:p>
             <a:r>
-              <a:rPr kumimoji="1" lang="en-US" altLang="ja-JP" sz="2800" dirty="0" smtClean="0"/>
+              <a:rPr kumimoji="1" lang="en-US" altLang="ja-JP" sz="2800" dirty="0"/>
               <a:t>            </a:t>
             </a:r>
             <a:r>
-              <a:rPr kumimoji="1" lang="en-US" altLang="ja-JP" sz="2800" b="1" dirty="0" smtClean="0"/>
+              <a:rPr kumimoji="1" lang="en-US" altLang="ja-JP" sz="2800" b="1" dirty="0"/>
               <a:t>end</a:t>
             </a:r>
             <a:r>
-              <a:rPr kumimoji="1" lang="en-US" altLang="ja-JP" sz="2800" dirty="0" smtClean="0"/>
+              <a:rPr kumimoji="1" lang="en-US" altLang="ja-JP" sz="2800" dirty="0"/>
               <a:t>;</a:t>
             </a:r>
           </a:p>
           <a:p>
             <a:r>
-              <a:rPr kumimoji="1" lang="en-US" altLang="ja-JP" sz="2800" dirty="0" smtClean="0"/>
+              <a:rPr kumimoji="1" lang="en-US" altLang="ja-JP" sz="2800" dirty="0"/>
               <a:t>        x := x – 1;</a:t>
             </a:r>
           </a:p>
           <a:p>
             <a:r>
-              <a:rPr lang="en-US" altLang="ja-JP" sz="2800" dirty="0" smtClean="0"/>
+              <a:rPr lang="en-US" altLang="ja-JP" sz="2800" dirty="0"/>
               <a:t>        </a:t>
             </a:r>
             <a:r>
-              <a:rPr lang="en-US" altLang="ja-JP" sz="2800" b="1" dirty="0" smtClean="0"/>
+              <a:rPr lang="en-US" altLang="ja-JP" sz="2800" b="1" dirty="0"/>
               <a:t>if</a:t>
             </a:r>
             <a:r>
-              <a:rPr lang="en-US" altLang="ja-JP" sz="2800" dirty="0" smtClean="0"/>
+              <a:rPr lang="en-US" altLang="ja-JP" sz="2800" dirty="0"/>
               <a:t> x = 2 </a:t>
             </a:r>
             <a:r>
-              <a:rPr lang="en-US" altLang="ja-JP" sz="2800" b="1" dirty="0" smtClean="0"/>
+              <a:rPr lang="en-US" altLang="ja-JP" sz="2800" b="1" dirty="0"/>
               <a:t>then</a:t>
             </a:r>
             <a:r>
-              <a:rPr lang="en-US" altLang="ja-JP" sz="2800" dirty="0" smtClean="0"/>
+              <a:rPr lang="en-US" altLang="ja-JP" sz="2800" dirty="0"/>
               <a:t> </a:t>
             </a:r>
             <a:r>
-              <a:rPr lang="en-US" altLang="ja-JP" sz="2800" dirty="0" err="1" smtClean="0"/>
+              <a:rPr lang="en-US" altLang="ja-JP" sz="2800" dirty="0" err="1"/>
               <a:t>goto</a:t>
             </a:r>
             <a:r>
-              <a:rPr lang="en-US" altLang="ja-JP" sz="2800" dirty="0" smtClean="0"/>
+              <a:rPr lang="en-US" altLang="ja-JP" sz="2800" dirty="0"/>
               <a:t> L</a:t>
             </a:r>
-            <a:endParaRPr kumimoji="1" lang="en-US" altLang="ja-JP" sz="2800" dirty="0" smtClean="0"/>
-          </a:p>
-          <a:p>
-            <a:r>
-              <a:rPr lang="en-US" altLang="ja-JP" sz="2800" dirty="0" smtClean="0"/>
+            <a:endParaRPr kumimoji="1" lang="en-US" altLang="ja-JP" sz="2800" dirty="0"/>
+          </a:p>
+          <a:p>
+            <a:r>
+              <a:rPr lang="en-US" altLang="ja-JP" sz="2800" dirty="0"/>
               <a:t>   </a:t>
             </a:r>
             <a:r>
-              <a:rPr lang="en-US" altLang="ja-JP" sz="2800" b="1" dirty="0" smtClean="0"/>
+              <a:rPr lang="en-US" altLang="ja-JP" sz="2800" b="1" dirty="0"/>
               <a:t> end</a:t>
             </a:r>
             <a:endParaRPr kumimoji="1" lang="ja-JP" altLang="en-US" sz="2800" b="1" dirty="0"/>
@@ -11570,13 +11494,6 @@
   <p:clrMapOvr>
     <a:masterClrMapping/>
   </p:clrMapOvr>
-  <p:timing>
-    <p:tnLst>
-      <p:par>
-        <p:cTn xmlns:p14="http://schemas.microsoft.com/office/powerpoint/2010/main" id="1" dur="indefinite" restart="never" nodeType="tmRoot"/>
-      </p:par>
-    </p:tnLst>
-  </p:timing>
 </p:sld>
 </file>
 
@@ -11613,14 +11530,13 @@
           <a:lstStyle/>
           <a:p>
             <a:r>
-              <a:rPr kumimoji="1" lang="en-US" altLang="ja-JP" dirty="0" smtClean="0"/>
+              <a:rPr kumimoji="1" lang="en-US" altLang="ja-JP" dirty="0"/>
               <a:t>return</a:t>
             </a:r>
             <a:r>
-              <a:rPr kumimoji="1" lang="ja-JP" altLang="en-US" dirty="0" smtClean="0"/>
+              <a:rPr kumimoji="1" lang="ja-JP" altLang="en-US" dirty="0"/>
               <a:t>文</a:t>
             </a:r>
-            <a:endParaRPr kumimoji="1" lang="ja-JP" altLang="en-US" dirty="0"/>
           </a:p>
         </p:txBody>
       </p:sp>
@@ -11647,163 +11563,163 @@
           <a:lstStyle/>
           <a:p>
             <a:r>
-              <a:rPr lang="en-US" altLang="ja-JP" sz="2800" dirty="0" smtClean="0"/>
+              <a:rPr lang="en-US" altLang="ja-JP" sz="2800" dirty="0"/>
               <a:t>r</a:t>
             </a:r>
             <a:r>
-              <a:rPr kumimoji="1" lang="en-US" altLang="ja-JP" sz="2800" dirty="0" smtClean="0"/>
+              <a:rPr kumimoji="1" lang="en-US" altLang="ja-JP" sz="2800" dirty="0"/>
               <a:t>eturn</a:t>
             </a:r>
             <a:r>
-              <a:rPr kumimoji="1" lang="ja-JP" altLang="en-US" sz="2800" dirty="0" smtClean="0"/>
+              <a:rPr kumimoji="1" lang="ja-JP" altLang="en-US" sz="2800" dirty="0"/>
               <a:t>文は</a:t>
             </a:r>
             <a:r>
-              <a:rPr kumimoji="1" lang="en-US" altLang="ja-JP" sz="2800" dirty="0" smtClean="0"/>
+              <a:rPr kumimoji="1" lang="en-US" altLang="ja-JP" sz="2800" dirty="0"/>
               <a:t>Modula-2</a:t>
             </a:r>
             <a:r>
-              <a:rPr kumimoji="1" lang="ja-JP" altLang="en-US" sz="2800" dirty="0" smtClean="0"/>
+              <a:rPr kumimoji="1" lang="ja-JP" altLang="en-US" sz="2800" dirty="0"/>
               <a:t>などでは</a:t>
             </a:r>
-            <a:endParaRPr kumimoji="1" lang="en-US" altLang="ja-JP" sz="2800" dirty="0" smtClean="0"/>
-          </a:p>
-          <a:p>
-            <a:r>
-              <a:rPr lang="en-US" altLang="ja-JP" sz="2800" dirty="0" smtClean="0"/>
+            <a:endParaRPr kumimoji="1" lang="en-US" altLang="ja-JP" sz="2800" dirty="0"/>
+          </a:p>
+          <a:p>
+            <a:r>
+              <a:rPr lang="en-US" altLang="ja-JP" sz="2800" dirty="0"/>
               <a:t>    return </a:t>
             </a:r>
             <a:r>
-              <a:rPr lang="ja-JP" altLang="en-US" sz="2800" dirty="0" smtClean="0"/>
+              <a:rPr lang="ja-JP" altLang="en-US" sz="2800" dirty="0"/>
               <a:t>あるいは </a:t>
             </a:r>
             <a:r>
-              <a:rPr lang="en-US" altLang="ja-JP" sz="2800" dirty="0" smtClean="0"/>
+              <a:rPr lang="en-US" altLang="ja-JP" sz="2800" dirty="0"/>
               <a:t>return </a:t>
             </a:r>
             <a:r>
-              <a:rPr lang="ja-JP" altLang="en-US" sz="2800" dirty="0" smtClean="0"/>
+              <a:rPr lang="ja-JP" altLang="en-US" sz="2800" dirty="0"/>
               <a:t>式</a:t>
             </a:r>
-            <a:endParaRPr lang="en-US" altLang="ja-JP" sz="2800" dirty="0" smtClean="0"/>
-          </a:p>
-          <a:p>
-            <a:r>
-              <a:rPr kumimoji="1" lang="ja-JP" altLang="en-US" sz="2800" dirty="0" smtClean="0"/>
+            <a:endParaRPr lang="en-US" altLang="ja-JP" sz="2800" dirty="0"/>
+          </a:p>
+          <a:p>
+            <a:r>
+              <a:rPr kumimoji="1" lang="ja-JP" altLang="en-US" sz="2800" dirty="0"/>
               <a:t>の形で書かれる</a:t>
             </a:r>
             <a:r>
-              <a:rPr lang="ja-JP" altLang="en-US" sz="2800" dirty="0" smtClean="0"/>
+              <a:rPr lang="ja-JP" altLang="en-US" sz="2800" dirty="0"/>
               <a:t>（</a:t>
             </a:r>
             <a:r>
-              <a:rPr lang="en-US" altLang="ja-JP" sz="2800" dirty="0" smtClean="0"/>
+              <a:rPr lang="en-US" altLang="ja-JP" sz="2800" dirty="0"/>
               <a:t>C</a:t>
             </a:r>
             <a:r>
-              <a:rPr lang="ja-JP" altLang="en-US" sz="2800" dirty="0" smtClean="0"/>
+              <a:rPr lang="ja-JP" altLang="en-US" sz="2800" dirty="0"/>
               <a:t>ではセミコロンをつけて</a:t>
             </a:r>
             <a:r>
-              <a:rPr lang="en-US" altLang="ja-JP" sz="2800" dirty="0" smtClean="0"/>
+              <a:rPr lang="en-US" altLang="ja-JP" sz="2800" dirty="0"/>
               <a:t>return; </a:t>
             </a:r>
             <a:r>
-              <a:rPr lang="ja-JP" altLang="en-US" sz="2800" dirty="0" smtClean="0"/>
+              <a:rPr lang="ja-JP" altLang="en-US" sz="2800" dirty="0"/>
               <a:t>あるいは</a:t>
             </a:r>
             <a:r>
-              <a:rPr lang="en-US" altLang="ja-JP" sz="2800" dirty="0" smtClean="0"/>
+              <a:rPr lang="en-US" altLang="ja-JP" sz="2800" dirty="0"/>
               <a:t>return </a:t>
             </a:r>
             <a:r>
-              <a:rPr lang="ja-JP" altLang="en-US" sz="2800" dirty="0" smtClean="0"/>
+              <a:rPr lang="ja-JP" altLang="en-US" sz="2800" dirty="0"/>
               <a:t>式</a:t>
             </a:r>
             <a:r>
-              <a:rPr lang="en-US" altLang="ja-JP" sz="2800" dirty="0" smtClean="0"/>
+              <a:rPr lang="en-US" altLang="ja-JP" sz="2800" dirty="0"/>
               <a:t>; </a:t>
             </a:r>
             <a:r>
-              <a:rPr lang="ja-JP" altLang="en-US" sz="2800" dirty="0" smtClean="0"/>
+              <a:rPr lang="ja-JP" altLang="en-US" sz="2800" dirty="0"/>
               <a:t>と書く）</a:t>
             </a:r>
             <a:r>
-              <a:rPr kumimoji="1" lang="ja-JP" altLang="en-US" sz="2800" dirty="0" smtClean="0"/>
+              <a:rPr kumimoji="1" lang="ja-JP" altLang="en-US" sz="2800" dirty="0"/>
               <a:t>。</a:t>
             </a:r>
-            <a:endParaRPr kumimoji="1" lang="en-US" altLang="ja-JP" sz="2800" dirty="0" smtClean="0"/>
-          </a:p>
-          <a:p>
-            <a:r>
-              <a:rPr lang="en-US" altLang="ja-JP" sz="2800" dirty="0" smtClean="0"/>
+            <a:endParaRPr kumimoji="1" lang="en-US" altLang="ja-JP" sz="2800" dirty="0"/>
+          </a:p>
+          <a:p>
+            <a:r>
+              <a:rPr lang="en-US" altLang="ja-JP" sz="2800" dirty="0"/>
               <a:t>return</a:t>
             </a:r>
             <a:r>
-              <a:rPr lang="ja-JP" altLang="en-US" sz="2800" dirty="0" smtClean="0"/>
+              <a:rPr lang="ja-JP" altLang="en-US" sz="2800" dirty="0"/>
               <a:t>文が実行されると、その手続き（関数）を呼び出した部分に制御が戻る。</a:t>
             </a:r>
-            <a:endParaRPr lang="en-US" altLang="ja-JP" sz="2800" dirty="0" smtClean="0"/>
-          </a:p>
-          <a:p>
-            <a:endParaRPr lang="en-US" altLang="ja-JP" sz="2800" dirty="0" smtClean="0"/>
-          </a:p>
-          <a:p>
-            <a:r>
-              <a:rPr lang="en-US" altLang="ja-JP" sz="2800" dirty="0" smtClean="0"/>
+            <a:endParaRPr lang="en-US" altLang="ja-JP" sz="2800" dirty="0"/>
+          </a:p>
+          <a:p>
+            <a:endParaRPr lang="en-US" altLang="ja-JP" sz="2800" dirty="0"/>
+          </a:p>
+          <a:p>
+            <a:r>
+              <a:rPr lang="en-US" altLang="ja-JP" sz="2800" dirty="0"/>
               <a:t>Return</a:t>
             </a:r>
             <a:r>
-              <a:rPr lang="ja-JP" altLang="en-US" sz="2800" dirty="0" smtClean="0"/>
+              <a:rPr lang="ja-JP" altLang="en-US" sz="2800" dirty="0"/>
               <a:t>文も、</a:t>
             </a:r>
             <a:r>
-              <a:rPr lang="en-US" altLang="ja-JP" sz="2800" dirty="0" err="1" smtClean="0"/>
+              <a:rPr lang="en-US" altLang="ja-JP" sz="2800" dirty="0" err="1"/>
               <a:t>goto</a:t>
             </a:r>
             <a:r>
-              <a:rPr lang="ja-JP" altLang="en-US" sz="2800" dirty="0" smtClean="0"/>
+              <a:rPr lang="ja-JP" altLang="en-US" sz="2800" dirty="0"/>
               <a:t>文、</a:t>
             </a:r>
             <a:r>
-              <a:rPr lang="en-US" altLang="ja-JP" sz="2800" dirty="0" smtClean="0"/>
+              <a:rPr lang="en-US" altLang="ja-JP" sz="2800" dirty="0"/>
               <a:t>break</a:t>
             </a:r>
             <a:r>
-              <a:rPr lang="ja-JP" altLang="en-US" sz="2800" dirty="0" smtClean="0"/>
+              <a:rPr lang="ja-JP" altLang="en-US" sz="2800" dirty="0"/>
               <a:t>文、</a:t>
             </a:r>
             <a:r>
-              <a:rPr lang="en-US" altLang="ja-JP" sz="2800" dirty="0" smtClean="0"/>
+              <a:rPr lang="en-US" altLang="ja-JP" sz="2800" dirty="0"/>
               <a:t>continue</a:t>
             </a:r>
             <a:r>
-              <a:rPr lang="ja-JP" altLang="en-US" sz="2800" dirty="0" smtClean="0"/>
+              <a:rPr lang="ja-JP" altLang="en-US" sz="2800" dirty="0"/>
               <a:t>文と同様、実行されると制御が移る。</a:t>
             </a:r>
-            <a:endParaRPr lang="en-US" altLang="ja-JP" sz="2800" dirty="0" smtClean="0"/>
-          </a:p>
-          <a:p>
-            <a:endParaRPr lang="en-US" altLang="ja-JP" sz="2800" dirty="0" smtClean="0"/>
-          </a:p>
-          <a:p>
-            <a:r>
-              <a:rPr lang="en-US" altLang="ja-JP" sz="2800" dirty="0" smtClean="0"/>
+            <a:endParaRPr lang="en-US" altLang="ja-JP" sz="2800" dirty="0"/>
+          </a:p>
+          <a:p>
+            <a:endParaRPr lang="en-US" altLang="ja-JP" sz="2800" dirty="0"/>
+          </a:p>
+          <a:p>
+            <a:r>
+              <a:rPr lang="en-US" altLang="ja-JP" sz="2800" dirty="0"/>
               <a:t>break</a:t>
             </a:r>
             <a:r>
-              <a:rPr lang="ja-JP" altLang="en-US" sz="2800" dirty="0" smtClean="0"/>
+              <a:rPr lang="ja-JP" altLang="en-US" sz="2800" dirty="0"/>
               <a:t>文は繰り返しを脱出するのに対し、</a:t>
             </a:r>
             <a:r>
-              <a:rPr lang="en-US" altLang="ja-JP" sz="2800" dirty="0" smtClean="0"/>
+              <a:rPr lang="en-US" altLang="ja-JP" sz="2800" dirty="0"/>
               <a:t>return</a:t>
             </a:r>
             <a:r>
-              <a:rPr lang="ja-JP" altLang="en-US" sz="2800" dirty="0" smtClean="0"/>
+              <a:rPr lang="ja-JP" altLang="en-US" sz="2800" dirty="0"/>
               <a:t>文は手続き（関数）を脱出する。</a:t>
             </a:r>
-            <a:endParaRPr lang="en-US" altLang="ja-JP" sz="2800" dirty="0" smtClean="0"/>
+            <a:endParaRPr lang="en-US" altLang="ja-JP" sz="2800" dirty="0"/>
           </a:p>
         </p:txBody>
       </p:sp>
@@ -11848,7 +11764,7 @@
           <a:lstStyle/>
           <a:p>
             <a:r>
-              <a:rPr lang="ja-JP" altLang="en-US" dirty="0" smtClean="0"/>
+              <a:rPr lang="ja-JP" altLang="en-US" dirty="0"/>
               <a:t>代入</a:t>
             </a:r>
             <a:endParaRPr kumimoji="1" lang="ja-JP" altLang="en-US" dirty="0"/>
@@ -11878,103 +11794,103 @@
           <a:lstStyle/>
           <a:p>
             <a:r>
-              <a:rPr kumimoji="1" lang="ja-JP" altLang="en-US" sz="2800" dirty="0" smtClean="0"/>
+              <a:rPr kumimoji="1" lang="ja-JP" altLang="en-US" sz="2800" dirty="0"/>
               <a:t>命令型言語では、変数の値を変える操作が基本</a:t>
             </a:r>
             <a:r>
-              <a:rPr lang="ja-JP" altLang="en-US" sz="2800" dirty="0" smtClean="0"/>
+              <a:rPr lang="ja-JP" altLang="en-US" sz="2800" dirty="0"/>
               <a:t>。</a:t>
             </a:r>
-            <a:endParaRPr lang="en-US" altLang="ja-JP" sz="2800" dirty="0" smtClean="0"/>
-          </a:p>
-          <a:p>
-            <a:r>
-              <a:rPr lang="ja-JP" altLang="en-US" sz="2800" dirty="0" smtClean="0"/>
+            <a:endParaRPr lang="en-US" altLang="ja-JP" sz="2800" dirty="0"/>
+          </a:p>
+          <a:p>
+            <a:r>
+              <a:rPr lang="ja-JP" altLang="en-US" sz="2800" dirty="0"/>
               <a:t>代入</a:t>
             </a:r>
             <a:r>
-              <a:rPr lang="en-US" altLang="ja-JP" sz="2800" dirty="0" smtClean="0"/>
+              <a:rPr lang="en-US" altLang="ja-JP" sz="2800" dirty="0"/>
               <a:t>(assignment)</a:t>
             </a:r>
             <a:r>
-              <a:rPr lang="ja-JP" altLang="en-US" sz="2800" dirty="0" smtClean="0"/>
+              <a:rPr lang="ja-JP" altLang="en-US" sz="2800" dirty="0"/>
               <a:t>によって変数の値を変える。</a:t>
             </a:r>
-            <a:endParaRPr lang="en-US" altLang="ja-JP" sz="2800" dirty="0" smtClean="0"/>
-          </a:p>
-          <a:p>
-            <a:r>
-              <a:rPr lang="ja-JP" altLang="en-US" sz="2800" dirty="0" smtClean="0"/>
+            <a:endParaRPr lang="en-US" altLang="ja-JP" sz="2800" dirty="0"/>
+          </a:p>
+          <a:p>
+            <a:r>
+              <a:rPr lang="ja-JP" altLang="en-US" sz="2800" dirty="0"/>
               <a:t>（代入の例）</a:t>
             </a:r>
-            <a:endParaRPr lang="en-US" altLang="ja-JP" sz="2800" dirty="0" smtClean="0"/>
-          </a:p>
-          <a:p>
-            <a:r>
-              <a:rPr kumimoji="1" lang="en-US" altLang="ja-JP" sz="2800" dirty="0" smtClean="0"/>
+            <a:endParaRPr lang="en-US" altLang="ja-JP" sz="2800" dirty="0"/>
+          </a:p>
+          <a:p>
+            <a:r>
+              <a:rPr kumimoji="1" lang="en-US" altLang="ja-JP" sz="2800" dirty="0"/>
               <a:t>   x := 2+3</a:t>
             </a:r>
           </a:p>
           <a:p>
             <a:r>
-              <a:rPr lang="en-US" altLang="ja-JP" sz="2800" dirty="0" smtClean="0"/>
+              <a:rPr lang="en-US" altLang="ja-JP" sz="2800" dirty="0"/>
               <a:t>   x := a[</a:t>
             </a:r>
             <a:r>
-              <a:rPr lang="en-US" altLang="ja-JP" sz="2800" dirty="0" err="1" smtClean="0"/>
+              <a:rPr lang="en-US" altLang="ja-JP" sz="2800" dirty="0" err="1"/>
               <a:t>i</a:t>
             </a:r>
             <a:r>
-              <a:rPr lang="en-US" altLang="ja-JP" sz="2800" dirty="0" smtClean="0"/>
+              <a:rPr lang="en-US" altLang="ja-JP" sz="2800" dirty="0"/>
               <a:t>]</a:t>
             </a:r>
           </a:p>
           <a:p>
             <a:r>
-              <a:rPr kumimoji="1" lang="en-US" altLang="ja-JP" sz="2800" dirty="0" smtClean="0"/>
+              <a:rPr kumimoji="1" lang="en-US" altLang="ja-JP" sz="2800" dirty="0"/>
               <a:t>   a</a:t>
             </a:r>
             <a:r>
-              <a:rPr lang="en-US" altLang="ja-JP" sz="2800" dirty="0" smtClean="0"/>
+              <a:rPr lang="en-US" altLang="ja-JP" sz="2800" dirty="0"/>
               <a:t>[</a:t>
             </a:r>
             <a:r>
-              <a:rPr lang="en-US" altLang="ja-JP" sz="2800" dirty="0" err="1" smtClean="0"/>
+              <a:rPr lang="en-US" altLang="ja-JP" sz="2800" dirty="0" err="1"/>
               <a:t>i</a:t>
             </a:r>
             <a:r>
-              <a:rPr lang="en-US" altLang="ja-JP" sz="2800" dirty="0" smtClean="0"/>
+              <a:rPr lang="en-US" altLang="ja-JP" sz="2800" dirty="0"/>
               <a:t>] := x</a:t>
             </a:r>
           </a:p>
           <a:p>
             <a:r>
-              <a:rPr lang="ja-JP" altLang="en-US" sz="2800" dirty="0" smtClean="0"/>
+              <a:rPr lang="ja-JP" altLang="en-US" sz="2800" dirty="0"/>
               <a:t>手続き呼び出しによって間接的に変数を値を変えることもできる。</a:t>
             </a:r>
-            <a:endParaRPr lang="en-US" altLang="ja-JP" sz="2800" dirty="0" smtClean="0"/>
-          </a:p>
-          <a:p>
-            <a:r>
-              <a:rPr lang="en-US" altLang="ja-JP" sz="2800" dirty="0" smtClean="0"/>
+            <a:endParaRPr lang="en-US" altLang="ja-JP" sz="2800" dirty="0"/>
+          </a:p>
+          <a:p>
+            <a:r>
+              <a:rPr lang="en-US" altLang="ja-JP" sz="2800" dirty="0"/>
               <a:t>(</a:t>
             </a:r>
             <a:r>
-              <a:rPr lang="ja-JP" altLang="en-US" sz="2800" dirty="0" smtClean="0"/>
+              <a:rPr lang="ja-JP" altLang="en-US" sz="2800" dirty="0"/>
               <a:t>手続き呼び出しの例</a:t>
             </a:r>
             <a:r>
-              <a:rPr lang="en-US" altLang="ja-JP" sz="2800" dirty="0" smtClean="0"/>
+              <a:rPr lang="en-US" altLang="ja-JP" sz="2800" dirty="0"/>
               <a:t>)</a:t>
             </a:r>
           </a:p>
           <a:p>
             <a:r>
-              <a:rPr lang="ja-JP" altLang="en-US" sz="2800" dirty="0" smtClean="0"/>
+              <a:rPr lang="ja-JP" altLang="en-US" sz="2800" dirty="0"/>
               <a:t>   </a:t>
             </a:r>
             <a:r>
-              <a:rPr lang="en-US" altLang="ja-JP" sz="2800" dirty="0" smtClean="0"/>
+              <a:rPr lang="en-US" altLang="ja-JP" sz="2800" dirty="0"/>
               <a:t>read(x)</a:t>
             </a:r>
           </a:p>
@@ -12023,26 +11939,22 @@
           <a:lstStyle/>
           <a:p>
             <a:r>
-              <a:rPr kumimoji="1" lang="ja-JP" altLang="en-US" dirty="0" smtClean="0"/>
+              <a:rPr kumimoji="1" lang="ja-JP" altLang="en-US" dirty="0"/>
               <a:t>構造化プログラミング</a:t>
             </a:r>
-            <a:r>
-              <a:rPr kumimoji="1" lang="en-US" altLang="ja-JP" dirty="0" smtClean="0"/>
-              <a:t/>
-            </a:r>
             <a:br>
-              <a:rPr kumimoji="1" lang="en-US" altLang="ja-JP" dirty="0" smtClean="0"/>
+              <a:rPr kumimoji="1" lang="en-US" altLang="ja-JP" dirty="0"/>
             </a:br>
             <a:r>
-              <a:rPr lang="ja-JP" altLang="en-US" dirty="0" smtClean="0"/>
+              <a:rPr lang="ja-JP" altLang="en-US" dirty="0"/>
               <a:t>（</a:t>
             </a:r>
             <a:r>
-              <a:rPr lang="en-US" altLang="ja-JP" dirty="0" smtClean="0"/>
+              <a:rPr lang="en-US" altLang="ja-JP" dirty="0"/>
               <a:t>structured programming</a:t>
             </a:r>
             <a:r>
-              <a:rPr lang="ja-JP" altLang="en-US" dirty="0" smtClean="0"/>
+              <a:rPr lang="ja-JP" altLang="en-US" dirty="0"/>
               <a:t>）</a:t>
             </a:r>
             <a:endParaRPr kumimoji="1" lang="ja-JP" altLang="en-US" dirty="0"/>
@@ -12072,22 +11984,22 @@
           <a:lstStyle/>
           <a:p>
             <a:r>
-              <a:rPr kumimoji="1" lang="ja-JP" altLang="en-US" sz="2800" dirty="0" smtClean="0"/>
+              <a:rPr kumimoji="1" lang="ja-JP" altLang="en-US" sz="2800" dirty="0"/>
               <a:t>プログラムを見て、行われる計算が容易に分かるように言語を設計するべき。</a:t>
             </a:r>
             <a:r>
-              <a:rPr lang="en-US" altLang="ja-JP" sz="2800" dirty="0" err="1" smtClean="0"/>
+              <a:rPr lang="en-US" altLang="ja-JP" sz="2800" dirty="0" err="1"/>
               <a:t>g</a:t>
             </a:r>
             <a:r>
-              <a:rPr kumimoji="1" lang="en-US" altLang="ja-JP" sz="2800" dirty="0" err="1" smtClean="0"/>
+              <a:rPr kumimoji="1" lang="en-US" altLang="ja-JP" sz="2800" dirty="0" err="1"/>
               <a:t>oto</a:t>
             </a:r>
             <a:r>
-              <a:rPr kumimoji="1" lang="ja-JP" altLang="en-US" sz="2800" dirty="0" smtClean="0"/>
+              <a:rPr kumimoji="1" lang="ja-JP" altLang="en-US" sz="2800" dirty="0"/>
               <a:t>文を多用したプログラムではどのような計算が行われるのかわかりにくくなる。</a:t>
             </a:r>
-            <a:endParaRPr kumimoji="1" lang="en-US" altLang="ja-JP" sz="2800" dirty="0" smtClean="0"/>
+            <a:endParaRPr kumimoji="1" lang="en-US" altLang="ja-JP" sz="2800" dirty="0"/>
           </a:p>
         </p:txBody>
       </p:sp>
@@ -12118,10 +12030,9 @@
           <a:lstStyle/>
           <a:p>
             <a:r>
-              <a:rPr lang="ja-JP" altLang="en-US" sz="2800" dirty="0" smtClean="0"/>
+              <a:rPr lang="ja-JP" altLang="en-US" sz="2800" dirty="0"/>
               <a:t>構造化プログラミング：プログラムの構造が、どのような計算が行われるかの理解の助けになる。</a:t>
             </a:r>
-            <a:endParaRPr lang="ja-JP" altLang="en-US" sz="2800" dirty="0"/>
           </a:p>
         </p:txBody>
       </p:sp>
@@ -12148,10 +12059,9 @@
           <a:lstStyle/>
           <a:p>
             <a:r>
-              <a:rPr kumimoji="1" lang="ja-JP" altLang="en-US" sz="2800" dirty="0" smtClean="0"/>
+              <a:rPr kumimoji="1" lang="ja-JP" altLang="en-US" sz="2800" dirty="0"/>
               <a:t>構造化されたプログラムでも構造化されていないプログラムと同等の効率のものは書ける。</a:t>
             </a:r>
-            <a:endParaRPr kumimoji="1" lang="ja-JP" altLang="en-US" sz="2800" dirty="0"/>
           </a:p>
         </p:txBody>
       </p:sp>
@@ -12182,39 +12092,39 @@
           <a:lstStyle/>
           <a:p>
             <a:r>
-              <a:rPr lang="en-US" altLang="ja-JP" sz="2400" dirty="0" smtClean="0"/>
+              <a:rPr lang="en-US" altLang="ja-JP" sz="2400" dirty="0"/>
               <a:t>[</a:t>
             </a:r>
             <a:r>
-              <a:rPr lang="ja-JP" altLang="en-US" sz="2400" dirty="0" smtClean="0"/>
+              <a:rPr lang="ja-JP" altLang="en-US" sz="2400" dirty="0"/>
               <a:t>参考文献</a:t>
             </a:r>
             <a:r>
-              <a:rPr lang="en-US" altLang="ja-JP" sz="2400" dirty="0" smtClean="0"/>
+              <a:rPr lang="en-US" altLang="ja-JP" sz="2400" dirty="0"/>
               <a:t>] </a:t>
             </a:r>
             <a:r>
-              <a:rPr lang="en-US" altLang="ja-JP" sz="2400" dirty="0" err="1" smtClean="0"/>
+              <a:rPr lang="en-US" altLang="ja-JP" sz="2400" dirty="0" err="1"/>
               <a:t>Edsger</a:t>
             </a:r>
             <a:r>
-              <a:rPr lang="en-US" altLang="ja-JP" sz="2400" dirty="0" smtClean="0"/>
+              <a:rPr lang="en-US" altLang="ja-JP" sz="2400" dirty="0"/>
               <a:t> </a:t>
             </a:r>
             <a:r>
-              <a:rPr lang="en-US" altLang="ja-JP" sz="2400" dirty="0" err="1" smtClean="0"/>
+              <a:rPr lang="en-US" altLang="ja-JP" sz="2400" dirty="0" err="1"/>
               <a:t>Dijkstra</a:t>
             </a:r>
             <a:r>
-              <a:rPr lang="en-US" altLang="ja-JP" sz="2400" dirty="0" smtClean="0"/>
+              <a:rPr lang="en-US" altLang="ja-JP" sz="2400" dirty="0"/>
               <a:t>, “Go to statement considered harmful”, </a:t>
             </a:r>
             <a:r>
-              <a:rPr lang="en-US" altLang="ja-JP" sz="2400" i="1" dirty="0" smtClean="0"/>
+              <a:rPr lang="en-US" altLang="ja-JP" sz="2400" i="1" dirty="0"/>
               <a:t>Communication of the ACM</a:t>
             </a:r>
             <a:r>
-              <a:rPr lang="en-US" altLang="ja-JP" sz="2400" dirty="0" smtClean="0"/>
+              <a:rPr lang="en-US" altLang="ja-JP" sz="2400" dirty="0"/>
               <a:t>, Vol. 11, No. 3, pp. 147-148, 1968.</a:t>
             </a:r>
           </a:p>
@@ -12261,7 +12171,7 @@
           <a:lstStyle/>
           <a:p>
             <a:r>
-              <a:rPr lang="ja-JP" altLang="en-US" dirty="0" smtClean="0"/>
+              <a:rPr lang="ja-JP" altLang="en-US" dirty="0"/>
               <a:t>構造化とは</a:t>
             </a:r>
             <a:endParaRPr kumimoji="1" lang="ja-JP" altLang="en-US" dirty="0"/>
@@ -12291,10 +12201,9 @@
           <a:lstStyle/>
           <a:p>
             <a:r>
-              <a:rPr kumimoji="1" lang="ja-JP" altLang="en-US" sz="2800" dirty="0" smtClean="0"/>
+              <a:rPr kumimoji="1" lang="ja-JP" altLang="en-US" sz="2800" dirty="0"/>
               <a:t>プログラムが構造化されている</a:t>
             </a:r>
-            <a:endParaRPr kumimoji="1" lang="ja-JP" altLang="en-US" sz="2800" dirty="0"/>
           </a:p>
         </p:txBody>
       </p:sp>
@@ -12366,18 +12275,17 @@
           <a:lstStyle/>
           <a:p>
             <a:r>
-              <a:rPr kumimoji="1" lang="ja-JP" altLang="en-US" sz="2800" dirty="0" smtClean="0"/>
+              <a:rPr kumimoji="1" lang="ja-JP" altLang="en-US" sz="2800" dirty="0"/>
               <a:t>プログラムの制御フローが</a:t>
             </a:r>
             <a:r>
-              <a:rPr kumimoji="1" lang="ja-JP" altLang="en-US" sz="2800" b="1" dirty="0" smtClean="0"/>
+              <a:rPr kumimoji="1" lang="ja-JP" altLang="en-US" sz="2800" b="1" dirty="0"/>
               <a:t>プログラムテキストの構文構造</a:t>
             </a:r>
             <a:r>
-              <a:rPr kumimoji="1" lang="ja-JP" altLang="en-US" sz="2800" dirty="0" smtClean="0"/>
+              <a:rPr kumimoji="1" lang="ja-JP" altLang="en-US" sz="2800" dirty="0"/>
               <a:t>から明らか</a:t>
             </a:r>
-            <a:endParaRPr kumimoji="1" lang="ja-JP" altLang="en-US" sz="2800" dirty="0"/>
           </a:p>
         </p:txBody>
       </p:sp>
@@ -12404,18 +12312,18 @@
           <a:lstStyle/>
           <a:p>
             <a:r>
-              <a:rPr kumimoji="1" lang="ja-JP" altLang="en-US" sz="2800" dirty="0" smtClean="0"/>
+              <a:rPr kumimoji="1" lang="ja-JP" altLang="en-US" sz="2800" dirty="0"/>
               <a:t>明らかというのは、ここでは</a:t>
             </a:r>
             <a:r>
-              <a:rPr kumimoji="1" lang="en-US" altLang="ja-JP" sz="2800" dirty="0" smtClean="0"/>
+              <a:rPr kumimoji="1" lang="en-US" altLang="ja-JP" sz="2800" dirty="0"/>
               <a:t>single entry, single exit</a:t>
             </a:r>
             <a:r>
-              <a:rPr lang="ja-JP" altLang="en-US" sz="2800" dirty="0" smtClean="0"/>
+              <a:rPr lang="ja-JP" altLang="en-US" sz="2800" dirty="0"/>
               <a:t>（入口１つ、出口１つ）と定義する。</a:t>
             </a:r>
-            <a:endParaRPr kumimoji="1" lang="en-US" altLang="ja-JP" sz="2800" dirty="0" smtClean="0"/>
+            <a:endParaRPr kumimoji="1" lang="en-US" altLang="ja-JP" sz="2800" dirty="0"/>
           </a:p>
         </p:txBody>
       </p:sp>
@@ -12442,7 +12350,7 @@
           <a:lstStyle/>
           <a:p>
             <a:r>
-              <a:rPr lang="ja-JP" altLang="en-US" sz="2800" dirty="0" smtClean="0"/>
+              <a:rPr lang="ja-JP" altLang="en-US" sz="2800" dirty="0"/>
               <a:t>複合文（</a:t>
             </a:r>
             <a:r>
@@ -12458,18 +12366,18 @@
               <a:t>end</a:t>
             </a:r>
             <a:r>
-              <a:rPr lang="ja-JP" altLang="en-US" sz="2800" dirty="0" smtClean="0"/>
+              <a:rPr lang="ja-JP" altLang="en-US" sz="2800" dirty="0"/>
               <a:t>）</a:t>
             </a:r>
-            <a:endParaRPr lang="en-US" altLang="ja-JP" sz="2800" dirty="0" smtClean="0"/>
-          </a:p>
-          <a:p>
-            <a:r>
-              <a:rPr lang="ja-JP" altLang="en-US" sz="2800" dirty="0" smtClean="0"/>
+            <a:endParaRPr lang="en-US" altLang="ja-JP" sz="2800" dirty="0"/>
+          </a:p>
+          <a:p>
+            <a:r>
+              <a:rPr lang="ja-JP" altLang="en-US" sz="2800" dirty="0"/>
               <a:t>条件文（</a:t>
             </a:r>
             <a:r>
-              <a:rPr lang="en-US" altLang="ja-JP" sz="2800" b="1" dirty="0" smtClean="0"/>
+              <a:rPr lang="en-US" altLang="ja-JP" sz="2800" b="1" dirty="0"/>
               <a:t>if</a:t>
             </a:r>
             <a:r>
@@ -12501,48 +12409,47 @@
               <a:t>-</a:t>
             </a:r>
             <a:r>
-              <a:rPr lang="en-US" altLang="ja-JP" sz="2800" b="1" dirty="0" smtClean="0"/>
+              <a:rPr lang="en-US" altLang="ja-JP" sz="2800" b="1" dirty="0"/>
               <a:t>else</a:t>
             </a:r>
             <a:r>
-              <a:rPr lang="ja-JP" altLang="en-US" sz="2800" dirty="0" smtClean="0"/>
+              <a:rPr lang="ja-JP" altLang="en-US" sz="2800" dirty="0"/>
               <a:t>）</a:t>
             </a:r>
             <a:endParaRPr lang="en-US" altLang="ja-JP" sz="2800" dirty="0"/>
           </a:p>
           <a:p>
             <a:r>
-              <a:rPr kumimoji="1" lang="ja-JP" altLang="en-US" sz="2800" dirty="0" smtClean="0"/>
+              <a:rPr kumimoji="1" lang="ja-JP" altLang="en-US" sz="2800" dirty="0"/>
               <a:t>繰り返し文</a:t>
             </a:r>
             <a:r>
-              <a:rPr lang="ja-JP" altLang="en-US" sz="2800" dirty="0" smtClean="0"/>
+              <a:rPr lang="ja-JP" altLang="en-US" sz="2800" dirty="0"/>
               <a:t>（</a:t>
             </a:r>
             <a:r>
-              <a:rPr lang="en-US" altLang="ja-JP" sz="2800" b="1" dirty="0" smtClean="0"/>
+              <a:rPr lang="en-US" altLang="ja-JP" sz="2800" b="1" dirty="0"/>
               <a:t>while</a:t>
             </a:r>
             <a:r>
-              <a:rPr lang="ja-JP" altLang="en-US" sz="2800" dirty="0" smtClean="0"/>
+              <a:rPr lang="ja-JP" altLang="en-US" sz="2800" dirty="0"/>
               <a:t>）</a:t>
             </a:r>
             <a:endParaRPr lang="en-US" altLang="ja-JP" sz="2800" dirty="0"/>
           </a:p>
           <a:p>
             <a:r>
-              <a:rPr lang="ja-JP" altLang="en-US" sz="2800" dirty="0" smtClean="0"/>
+              <a:rPr lang="ja-JP" altLang="en-US" sz="2800" dirty="0"/>
               <a:t>選択文（</a:t>
             </a:r>
             <a:r>
-              <a:rPr lang="en-US" altLang="ja-JP" sz="2800" b="1" dirty="0" smtClean="0"/>
+              <a:rPr lang="en-US" altLang="ja-JP" sz="2800" b="1" dirty="0"/>
               <a:t>case</a:t>
             </a:r>
             <a:r>
-              <a:rPr lang="ja-JP" altLang="en-US" sz="2800" dirty="0" smtClean="0"/>
+              <a:rPr lang="ja-JP" altLang="en-US" sz="2800" dirty="0"/>
               <a:t>）</a:t>
             </a:r>
-            <a:endParaRPr lang="ja-JP" altLang="en-US" sz="2800" dirty="0"/>
           </a:p>
         </p:txBody>
       </p:sp>
@@ -12551,13 +12458,6 @@
   <p:clrMapOvr>
     <a:masterClrMapping/>
   </p:clrMapOvr>
-  <p:timing>
-    <p:tnLst>
-      <p:par>
-        <p:cTn xmlns:p14="http://schemas.microsoft.com/office/powerpoint/2010/main" id="1" dur="indefinite" restart="never" nodeType="tmRoot"/>
-      </p:par>
-    </p:tnLst>
-  </p:timing>
 </p:sld>
 </file>
 
@@ -12594,10 +12494,9 @@
           <a:lstStyle/>
           <a:p>
             <a:r>
-              <a:rPr kumimoji="1" lang="ja-JP" altLang="en-US" dirty="0" smtClean="0"/>
+              <a:rPr kumimoji="1" lang="ja-JP" altLang="en-US" dirty="0"/>
               <a:t>基本ケース</a:t>
             </a:r>
-            <a:endParaRPr kumimoji="1" lang="ja-JP" altLang="en-US" dirty="0"/>
           </a:p>
         </p:txBody>
       </p:sp>
@@ -12624,39 +12523,39 @@
           <a:lstStyle/>
           <a:p>
             <a:r>
-              <a:rPr kumimoji="1" lang="ja-JP" altLang="en-US" sz="2800" dirty="0" smtClean="0"/>
+              <a:rPr kumimoji="1" lang="ja-JP" altLang="en-US" sz="2800" dirty="0"/>
               <a:t>代入文は</a:t>
             </a:r>
             <a:r>
-              <a:rPr kumimoji="1" lang="en-US" altLang="ja-JP" sz="2800" dirty="0" smtClean="0"/>
+              <a:rPr kumimoji="1" lang="en-US" altLang="ja-JP" sz="2800" dirty="0"/>
               <a:t>single entry, single exit</a:t>
             </a:r>
             <a:r>
-              <a:rPr kumimoji="1" lang="ja-JP" altLang="en-US" sz="2800" dirty="0" smtClean="0"/>
+              <a:rPr kumimoji="1" lang="ja-JP" altLang="en-US" sz="2800" dirty="0"/>
               <a:t>である。</a:t>
             </a:r>
-            <a:endParaRPr kumimoji="1" lang="en-US" altLang="ja-JP" sz="2800" dirty="0" smtClean="0"/>
-          </a:p>
-          <a:p>
-            <a:r>
-              <a:rPr lang="ja-JP" altLang="en-US" sz="2800" dirty="0" smtClean="0"/>
+            <a:endParaRPr kumimoji="1" lang="en-US" altLang="ja-JP" sz="2800" dirty="0"/>
+          </a:p>
+          <a:p>
+            <a:r>
+              <a:rPr lang="ja-JP" altLang="en-US" sz="2800" dirty="0"/>
               <a:t>たとえば、</a:t>
             </a:r>
-            <a:endParaRPr lang="en-US" altLang="ja-JP" sz="2800" dirty="0" smtClean="0"/>
-          </a:p>
-          <a:p>
-            <a:r>
-              <a:rPr lang="en-US" altLang="ja-JP" sz="2800" dirty="0" smtClean="0"/>
+            <a:endParaRPr lang="en-US" altLang="ja-JP" sz="2800" dirty="0"/>
+          </a:p>
+          <a:p>
+            <a:r>
+              <a:rPr lang="en-US" altLang="ja-JP" sz="2800" dirty="0"/>
               <a:t>    x := 3</a:t>
             </a:r>
           </a:p>
           <a:p>
             <a:r>
-              <a:rPr lang="ja-JP" altLang="en-US" sz="2800" dirty="0" err="1" smtClean="0"/>
+              <a:rPr lang="ja-JP" altLang="en-US" sz="2800" dirty="0" err="1"/>
               <a:t>のような</a:t>
             </a:r>
             <a:r>
-              <a:rPr lang="ja-JP" altLang="en-US" sz="2800" dirty="0" smtClean="0"/>
+              <a:rPr lang="ja-JP" altLang="en-US" sz="2800" dirty="0"/>
               <a:t>代入文の制御フローは、以下のように図示できる。</a:t>
             </a:r>
             <a:endParaRPr kumimoji="1" lang="ja-JP" altLang="en-US" sz="2800" dirty="0"/>
@@ -12686,7 +12585,7 @@
           <a:lstStyle/>
           <a:p>
             <a:r>
-              <a:rPr lang="en-US" altLang="ja-JP" sz="2800" dirty="0" smtClean="0"/>
+              <a:rPr lang="en-US" altLang="ja-JP" sz="2800" dirty="0"/>
               <a:t> x := 3</a:t>
             </a:r>
           </a:p>
@@ -12788,11 +12687,11 @@
           <a:lstStyle/>
           <a:p>
             <a:r>
-              <a:rPr lang="ja-JP" altLang="en-US" sz="2800" dirty="0" smtClean="0"/>
+              <a:rPr lang="ja-JP" altLang="en-US" sz="2800" dirty="0"/>
               <a:t>入口</a:t>
             </a:r>
             <a:r>
-              <a:rPr lang="en-US" altLang="ja-JP" sz="2800" dirty="0" smtClean="0"/>
+              <a:rPr lang="en-US" altLang="ja-JP" sz="2800" dirty="0"/>
               <a:t>(entry point)</a:t>
             </a:r>
           </a:p>
@@ -12821,11 +12720,11 @@
           <a:lstStyle/>
           <a:p>
             <a:r>
-              <a:rPr lang="ja-JP" altLang="en-US" sz="2800" dirty="0" smtClean="0"/>
+              <a:rPr lang="ja-JP" altLang="en-US" sz="2800" dirty="0"/>
               <a:t>出口</a:t>
             </a:r>
             <a:r>
-              <a:rPr lang="en-US" altLang="ja-JP" sz="2800" dirty="0" smtClean="0"/>
+              <a:rPr lang="en-US" altLang="ja-JP" sz="2800" dirty="0"/>
               <a:t>(exit point)</a:t>
             </a:r>
           </a:p>
@@ -12880,13 +12779,6 @@
   <p:clrMapOvr>
     <a:masterClrMapping/>
   </p:clrMapOvr>
-  <p:timing>
-    <p:tnLst>
-      <p:par>
-        <p:cTn xmlns:p14="http://schemas.microsoft.com/office/powerpoint/2010/main" id="1" dur="indefinite" restart="never" nodeType="tmRoot"/>
-      </p:par>
-    </p:tnLst>
-  </p:timing>
 </p:sld>
 </file>
 
@@ -12925,10 +12817,9 @@
           <a:lstStyle/>
           <a:p>
             <a:r>
-              <a:rPr kumimoji="1" lang="ja-JP" altLang="en-US" dirty="0" smtClean="0"/>
+              <a:rPr kumimoji="1" lang="ja-JP" altLang="en-US" dirty="0"/>
               <a:t>文の列（逐次文）</a:t>
             </a:r>
-            <a:endParaRPr kumimoji="1" lang="ja-JP" altLang="en-US" dirty="0"/>
           </a:p>
         </p:txBody>
       </p:sp>
@@ -12955,48 +12846,48 @@
           <a:lstStyle/>
           <a:p>
             <a:r>
-              <a:rPr lang="en-US" altLang="ja-JP" sz="2800" dirty="0" smtClean="0"/>
+              <a:rPr lang="en-US" altLang="ja-JP" sz="2800" dirty="0"/>
               <a:t>Pascal</a:t>
             </a:r>
             <a:r>
-              <a:rPr lang="ja-JP" altLang="en-US" sz="2800" dirty="0" smtClean="0"/>
+              <a:rPr lang="ja-JP" altLang="en-US" sz="2800" dirty="0"/>
               <a:t>などでは、文の列（逐次文）は文</a:t>
             </a:r>
             <a:r>
-              <a:rPr lang="en-US" altLang="ja-JP" sz="2800" dirty="0" smtClean="0"/>
+              <a:rPr lang="en-US" altLang="ja-JP" sz="2800" dirty="0"/>
               <a:t>s1, s2, …, </a:t>
             </a:r>
             <a:r>
-              <a:rPr lang="en-US" altLang="ja-JP" sz="2800" dirty="0" err="1" smtClean="0"/>
+              <a:rPr lang="en-US" altLang="ja-JP" sz="2800" dirty="0" err="1"/>
               <a:t>sn</a:t>
             </a:r>
             <a:r>
-              <a:rPr lang="ja-JP" altLang="en-US" sz="2800" dirty="0" smtClean="0"/>
+              <a:rPr lang="ja-JP" altLang="en-US" sz="2800" dirty="0"/>
               <a:t>をセミコロンで区切って表す。</a:t>
             </a:r>
-            <a:endParaRPr lang="en-US" altLang="ja-JP" sz="2800" dirty="0" smtClean="0"/>
-          </a:p>
-          <a:p>
-            <a:r>
-              <a:rPr lang="en-US" altLang="ja-JP" sz="2800" dirty="0" smtClean="0"/>
+            <a:endParaRPr lang="en-US" altLang="ja-JP" sz="2800" dirty="0"/>
+          </a:p>
+          <a:p>
+            <a:r>
+              <a:rPr lang="en-US" altLang="ja-JP" sz="2800" dirty="0"/>
               <a:t>    s1; s2; …; </a:t>
             </a:r>
             <a:r>
-              <a:rPr lang="en-US" altLang="ja-JP" sz="2800" dirty="0" err="1" smtClean="0"/>
+              <a:rPr lang="en-US" altLang="ja-JP" sz="2800" dirty="0" err="1"/>
               <a:t>sn</a:t>
             </a:r>
           </a:p>
           <a:p>
             <a:r>
-              <a:rPr lang="ja-JP" altLang="en-US" sz="2800" dirty="0" smtClean="0"/>
+              <a:rPr lang="ja-JP" altLang="en-US" sz="2800" dirty="0"/>
               <a:t>（</a:t>
             </a:r>
             <a:r>
-              <a:rPr lang="en-US" altLang="ja-JP" sz="2800" dirty="0" smtClean="0"/>
+              <a:rPr lang="en-US" altLang="ja-JP" sz="2800" dirty="0"/>
               <a:t>C</a:t>
             </a:r>
             <a:r>
-              <a:rPr lang="ja-JP" altLang="en-US" sz="2800" dirty="0" smtClean="0"/>
+              <a:rPr lang="ja-JP" altLang="en-US" sz="2800" dirty="0"/>
               <a:t>では文を並べるだけでよい。）</a:t>
             </a:r>
           </a:p>
@@ -13024,23 +12915,23 @@
           <a:lstStyle/>
           <a:p>
             <a:r>
-              <a:rPr lang="ja-JP" altLang="en-US" sz="2800" dirty="0" smtClean="0"/>
+              <a:rPr lang="ja-JP" altLang="en-US" sz="2800" dirty="0"/>
               <a:t>（例）</a:t>
             </a:r>
             <a:r>
-              <a:rPr lang="en-US" altLang="ja-JP" sz="2800" dirty="0" smtClean="0"/>
+              <a:rPr lang="en-US" altLang="ja-JP" sz="2800" dirty="0"/>
               <a:t> temp := x;  </a:t>
             </a:r>
           </a:p>
           <a:p>
             <a:r>
-              <a:rPr lang="en-US" altLang="ja-JP" sz="2800" dirty="0" smtClean="0"/>
+              <a:rPr lang="en-US" altLang="ja-JP" sz="2800" dirty="0"/>
               <a:t>          x := y;  </a:t>
             </a:r>
           </a:p>
           <a:p>
             <a:r>
-              <a:rPr lang="en-US" altLang="ja-JP" sz="2800" dirty="0" smtClean="0"/>
+              <a:rPr lang="en-US" altLang="ja-JP" sz="2800" dirty="0"/>
               <a:t>          y := temp</a:t>
             </a:r>
           </a:p>
@@ -13051,13 +12942,6 @@
   <p:clrMapOvr>
     <a:masterClrMapping/>
   </p:clrMapOvr>
-  <p:timing>
-    <p:tnLst>
-      <p:par>
-        <p:cTn xmlns:p14="http://schemas.microsoft.com/office/powerpoint/2010/main" id="1" dur="indefinite" restart="never" nodeType="tmRoot"/>
-      </p:par>
-    </p:tnLst>
-  </p:timing>
 </p:sld>
 </file>
 
@@ -13101,7 +12985,7 @@
           <a:lstStyle/>
           <a:p>
             <a:r>
-              <a:rPr lang="ja-JP" altLang="en-US" dirty="0" smtClean="0"/>
+              <a:rPr lang="ja-JP" altLang="en-US" dirty="0"/>
               <a:t>逐次文のグループ化（複合文、ブロック）</a:t>
             </a:r>
             <a:endParaRPr kumimoji="1" lang="ja-JP" altLang="en-US" dirty="0"/>
@@ -13130,161 +13014,161 @@
           <a:lstStyle/>
           <a:p>
             <a:r>
-              <a:rPr lang="ja-JP" altLang="en-US" sz="2800" dirty="0" smtClean="0"/>
+              <a:rPr lang="ja-JP" altLang="en-US" sz="2800" dirty="0"/>
               <a:t>逐次文は、</a:t>
             </a:r>
             <a:r>
-              <a:rPr lang="en-US" altLang="ja-JP" sz="2800" dirty="0" smtClean="0"/>
+              <a:rPr lang="en-US" altLang="ja-JP" sz="2800" dirty="0"/>
               <a:t>ALGOL</a:t>
             </a:r>
             <a:r>
-              <a:rPr lang="ja-JP" altLang="en-US" sz="2800" dirty="0" smtClean="0"/>
+              <a:rPr lang="ja-JP" altLang="en-US" sz="2800" dirty="0"/>
               <a:t>や</a:t>
             </a:r>
             <a:r>
-              <a:rPr lang="en-US" altLang="ja-JP" sz="2800" dirty="0" smtClean="0"/>
+              <a:rPr lang="en-US" altLang="ja-JP" sz="2800" dirty="0"/>
               <a:t>Pascal</a:t>
             </a:r>
             <a:r>
-              <a:rPr lang="ja-JP" altLang="en-US" sz="2800" dirty="0" smtClean="0"/>
+              <a:rPr lang="ja-JP" altLang="en-US" sz="2800" dirty="0"/>
               <a:t>等では</a:t>
             </a:r>
             <a:r>
-              <a:rPr lang="en-US" altLang="ja-JP" sz="2800" b="1" dirty="0" smtClean="0"/>
+              <a:rPr lang="en-US" altLang="ja-JP" sz="2800" b="1" dirty="0"/>
               <a:t>begin</a:t>
             </a:r>
             <a:r>
-              <a:rPr lang="en-US" altLang="ja-JP" sz="2800" dirty="0" smtClean="0"/>
+              <a:rPr lang="en-US" altLang="ja-JP" sz="2800" dirty="0"/>
               <a:t>, </a:t>
             </a:r>
             <a:r>
-              <a:rPr lang="en-US" altLang="ja-JP" sz="2800" b="1" dirty="0" smtClean="0"/>
+              <a:rPr lang="en-US" altLang="ja-JP" sz="2800" b="1" dirty="0"/>
               <a:t>end </a:t>
             </a:r>
             <a:r>
-              <a:rPr lang="en-US" altLang="ja-JP" sz="2800" dirty="0" smtClean="0"/>
+              <a:rPr lang="en-US" altLang="ja-JP" sz="2800" dirty="0"/>
               <a:t>(C</a:t>
             </a:r>
             <a:r>
-              <a:rPr lang="ja-JP" altLang="en-US" sz="2800" dirty="0" smtClean="0"/>
+              <a:rPr lang="ja-JP" altLang="en-US" sz="2800" dirty="0"/>
               <a:t>言語では </a:t>
             </a:r>
             <a:r>
-              <a:rPr lang="en-US" altLang="ja-JP" sz="2800" dirty="0" smtClean="0"/>
+              <a:rPr lang="en-US" altLang="ja-JP" sz="2800" dirty="0"/>
               <a:t>{ </a:t>
             </a:r>
             <a:r>
-              <a:rPr lang="ja-JP" altLang="en-US" sz="2800" dirty="0" smtClean="0"/>
+              <a:rPr lang="ja-JP" altLang="en-US" sz="2800" dirty="0"/>
               <a:t>と </a:t>
             </a:r>
             <a:r>
-              <a:rPr lang="en-US" altLang="ja-JP" sz="2800" dirty="0" smtClean="0"/>
+              <a:rPr lang="en-US" altLang="ja-JP" sz="2800" dirty="0"/>
               <a:t>} ) </a:t>
             </a:r>
             <a:r>
-              <a:rPr lang="ja-JP" altLang="en-US" sz="2800" dirty="0" smtClean="0"/>
+              <a:rPr lang="ja-JP" altLang="en-US" sz="2800" dirty="0"/>
               <a:t>で囲むことにより、</a:t>
             </a:r>
             <a:r>
-              <a:rPr lang="en-US" altLang="ja-JP" sz="2800" dirty="0" smtClean="0"/>
+              <a:rPr lang="en-US" altLang="ja-JP" sz="2800" dirty="0"/>
               <a:t>1</a:t>
             </a:r>
             <a:r>
-              <a:rPr lang="ja-JP" altLang="en-US" sz="2800" dirty="0" err="1" smtClean="0"/>
+              <a:rPr lang="ja-JP" altLang="en-US" sz="2800" dirty="0" err="1"/>
               <a:t>つの</a:t>
             </a:r>
             <a:r>
-              <a:rPr lang="ja-JP" altLang="en-US" sz="2800" dirty="0" smtClean="0"/>
+              <a:rPr lang="ja-JP" altLang="en-US" sz="2800" dirty="0"/>
               <a:t>複合文にまとめることができる。</a:t>
             </a:r>
-            <a:endParaRPr lang="en-US" altLang="ja-JP" sz="2800" dirty="0" smtClean="0"/>
-          </a:p>
-          <a:p>
-            <a:r>
-              <a:rPr lang="ja-JP" altLang="en-US" sz="2800" dirty="0" smtClean="0"/>
+            <a:endParaRPr lang="en-US" altLang="ja-JP" sz="2800" dirty="0"/>
+          </a:p>
+          <a:p>
+            <a:r>
+              <a:rPr lang="ja-JP" altLang="en-US" sz="2800" dirty="0"/>
               <a:t>（例）</a:t>
             </a:r>
             <a:r>
-              <a:rPr lang="en-US" altLang="ja-JP" sz="2800" dirty="0" smtClean="0"/>
+              <a:rPr lang="en-US" altLang="ja-JP" sz="2800" dirty="0"/>
               <a:t> </a:t>
             </a:r>
             <a:r>
-              <a:rPr lang="en-US" altLang="ja-JP" sz="2800" b="1" dirty="0" smtClean="0"/>
+              <a:rPr lang="en-US" altLang="ja-JP" sz="2800" b="1" dirty="0"/>
               <a:t>begin</a:t>
             </a:r>
             <a:r>
-              <a:rPr lang="en-US" altLang="ja-JP" sz="2800" dirty="0" smtClean="0"/>
+              <a:rPr lang="en-US" altLang="ja-JP" sz="2800" dirty="0"/>
               <a:t> temp := x;  x := y;  y := temp </a:t>
             </a:r>
             <a:r>
-              <a:rPr lang="en-US" altLang="ja-JP" sz="2800" b="1" dirty="0" smtClean="0"/>
+              <a:rPr lang="en-US" altLang="ja-JP" sz="2800" b="1" dirty="0"/>
               <a:t>end</a:t>
             </a:r>
-            <a:endParaRPr lang="en-US" altLang="ja-JP" sz="2800" dirty="0" smtClean="0"/>
-          </a:p>
-          <a:p>
-            <a:r>
-              <a:rPr lang="ja-JP" altLang="en-US" sz="2800" dirty="0" smtClean="0"/>
+            <a:endParaRPr lang="en-US" altLang="ja-JP" sz="2800" dirty="0"/>
+          </a:p>
+          <a:p>
+            <a:r>
+              <a:rPr lang="ja-JP" altLang="en-US" sz="2800" dirty="0"/>
               <a:t>複合文は、文が書けるところならどこにでも書くことができる。</a:t>
             </a:r>
             <a:r>
-              <a:rPr lang="en-US" altLang="ja-JP" sz="2800" b="1" dirty="0" smtClean="0"/>
+              <a:rPr lang="en-US" altLang="ja-JP" sz="2800" b="1" dirty="0"/>
               <a:t>begin</a:t>
             </a:r>
             <a:r>
-              <a:rPr lang="en-US" altLang="ja-JP" sz="2800" dirty="0" smtClean="0"/>
+              <a:rPr lang="en-US" altLang="ja-JP" sz="2800" dirty="0"/>
               <a:t>, </a:t>
             </a:r>
             <a:r>
-              <a:rPr lang="en-US" altLang="ja-JP" sz="2800" b="1" dirty="0" smtClean="0"/>
+              <a:rPr lang="en-US" altLang="ja-JP" sz="2800" b="1" dirty="0"/>
               <a:t>end</a:t>
             </a:r>
             <a:r>
-              <a:rPr lang="ja-JP" altLang="en-US" sz="2800" dirty="0" smtClean="0"/>
+              <a:rPr lang="ja-JP" altLang="en-US" sz="2800" dirty="0"/>
               <a:t>で囲む文は</a:t>
             </a:r>
             <a:r>
-              <a:rPr lang="en-US" altLang="ja-JP" sz="2800" dirty="0" smtClean="0"/>
+              <a:rPr lang="en-US" altLang="ja-JP" sz="2800" dirty="0"/>
               <a:t>0</a:t>
             </a:r>
             <a:r>
-              <a:rPr lang="ja-JP" altLang="en-US" sz="2800" dirty="0" smtClean="0"/>
+              <a:rPr lang="ja-JP" altLang="en-US" sz="2800" dirty="0"/>
               <a:t>個でもよく、</a:t>
             </a:r>
-            <a:endParaRPr lang="en-US" altLang="ja-JP" sz="2800" dirty="0" smtClean="0"/>
-          </a:p>
-          <a:p>
-            <a:r>
-              <a:rPr lang="en-US" altLang="ja-JP" sz="2800" dirty="0" smtClean="0"/>
+            <a:endParaRPr lang="en-US" altLang="ja-JP" sz="2800" dirty="0"/>
+          </a:p>
+          <a:p>
+            <a:r>
+              <a:rPr lang="en-US" altLang="ja-JP" sz="2800" dirty="0"/>
               <a:t>    </a:t>
             </a:r>
             <a:r>
-              <a:rPr lang="en-US" altLang="ja-JP" sz="2800" b="1" dirty="0" smtClean="0"/>
+              <a:rPr lang="en-US" altLang="ja-JP" sz="2800" b="1" dirty="0"/>
               <a:t>begin end</a:t>
             </a:r>
           </a:p>
           <a:p>
             <a:r>
-              <a:rPr lang="ja-JP" altLang="en-US" sz="2800" dirty="0" smtClean="0"/>
+              <a:rPr lang="ja-JP" altLang="en-US" sz="2800" dirty="0"/>
               <a:t>も複合文である。複合文は、それを構成する各文が</a:t>
             </a:r>
             <a:r>
-              <a:rPr lang="en-US" altLang="ja-JP" sz="2800" dirty="0" smtClean="0"/>
+              <a:rPr lang="en-US" altLang="ja-JP" sz="2800" dirty="0"/>
               <a:t>single entry, single exit</a:t>
             </a:r>
             <a:r>
-              <a:rPr lang="ja-JP" altLang="en-US" sz="2800" dirty="0" smtClean="0"/>
+              <a:rPr lang="ja-JP" altLang="en-US" sz="2800" dirty="0"/>
               <a:t>なら</a:t>
             </a:r>
             <a:r>
-              <a:rPr lang="en-US" altLang="ja-JP" sz="2800" dirty="0" smtClean="0"/>
+              <a:rPr lang="en-US" altLang="ja-JP" sz="2800" dirty="0"/>
               <a:t>single entry, single exit</a:t>
             </a:r>
             <a:r>
-              <a:rPr lang="ja-JP" altLang="en-US" sz="2800" dirty="0" smtClean="0"/>
+              <a:rPr lang="ja-JP" altLang="en-US" sz="2800" dirty="0"/>
               <a:t>である。</a:t>
             </a:r>
-            <a:endParaRPr lang="en-US" altLang="ja-JP" sz="2800" dirty="0" smtClean="0"/>
+            <a:endParaRPr lang="en-US" altLang="ja-JP" sz="2800" dirty="0"/>
           </a:p>
         </p:txBody>
       </p:sp>
@@ -13311,7 +13195,7 @@
           <a:lstStyle/>
           <a:p>
             <a:r>
-              <a:rPr lang="en-US" altLang="ja-JP" sz="2400" dirty="0" smtClean="0"/>
+              <a:rPr lang="en-US" altLang="ja-JP" sz="2400" dirty="0"/>
               <a:t>  temp := x </a:t>
             </a:r>
           </a:p>
@@ -13413,7 +13297,7 @@
           <a:lstStyle/>
           <a:p>
             <a:r>
-              <a:rPr lang="en-US" altLang="ja-JP" sz="2400" dirty="0" smtClean="0"/>
+              <a:rPr lang="en-US" altLang="ja-JP" sz="2400" dirty="0"/>
               <a:t>Entry</a:t>
             </a:r>
           </a:p>
@@ -13442,7 +13326,7 @@
           <a:lstStyle/>
           <a:p>
             <a:r>
-              <a:rPr lang="en-US" altLang="ja-JP" sz="2400" dirty="0" smtClean="0"/>
+              <a:rPr lang="en-US" altLang="ja-JP" sz="2400" dirty="0"/>
               <a:t>Exit</a:t>
             </a:r>
           </a:p>
@@ -13471,7 +13355,7 @@
           <a:lstStyle/>
           <a:p>
             <a:r>
-              <a:rPr lang="en-US" altLang="ja-JP" sz="2400" dirty="0" smtClean="0"/>
+              <a:rPr lang="en-US" altLang="ja-JP" sz="2400" dirty="0"/>
               <a:t>  x := y </a:t>
             </a:r>
           </a:p>
@@ -13536,7 +13420,7 @@
           <a:lstStyle/>
           <a:p>
             <a:r>
-              <a:rPr lang="en-US" altLang="ja-JP" sz="2400" dirty="0" smtClean="0"/>
+              <a:rPr lang="en-US" altLang="ja-JP" sz="2400" dirty="0"/>
               <a:t>  y := temp </a:t>
             </a:r>
           </a:p>
@@ -13762,13 +13646,6 @@
   <p:clrMapOvr>
     <a:masterClrMapping/>
   </p:clrMapOvr>
-  <p:timing>
-    <p:tnLst>
-      <p:par>
-        <p:cTn xmlns:p14="http://schemas.microsoft.com/office/powerpoint/2010/main" id="1" dur="indefinite" restart="never" nodeType="tmRoot"/>
-      </p:par>
-    </p:tnLst>
-  </p:timing>
 </p:sld>
 </file>
 
@@ -13805,18 +13682,17 @@
           <a:lstStyle/>
           <a:p>
             <a:r>
-              <a:rPr kumimoji="1" lang="ja-JP" altLang="en-US" dirty="0" smtClean="0"/>
+              <a:rPr kumimoji="1" lang="ja-JP" altLang="en-US" dirty="0"/>
               <a:t>条件文（</a:t>
             </a:r>
             <a:r>
-              <a:rPr kumimoji="1" lang="en-US" altLang="ja-JP" dirty="0" smtClean="0"/>
+              <a:rPr kumimoji="1" lang="en-US" altLang="ja-JP" dirty="0"/>
               <a:t>conditional statements</a:t>
             </a:r>
             <a:r>
-              <a:rPr kumimoji="1" lang="ja-JP" altLang="en-US" dirty="0" smtClean="0"/>
+              <a:rPr kumimoji="1" lang="ja-JP" altLang="en-US" dirty="0"/>
               <a:t>）</a:t>
             </a:r>
-            <a:endParaRPr kumimoji="1" lang="ja-JP" altLang="en-US" dirty="0"/>
           </a:p>
         </p:txBody>
       </p:sp>
@@ -13843,31 +13719,27 @@
           <a:lstStyle/>
           <a:p>
             <a:r>
-              <a:rPr lang="ja-JP" altLang="en-US" sz="2800" dirty="0" smtClean="0"/>
+              <a:rPr lang="ja-JP" altLang="en-US" sz="2800" dirty="0"/>
               <a:t>条件</a:t>
             </a:r>
             <a:r>
-              <a:rPr kumimoji="1" lang="ja-JP" altLang="en-US" sz="2800" dirty="0" smtClean="0"/>
+              <a:rPr kumimoji="1" lang="ja-JP" altLang="en-US" sz="2800" dirty="0"/>
               <a:t>文は</a:t>
             </a:r>
             <a:r>
-              <a:rPr kumimoji="1" lang="en-US" altLang="ja-JP" sz="2800" dirty="0" smtClean="0"/>
+              <a:rPr kumimoji="1" lang="en-US" altLang="ja-JP" sz="2800" dirty="0"/>
               <a:t>Pascal</a:t>
             </a:r>
             <a:r>
-              <a:rPr kumimoji="1" lang="ja-JP" altLang="en-US" sz="2800" dirty="0" smtClean="0"/>
+              <a:rPr kumimoji="1" lang="ja-JP" altLang="en-US" sz="2800" dirty="0"/>
               <a:t>等では以下の形で書かれる。</a:t>
             </a:r>
-            <a:endParaRPr kumimoji="1" lang="en-US" altLang="ja-JP" sz="2800" dirty="0" smtClean="0"/>
-          </a:p>
-          <a:p>
-            <a:r>
-              <a:rPr lang="en-US" altLang="ja-JP" sz="2800" b="1" dirty="0" smtClean="0"/>
-              <a:t>     </a:t>
-            </a:r>
+            <a:endParaRPr kumimoji="1" lang="en-US" altLang="ja-JP" sz="2800" dirty="0"/>
+          </a:p>
+          <a:p>
             <a:r>
               <a:rPr lang="en-US" altLang="ja-JP" sz="2800" b="1" dirty="0"/>
-              <a:t>if </a:t>
+              <a:t>     if </a:t>
             </a:r>
             <a:r>
               <a:rPr lang="en-US" altLang="ja-JP" sz="2800" i="1" dirty="0"/>
@@ -13944,52 +13816,52 @@
               <a:t> </a:t>
             </a:r>
             <a:r>
-              <a:rPr lang="en-US" altLang="ja-JP" sz="2800" i="1" dirty="0" smtClean="0"/>
+              <a:rPr lang="en-US" altLang="ja-JP" sz="2800" i="1" dirty="0"/>
               <a:t>S</a:t>
             </a:r>
           </a:p>
           <a:p>
             <a:r>
-              <a:rPr kumimoji="1" lang="ja-JP" altLang="en-US" sz="2800" dirty="0" smtClean="0"/>
+              <a:rPr kumimoji="1" lang="ja-JP" altLang="en-US" sz="2800" dirty="0"/>
               <a:t>（</a:t>
             </a:r>
             <a:r>
-              <a:rPr kumimoji="1" lang="en-US" altLang="ja-JP" sz="2800" i="1" dirty="0" smtClean="0"/>
+              <a:rPr kumimoji="1" lang="en-US" altLang="ja-JP" sz="2800" i="1" dirty="0"/>
               <a:t>E</a:t>
             </a:r>
             <a:r>
-              <a:rPr kumimoji="1" lang="ja-JP" altLang="en-US" sz="2800" dirty="0" smtClean="0"/>
+              <a:rPr kumimoji="1" lang="ja-JP" altLang="en-US" sz="2800" dirty="0"/>
               <a:t>は式、</a:t>
             </a:r>
             <a:r>
-              <a:rPr kumimoji="1" lang="en-US" altLang="ja-JP" sz="2800" i="1" dirty="0" smtClean="0"/>
+              <a:rPr kumimoji="1" lang="en-US" altLang="ja-JP" sz="2800" i="1" dirty="0"/>
               <a:t>S</a:t>
             </a:r>
             <a:r>
-              <a:rPr lang="en-US" altLang="ja-JP" sz="2800" i="1" dirty="0" smtClean="0"/>
+              <a:rPr lang="en-US" altLang="ja-JP" sz="2800" i="1" dirty="0"/>
               <a:t>, S</a:t>
             </a:r>
             <a:r>
-              <a:rPr lang="en-US" altLang="ja-JP" sz="2800" baseline="-25000" dirty="0" smtClean="0"/>
+              <a:rPr lang="en-US" altLang="ja-JP" sz="2800" baseline="-25000" dirty="0"/>
               <a:t>1</a:t>
             </a:r>
             <a:r>
-              <a:rPr lang="en-US" altLang="ja-JP" sz="2800" dirty="0" smtClean="0"/>
+              <a:rPr lang="en-US" altLang="ja-JP" sz="2800" dirty="0"/>
               <a:t>, </a:t>
             </a:r>
             <a:r>
-              <a:rPr lang="en-US" altLang="ja-JP" sz="2800" i="1" dirty="0" smtClean="0"/>
+              <a:rPr lang="en-US" altLang="ja-JP" sz="2800" i="1" dirty="0"/>
               <a:t>S</a:t>
             </a:r>
             <a:r>
-              <a:rPr lang="en-US" altLang="ja-JP" sz="2800" baseline="-25000" dirty="0" smtClean="0"/>
+              <a:rPr lang="en-US" altLang="ja-JP" sz="2800" baseline="-25000" dirty="0"/>
               <a:t>2</a:t>
             </a:r>
             <a:r>
-              <a:rPr kumimoji="1" lang="ja-JP" altLang="en-US" sz="2800" dirty="0" smtClean="0"/>
+              <a:rPr kumimoji="1" lang="ja-JP" altLang="en-US" sz="2800" dirty="0"/>
               <a:t>は文を表す。）</a:t>
             </a:r>
-            <a:endParaRPr kumimoji="1" lang="en-US" altLang="ja-JP" sz="2800" dirty="0" smtClean="0"/>
+            <a:endParaRPr kumimoji="1" lang="en-US" altLang="ja-JP" sz="2800" dirty="0"/>
           </a:p>
         </p:txBody>
       </p:sp>
@@ -14016,59 +13888,59 @@
           <a:lstStyle/>
           <a:p>
             <a:r>
-              <a:rPr kumimoji="1" lang="ja-JP" altLang="en-US" sz="2800" dirty="0" smtClean="0"/>
+              <a:rPr kumimoji="1" lang="ja-JP" altLang="en-US" sz="2800" dirty="0"/>
               <a:t>（例） </a:t>
             </a:r>
             <a:r>
-              <a:rPr kumimoji="1" lang="en-US" altLang="ja-JP" sz="2800" b="1" dirty="0" smtClean="0"/>
+              <a:rPr kumimoji="1" lang="en-US" altLang="ja-JP" sz="2800" b="1" dirty="0"/>
               <a:t>if</a:t>
             </a:r>
             <a:r>
-              <a:rPr kumimoji="1" lang="en-US" altLang="ja-JP" sz="2800" dirty="0" smtClean="0"/>
+              <a:rPr kumimoji="1" lang="en-US" altLang="ja-JP" sz="2800" dirty="0"/>
               <a:t> x=0 </a:t>
             </a:r>
             <a:r>
-              <a:rPr kumimoji="1" lang="en-US" altLang="ja-JP" sz="2800" b="1" dirty="0" smtClean="0"/>
+              <a:rPr kumimoji="1" lang="en-US" altLang="ja-JP" sz="2800" b="1" dirty="0"/>
               <a:t>then</a:t>
             </a:r>
             <a:r>
-              <a:rPr kumimoji="1" lang="en-US" altLang="ja-JP" sz="2800" dirty="0" smtClean="0"/>
+              <a:rPr kumimoji="1" lang="en-US" altLang="ja-JP" sz="2800" dirty="0"/>
               <a:t> </a:t>
             </a:r>
           </a:p>
           <a:p>
             <a:r>
-              <a:rPr lang="en-US" altLang="ja-JP" sz="2800" dirty="0" smtClean="0"/>
+              <a:rPr lang="en-US" altLang="ja-JP" sz="2800" dirty="0"/>
               <a:t>              </a:t>
             </a:r>
             <a:r>
-              <a:rPr lang="en-US" altLang="ja-JP" sz="2800" b="1" dirty="0" smtClean="0"/>
+              <a:rPr lang="en-US" altLang="ja-JP" sz="2800" b="1" dirty="0"/>
               <a:t>begin</a:t>
             </a:r>
             <a:r>
-              <a:rPr lang="en-US" altLang="ja-JP" sz="2800" dirty="0" smtClean="0"/>
+              <a:rPr lang="en-US" altLang="ja-JP" sz="2800" dirty="0"/>
               <a:t> </a:t>
             </a:r>
             <a:r>
-              <a:rPr kumimoji="1" lang="en-US" altLang="ja-JP" sz="2800" dirty="0" smtClean="0"/>
+              <a:rPr kumimoji="1" lang="en-US" altLang="ja-JP" sz="2800" dirty="0"/>
               <a:t>x:=1; y:=3 </a:t>
             </a:r>
             <a:r>
-              <a:rPr kumimoji="1" lang="en-US" altLang="ja-JP" sz="2800" b="1" dirty="0" smtClean="0"/>
+              <a:rPr kumimoji="1" lang="en-US" altLang="ja-JP" sz="2800" b="1" dirty="0"/>
               <a:t>end</a:t>
             </a:r>
           </a:p>
           <a:p>
             <a:r>
-              <a:rPr lang="en-US" altLang="ja-JP" sz="2800" b="1" dirty="0" smtClean="0"/>
+              <a:rPr lang="en-US" altLang="ja-JP" sz="2800" b="1" dirty="0"/>
               <a:t>          </a:t>
             </a:r>
             <a:r>
-              <a:rPr kumimoji="1" lang="en-US" altLang="ja-JP" sz="2800" b="1" dirty="0" smtClean="0"/>
+              <a:rPr kumimoji="1" lang="en-US" altLang="ja-JP" sz="2800" b="1" dirty="0"/>
               <a:t>else</a:t>
             </a:r>
             <a:r>
-              <a:rPr kumimoji="1" lang="en-US" altLang="ja-JP" sz="2800" dirty="0" smtClean="0"/>
+              <a:rPr kumimoji="1" lang="en-US" altLang="ja-JP" sz="2800" dirty="0"/>
               <a:t> x:=2</a:t>
             </a:r>
             <a:endParaRPr kumimoji="1" lang="ja-JP" altLang="en-US" sz="2800" dirty="0"/>
@@ -14098,15 +13970,15 @@
           <a:lstStyle/>
           <a:p>
             <a:r>
-              <a:rPr kumimoji="1" lang="ja-JP" altLang="en-US" sz="2800" dirty="0" smtClean="0"/>
+              <a:rPr kumimoji="1" lang="ja-JP" altLang="en-US" sz="2800" dirty="0"/>
               <a:t>条件文</a:t>
             </a:r>
             <a:r>
-              <a:rPr kumimoji="1" lang="en-US" altLang="ja-JP" sz="2800" dirty="0" smtClean="0"/>
+              <a:rPr kumimoji="1" lang="en-US" altLang="ja-JP" sz="2800" dirty="0"/>
               <a:t> </a:t>
             </a:r>
             <a:r>
-              <a:rPr lang="en-US" altLang="ja-JP" sz="2800" b="1" dirty="0" smtClean="0"/>
+              <a:rPr lang="en-US" altLang="ja-JP" sz="2800" b="1" dirty="0"/>
               <a:t>if </a:t>
             </a:r>
             <a:r>
@@ -14146,58 +14018,58 @@
               <a:t> </a:t>
             </a:r>
             <a:r>
-              <a:rPr lang="en-US" altLang="ja-JP" sz="2800" i="1" dirty="0" smtClean="0"/>
+              <a:rPr lang="en-US" altLang="ja-JP" sz="2800" i="1" dirty="0"/>
               <a:t>S</a:t>
             </a:r>
             <a:r>
-              <a:rPr lang="en-US" altLang="ja-JP" sz="2800" baseline="-25000" dirty="0" smtClean="0"/>
+              <a:rPr lang="en-US" altLang="ja-JP" sz="2800" baseline="-25000" dirty="0"/>
               <a:t>2 </a:t>
             </a:r>
             <a:r>
-              <a:rPr kumimoji="1" lang="ja-JP" altLang="en-US" sz="2800" dirty="0" smtClean="0"/>
+              <a:rPr kumimoji="1" lang="ja-JP" altLang="en-US" sz="2800" dirty="0"/>
               <a:t>は、</a:t>
             </a:r>
             <a:r>
-              <a:rPr lang="en-US" altLang="ja-JP" sz="2800" i="1" dirty="0" smtClean="0"/>
+              <a:rPr lang="en-US" altLang="ja-JP" sz="2800" i="1" dirty="0"/>
               <a:t>S</a:t>
             </a:r>
             <a:r>
-              <a:rPr lang="en-US" altLang="ja-JP" sz="2800" baseline="-25000" dirty="0" smtClean="0"/>
+              <a:rPr lang="en-US" altLang="ja-JP" sz="2800" baseline="-25000" dirty="0"/>
               <a:t>1</a:t>
             </a:r>
             <a:r>
-              <a:rPr lang="ja-JP" altLang="en-US" sz="2800" dirty="0" smtClean="0"/>
+              <a:rPr lang="ja-JP" altLang="en-US" sz="2800" dirty="0"/>
               <a:t>と</a:t>
             </a:r>
             <a:r>
-              <a:rPr lang="en-US" altLang="ja-JP" sz="2800" i="1" dirty="0" smtClean="0"/>
+              <a:rPr lang="en-US" altLang="ja-JP" sz="2800" i="1" dirty="0"/>
               <a:t>S</a:t>
             </a:r>
             <a:r>
-              <a:rPr lang="en-US" altLang="ja-JP" sz="2800" baseline="-25000" dirty="0" smtClean="0"/>
+              <a:rPr lang="en-US" altLang="ja-JP" sz="2800" baseline="-25000" dirty="0"/>
               <a:t>2</a:t>
             </a:r>
             <a:r>
-              <a:rPr kumimoji="1" lang="ja-JP" altLang="en-US" sz="2800" dirty="0" smtClean="0"/>
+              <a:rPr kumimoji="1" lang="ja-JP" altLang="en-US" sz="2800" dirty="0"/>
               <a:t>が</a:t>
             </a:r>
             <a:r>
-              <a:rPr kumimoji="1" lang="en-US" altLang="ja-JP" sz="2800" dirty="0" smtClean="0"/>
+              <a:rPr kumimoji="1" lang="en-US" altLang="ja-JP" sz="2800" dirty="0"/>
               <a:t>single entry, single exit</a:t>
             </a:r>
             <a:r>
-              <a:rPr kumimoji="1" lang="ja-JP" altLang="en-US" sz="2800" dirty="0" smtClean="0"/>
+              <a:rPr kumimoji="1" lang="ja-JP" altLang="en-US" sz="2800" dirty="0"/>
               <a:t>なら</a:t>
             </a:r>
             <a:r>
-              <a:rPr kumimoji="1" lang="en-US" altLang="ja-JP" sz="2800" dirty="0" smtClean="0"/>
+              <a:rPr kumimoji="1" lang="en-US" altLang="ja-JP" sz="2800" dirty="0"/>
               <a:t>single entry, single exit</a:t>
             </a:r>
             <a:r>
-              <a:rPr kumimoji="1" lang="ja-JP" altLang="en-US" sz="2800" dirty="0" smtClean="0"/>
+              <a:rPr kumimoji="1" lang="ja-JP" altLang="en-US" sz="2800" dirty="0"/>
               <a:t>である。</a:t>
             </a:r>
-            <a:endParaRPr kumimoji="1" lang="en-US" altLang="ja-JP" sz="2800" dirty="0" smtClean="0"/>
+            <a:endParaRPr kumimoji="1" lang="en-US" altLang="ja-JP" sz="2800" dirty="0"/>
           </a:p>
         </p:txBody>
       </p:sp>
@@ -14264,7 +14136,7 @@
           <a:lstStyle/>
           <a:p>
             <a:r>
-              <a:rPr lang="en-US" altLang="ja-JP" sz="2400" dirty="0" smtClean="0"/>
+              <a:rPr lang="en-US" altLang="ja-JP" sz="2400" dirty="0"/>
               <a:t>Entry</a:t>
             </a:r>
           </a:p>
@@ -14313,7 +14185,7 @@
           <a:p>
             <a:pPr algn="ctr"/>
             <a:r>
-              <a:rPr lang="en-US" altLang="ja-JP" sz="2800" dirty="0" smtClean="0">
+              <a:rPr lang="en-US" altLang="ja-JP" sz="2800" dirty="0">
                 <a:solidFill>
                   <a:schemeClr val="tx1"/>
                 </a:solidFill>
@@ -14430,7 +14302,7 @@
           <a:lstStyle/>
           <a:p>
             <a:r>
-              <a:rPr lang="en-US" altLang="ja-JP" sz="2800" dirty="0" smtClean="0"/>
+              <a:rPr lang="en-US" altLang="ja-JP" sz="2800" dirty="0"/>
               <a:t> x:=1</a:t>
             </a:r>
           </a:p>
@@ -14462,7 +14334,7 @@
           <a:lstStyle/>
           <a:p>
             <a:r>
-              <a:rPr lang="en-US" altLang="ja-JP" sz="2800" dirty="0" smtClean="0"/>
+              <a:rPr lang="en-US" altLang="ja-JP" sz="2800" dirty="0"/>
               <a:t> x:=2</a:t>
             </a:r>
           </a:p>
@@ -14566,7 +14438,7 @@
           <a:lstStyle/>
           <a:p>
             <a:r>
-              <a:rPr lang="en-US" altLang="ja-JP" sz="2400" dirty="0" smtClean="0"/>
+              <a:rPr lang="en-US" altLang="ja-JP" sz="2400" dirty="0"/>
               <a:t>Exit</a:t>
             </a:r>
           </a:p>
@@ -14595,7 +14467,7 @@
           <a:lstStyle/>
           <a:p>
             <a:r>
-              <a:rPr kumimoji="1" lang="en-US" altLang="ja-JP" sz="2400" dirty="0" smtClean="0"/>
+              <a:rPr kumimoji="1" lang="en-US" altLang="ja-JP" sz="2400" dirty="0"/>
               <a:t>T</a:t>
             </a:r>
             <a:endParaRPr kumimoji="1" lang="ja-JP" altLang="en-US" sz="2400" dirty="0"/>
@@ -14625,7 +14497,7 @@
           <a:lstStyle/>
           <a:p>
             <a:r>
-              <a:rPr kumimoji="1" lang="en-US" altLang="ja-JP" sz="2400" dirty="0" smtClean="0"/>
+              <a:rPr kumimoji="1" lang="en-US" altLang="ja-JP" sz="2400" dirty="0"/>
               <a:t>F</a:t>
             </a:r>
             <a:endParaRPr kumimoji="1" lang="ja-JP" altLang="en-US" sz="2400" dirty="0"/>
@@ -14691,7 +14563,7 @@
           <a:lstStyle/>
           <a:p>
             <a:r>
-              <a:rPr lang="en-US" altLang="ja-JP" sz="2800" dirty="0" smtClean="0"/>
+              <a:rPr lang="en-US" altLang="ja-JP" sz="2800" dirty="0"/>
               <a:t>  y := 3 </a:t>
             </a:r>
           </a:p>
@@ -14907,13 +14779,6 @@
   <p:clrMapOvr>
     <a:masterClrMapping/>
   </p:clrMapOvr>
-  <p:timing>
-    <p:tnLst>
-      <p:par>
-        <p:cTn xmlns:p14="http://schemas.microsoft.com/office/powerpoint/2010/main" id="1" dur="indefinite" restart="never" nodeType="tmRoot"/>
-      </p:par>
-    </p:tnLst>
-  </p:timing>
 </p:sld>
 </file>
 
